--- a/docs/TEST_Capstone_Presentation.pptx
+++ b/docs/TEST_Capstone_Presentation.pptx
@@ -42,6 +42,8 @@
     <p:sldId id="283" r:id="rId45"/>
     <p:sldId id="284" r:id="rId46"/>
     <p:sldId id="285" r:id="rId47"/>
+    <p:sldId id="290" r:id="rId52"/>
+    <p:sldId id="291" r:id="rId53"/>
   </p:sldIdLst>
   <p:sldSz cx="12192000" cy="6858000"/>
   <p:notesSz cx="6858000" cy="9144000"/>
@@ -13988,7 +13990,7 @@
 </file>
 
 <file path=ppt/slides/slide20.xml><?xml version="1.0" encoding="utf-8"?>
-<p:sld xmlns:a="http://schemas.openxmlformats.org/drawingml/2006/main" xmlns:r="http://schemas.openxmlformats.org/officeDocument/2006/relationships" xmlns:p="http://schemas.openxmlformats.org/presentationml/2006/main">
+<p:sld xmlns:a="http://schemas.openxmlformats.org/drawingml/2006/main" xmlns:p="http://schemas.openxmlformats.org/presentationml/2006/main" xmlns:r="http://schemas.openxmlformats.org/officeDocument/2006/relationships">
   <p:cSld>
     <p:spTree>
       <p:nvGrpSpPr>
@@ -13996,14 +13998,7 @@
         <p:cNvGrpSpPr/>
         <p:nvPr/>
       </p:nvGrpSpPr>
-      <p:grpSpPr>
-        <a:xfrm>
-          <a:off x="0" y="0"/>
-          <a:ext cx="0" cy="0"/>
-          <a:chOff x="0" y="0"/>
-          <a:chExt cx="0" cy="0"/>
-        </a:xfrm>
-      </p:grpSpPr>
+      <p:grpSpPr/>
       <p:sp>
         <p:nvSpPr>
           <p:cNvPr id="2" name="Text Placeholder 1"/>
@@ -14011,16 +14006,14 @@
             <a:spLocks noGrp="1"/>
           </p:cNvSpPr>
           <p:nvPr>
-            <p:ph type="body" sz="quarter" idx="13"/>
+            <p:ph type="body" idx="13" sz="quarter"/>
           </p:nvPr>
         </p:nvSpPr>
         <p:spPr/>
         <p:txBody>
           <a:bodyPr/>
           <a:lstStyle/>
-          <a:p>
-            <a:endParaRPr/>
-          </a:p>
+          <a:p/>
         </p:txBody>
       </p:sp>
       <p:sp>
@@ -14060,7 +14053,7 @@
           <a:lstStyle/>
           <a:p>
             <a:r>
-              <a:t>Future State and Recommendation</a:t>
+              <a:t>Extensions: Beyond the Requirements</a:t>
             </a:r>
           </a:p>
         </p:txBody>
@@ -14074,7 +14067,7 @@
 </file>
 
 <file path=ppt/slides/slide21.xml><?xml version="1.0" encoding="utf-8"?>
-<p:sld xmlns:a="http://schemas.openxmlformats.org/drawingml/2006/main" xmlns:r="http://schemas.openxmlformats.org/officeDocument/2006/relationships" xmlns:p="http://schemas.openxmlformats.org/presentationml/2006/main">
+<p:sld xmlns:a="http://schemas.openxmlformats.org/drawingml/2006/main" xmlns:p="http://schemas.openxmlformats.org/presentationml/2006/main" xmlns:r="http://schemas.openxmlformats.org/officeDocument/2006/relationships">
   <p:cSld>
     <p:spTree>
       <p:nvGrpSpPr>
@@ -14082,14 +14075,7 @@
         <p:cNvGrpSpPr/>
         <p:nvPr/>
       </p:nvGrpSpPr>
-      <p:grpSpPr>
-        <a:xfrm>
-          <a:off x="0" y="0"/>
-          <a:ext cx="0" cy="0"/>
-          <a:chOff x="0" y="0"/>
-          <a:chExt cx="0" cy="0"/>
-        </a:xfrm>
-      </p:grpSpPr>
+      <p:grpSpPr/>
       <p:sp>
         <p:nvSpPr>
           <p:cNvPr id="2" name="Title 1"/>
@@ -14106,7 +14092,7 @@
           <a:lstStyle/>
           <a:p>
             <a:r>
-              <a:t>Future State Proposal</a:t>
+              <a:t>Extensions Overview</a:t>
             </a:r>
           </a:p>
         </p:txBody>
@@ -14125,9 +14111,7 @@
         <p:txBody>
           <a:bodyPr/>
           <a:lstStyle/>
-          <a:p>
-            <a:endParaRPr/>
-          </a:p>
+          <a:p/>
         </p:txBody>
       </p:sp>
       <p:sp>
@@ -14170,7 +14154,6 @@
           <a:lstStyle/>
           <a:p>
             <a:pPr algn="ctr"/>
-            <a:endParaRPr/>
           </a:p>
         </p:txBody>
       </p:sp>
@@ -14182,8 +14165,8 @@
         </p:nvSpPr>
         <p:spPr>
           <a:xfrm>
-            <a:off x="400000" y="1000000"/>
-            <a:ext cx="3600000" cy="4800000"/>
+            <a:off x="400000" y="1100000"/>
+            <a:ext cx="3500000" cy="2400000"/>
           </a:xfrm>
           <a:prstGeom prst="roundRect">
             <a:avLst/>
@@ -14210,92 +14193,77 @@
           </a:fontRef>
         </p:style>
         <p:txBody>
-          <a:bodyPr wrap="square" rtlCol="0" anchor="ctr"/>
+          <a:bodyPr rtlCol="0" anchor="ctr" wrap="square" tIns="127000" bIns="127000" lIns="152400" rIns="152400"/>
           <a:lstStyle/>
           <a:p>
             <a:pPr algn="ctr"/>
             <a:r>
               <a:rPr sz="1600" b="1">
                 <a:solidFill>
-                  <a:srgbClr val="2E7D32"/>
-                </a:solidFill>
-              </a:rPr>
-              <a:t>Real-Time Ingestion</a:t>
-            </a:r>
-          </a:p>
-          <a:p>
-            <a:pPr>
-              <a:spcBef>
-                <a:spcPts val="1600"/>
-              </a:spcBef>
-            </a:pPr>
-            <a:r>
-              <a:rPr sz="1100" b="1">
-                <a:solidFill>
-                  <a:srgbClr val="2E7D32"/>
-                </a:solidFill>
-              </a:rPr>
-              <a:t>What:</a:t>
-            </a:r>
-          </a:p>
-          <a:p>
-            <a:r>
-              <a:rPr sz="1100">
-                <a:solidFill>
-                  <a:srgbClr val="2D2D2D"/>
-                </a:solidFill>
-              </a:rPr>
-              <a:t>Snowpipe + streams for continuous loading</a:t>
-            </a:r>
-          </a:p>
-          <a:p>
-            <a:pPr>
-              <a:spcBef>
-                <a:spcPts val="1200"/>
-              </a:spcBef>
-            </a:pPr>
-            <a:r>
-              <a:rPr sz="1100" b="1">
-                <a:solidFill>
-                  <a:srgbClr val="2E7D32"/>
-                </a:solidFill>
-              </a:rPr>
-              <a:t>Effort:</a:t>
-            </a:r>
-          </a:p>
-          <a:p>
-            <a:r>
-              <a:rPr sz="1100">
-                <a:solidFill>
-                  <a:srgbClr val="2D2D2D"/>
-                </a:solidFill>
-              </a:rPr>
-              <a:t>1-2 sprints</a:t>
-            </a:r>
-          </a:p>
-          <a:p>
-            <a:pPr>
-              <a:spcBef>
-                <a:spcPts val="1200"/>
-              </a:spcBef>
-            </a:pPr>
-            <a:r>
-              <a:rPr sz="1100" b="1">
-                <a:solidFill>
-                  <a:srgbClr val="2E7D32"/>
-                </a:solidFill>
-              </a:rPr>
-              <a:t>Business Benefit:</a:t>
-            </a:r>
-          </a:p>
-          <a:p>
-            <a:r>
-              <a:rPr sz="1100">
-                <a:solidFill>
-                  <a:srgbClr val="2D2D2D"/>
-                </a:solidFill>
-              </a:rPr>
-              <a:t>Live demand monitoring during storms</a:t>
+                  <a:srgbClr val="333333"/>
+                </a:solidFill>
+              </a:rPr>
+              <a:t>Streamlit Dashboard</a:t>
+            </a:r>
+          </a:p>
+          <a:p>
+            <a:r>
+              <a:rPr sz="1000" b="0">
+                <a:solidFill>
+                  <a:srgbClr val="333333"/>
+                </a:solidFill>
+              </a:rPr>
+              <a:t/>
+            </a:r>
+          </a:p>
+          <a:p>
+            <a:r>
+              <a:rPr sz="1200" b="0">
+                <a:solidFill>
+                  <a:srgbClr val="333333"/>
+                </a:solidFill>
+              </a:rPr>
+              <a:t>Deployed interactive app</a:t>
+            </a:r>
+          </a:p>
+          <a:p>
+            <a:r>
+              <a:rPr sz="1200" b="0">
+                <a:solidFill>
+                  <a:srgbClr val="333333"/>
+                </a:solidFill>
+              </a:rPr>
+              <a:t>6 progressive visualizations</a:t>
+            </a:r>
+          </a:p>
+          <a:p>
+            <a:r>
+              <a:rPr sz="1200" b="0">
+                <a:solidFill>
+                  <a:srgbClr val="333333"/>
+                </a:solidFill>
+              </a:rPr>
+              <a:t>Live Snowflake connection</a:t>
+            </a:r>
+          </a:p>
+          <a:p>
+            <a:r>
+              <a:rPr sz="1200" b="0">
+                <a:solidFill>
+                  <a:srgbClr val="333333"/>
+                </a:solidFill>
+              </a:rPr>
+              <a:t>Streamlit Community Cloud</a:t>
+            </a:r>
+          </a:p>
+          <a:p>
+            <a:r>
+              <a:rPr sz="1200" b="0">
+                <a:solidFill>
+                  <a:srgbClr val="333333"/>
+                </a:solidFill>
+              </a:rPr>
+              <a:t>CI/CD via GitHub Actions</a:t>
             </a:r>
           </a:p>
         </p:txBody>
@@ -14308,8 +14276,8 @@
         </p:nvSpPr>
         <p:spPr>
           <a:xfrm>
-            <a:off x="4300000" y="1000000"/>
-            <a:ext cx="3600000" cy="4800000"/>
+            <a:off x="4200000" y="1100000"/>
+            <a:ext cx="3500000" cy="2400000"/>
           </a:xfrm>
           <a:prstGeom prst="roundRect">
             <a:avLst/>
@@ -14336,92 +14304,77 @@
           </a:fontRef>
         </p:style>
         <p:txBody>
-          <a:bodyPr wrap="square" rtlCol="0" anchor="ctr"/>
+          <a:bodyPr rtlCol="0" anchor="ctr" wrap="square" tIns="127000" bIns="127000" lIns="152400" rIns="152400"/>
           <a:lstStyle/>
           <a:p>
             <a:pPr algn="ctr"/>
             <a:r>
               <a:rPr sz="1600" b="1">
                 <a:solidFill>
-                  <a:srgbClr val="0D47A1"/>
-                </a:solidFill>
-              </a:rPr>
-              <a:t>ML Forecasting</a:t>
-            </a:r>
-          </a:p>
-          <a:p>
-            <a:pPr>
-              <a:spcBef>
-                <a:spcPts val="1600"/>
-              </a:spcBef>
-            </a:pPr>
-            <a:r>
-              <a:rPr sz="1100" b="1">
-                <a:solidFill>
-                  <a:srgbClr val="0D47A1"/>
-                </a:solidFill>
-              </a:rPr>
-              <a:t>What:</a:t>
-            </a:r>
-          </a:p>
-          <a:p>
-            <a:r>
-              <a:rPr sz="1100">
-                <a:solidFill>
-                  <a:srgbClr val="2D2D2D"/>
-                </a:solidFill>
-              </a:rPr>
-              <a:t>Predict demand drops by borough before storms hit</a:t>
-            </a:r>
-          </a:p>
-          <a:p>
-            <a:pPr>
-              <a:spcBef>
-                <a:spcPts val="1200"/>
-              </a:spcBef>
-            </a:pPr>
-            <a:r>
-              <a:rPr sz="1100" b="1">
-                <a:solidFill>
-                  <a:srgbClr val="0D47A1"/>
-                </a:solidFill>
-              </a:rPr>
-              <a:t>Effort:</a:t>
-            </a:r>
-          </a:p>
-          <a:p>
-            <a:r>
-              <a:rPr sz="1100">
-                <a:solidFill>
-                  <a:srgbClr val="2D2D2D"/>
-                </a:solidFill>
-              </a:rPr>
-              <a:t>2-3 sprints</a:t>
-            </a:r>
-          </a:p>
-          <a:p>
-            <a:pPr>
-              <a:spcBef>
-                <a:spcPts val="1200"/>
-              </a:spcBef>
-            </a:pPr>
-            <a:r>
-              <a:rPr sz="1100" b="1">
-                <a:solidFill>
-                  <a:srgbClr val="0D47A1"/>
-                </a:solidFill>
-              </a:rPr>
-              <a:t>Business Benefit:</a:t>
-            </a:r>
-          </a:p>
-          <a:p>
-            <a:r>
-              <a:rPr sz="1100">
-                <a:solidFill>
-                  <a:srgbClr val="2D2D2D"/>
-                </a:solidFill>
-              </a:rPr>
-              <a:t>Proactive fleet positioning, fewer empty cabs</a:t>
+                  <a:srgbClr val="333333"/>
+                </a:solidFill>
+              </a:rPr>
+              <a:t>BigQuery ML</a:t>
+            </a:r>
+          </a:p>
+          <a:p>
+            <a:r>
+              <a:rPr sz="1000" b="0">
+                <a:solidFill>
+                  <a:srgbClr val="333333"/>
+                </a:solidFill>
+              </a:rPr>
+              <a:t/>
+            </a:r>
+          </a:p>
+          <a:p>
+            <a:r>
+              <a:rPr sz="1200" b="0">
+                <a:solidFill>
+                  <a:srgbClr val="333333"/>
+                </a:solidFill>
+              </a:rPr>
+              <a:t>K-Means trip segmentation</a:t>
+            </a:r>
+          </a:p>
+          <a:p>
+            <a:r>
+              <a:rPr sz="1200" b="0">
+                <a:solidFill>
+                  <a:srgbClr val="333333"/>
+                </a:solidFill>
+              </a:rPr>
+              <a:t>Tested k=3, 4, 5, 6</a:t>
+            </a:r>
+          </a:p>
+          <a:p>
+            <a:r>
+              <a:rPr sz="1200" b="0">
+                <a:solidFill>
+                  <a:srgbClr val="333333"/>
+                </a:solidFill>
+              </a:rPr>
+              <a:t>Davies-Bouldin evaluation</a:t>
+            </a:r>
+          </a:p>
+          <a:p>
+            <a:r>
+              <a:rPr sz="1200" b="0">
+                <a:solidFill>
+                  <a:srgbClr val="333333"/>
+                </a:solidFill>
+              </a:rPr>
+              <a:t>4 clusters selected</a:t>
+            </a:r>
+          </a:p>
+          <a:p>
+            <a:r>
+              <a:rPr sz="1200" b="0">
+                <a:solidFill>
+                  <a:srgbClr val="333333"/>
+                </a:solidFill>
+              </a:rPr>
+              <a:t>Zone-level behavior patterns</a:t>
             </a:r>
           </a:p>
         </p:txBody>
@@ -14434,8 +14387,8 @@
         </p:nvSpPr>
         <p:spPr>
           <a:xfrm>
-            <a:off x="8200000" y="1000000"/>
-            <a:ext cx="3600000" cy="4800000"/>
+            <a:off x="8000000" y="1100000"/>
+            <a:ext cx="3500000" cy="2400000"/>
           </a:xfrm>
           <a:prstGeom prst="roundRect">
             <a:avLst/>
@@ -14462,92 +14415,77 @@
           </a:fontRef>
         </p:style>
         <p:txBody>
-          <a:bodyPr wrap="square" rtlCol="0" anchor="ctr"/>
+          <a:bodyPr rtlCol="0" anchor="ctr" wrap="square" tIns="127000" bIns="127000" lIns="152400" rIns="152400"/>
           <a:lstStyle/>
           <a:p>
             <a:pPr algn="ctr"/>
             <a:r>
               <a:rPr sz="1600" b="1">
                 <a:solidFill>
-                  <a:srgbClr val="E65100"/>
-                </a:solidFill>
-              </a:rPr>
-              <a:t>Multi-City Expansion</a:t>
-            </a:r>
-          </a:p>
-          <a:p>
-            <a:pPr>
-              <a:spcBef>
-                <a:spcPts val="1600"/>
-              </a:spcBef>
-            </a:pPr>
-            <a:r>
-              <a:rPr sz="1100" b="1">
-                <a:solidFill>
-                  <a:srgbClr val="E65100"/>
-                </a:solidFill>
-              </a:rPr>
-              <a:t>What:</a:t>
-            </a:r>
-          </a:p>
-          <a:p>
-            <a:r>
-              <a:rPr sz="1100">
-                <a:solidFill>
-                  <a:srgbClr val="2D2D2D"/>
-                </a:solidFill>
-              </a:rPr>
-              <a:t>Replicate pipeline for Chicago, Boston, etc.</a:t>
-            </a:r>
-          </a:p>
-          <a:p>
-            <a:pPr>
-              <a:spcBef>
-                <a:spcPts val="1200"/>
-              </a:spcBef>
-            </a:pPr>
-            <a:r>
-              <a:rPr sz="1100" b="1">
-                <a:solidFill>
-                  <a:srgbClr val="E65100"/>
-                </a:solidFill>
-              </a:rPr>
-              <a:t>Effort:</a:t>
-            </a:r>
-          </a:p>
-          <a:p>
-            <a:r>
-              <a:rPr sz="1100">
-                <a:solidFill>
-                  <a:srgbClr val="2D2D2D"/>
-                </a:solidFill>
-              </a:rPr>
-              <a:t>3-4 sprints per city</a:t>
-            </a:r>
-          </a:p>
-          <a:p>
-            <a:pPr>
-              <a:spcBef>
-                <a:spcPts val="1200"/>
-              </a:spcBef>
-            </a:pPr>
-            <a:r>
-              <a:rPr sz="1100" b="1">
-                <a:solidFill>
-                  <a:srgbClr val="E65100"/>
-                </a:solidFill>
-              </a:rPr>
-              <a:t>Business Benefit:</a:t>
-            </a:r>
-          </a:p>
-          <a:p>
-            <a:r>
-              <a:rPr sz="1100">
-                <a:solidFill>
-                  <a:srgbClr val="2D2D2D"/>
-                </a:solidFill>
-              </a:rPr>
-              <a:t>National weather-demand intelligence</a:t>
+                  <a:srgbClr val="333333"/>
+                </a:solidFill>
+              </a:rPr>
+              <a:t>Pipeline Orchestration</a:t>
+            </a:r>
+          </a:p>
+          <a:p>
+            <a:r>
+              <a:rPr sz="1000" b="0">
+                <a:solidFill>
+                  <a:srgbClr val="333333"/>
+                </a:solidFill>
+              </a:rPr>
+              <a:t/>
+            </a:r>
+          </a:p>
+          <a:p>
+            <a:r>
+              <a:rPr sz="1200" b="0">
+                <a:solidFill>
+                  <a:srgbClr val="333333"/>
+                </a:solidFill>
+              </a:rPr>
+              <a:t>Single-command execution</a:t>
+            </a:r>
+          </a:p>
+          <a:p>
+            <a:r>
+              <a:rPr sz="1200" b="0">
+                <a:solidFill>
+                  <a:srgbClr val="333333"/>
+                </a:solidFill>
+              </a:rPr>
+              <a:t>7 steps, ~6 min end-to-end</a:t>
+            </a:r>
+          </a:p>
+          <a:p>
+            <a:r>
+              <a:rPr sz="1200" b="0">
+                <a:solidFill>
+                  <a:srgbClr val="333333"/>
+                </a:solidFill>
+              </a:rPr>
+              <a:t>Idempotent (safe to re-run)</a:t>
+            </a:r>
+          </a:p>
+          <a:p>
+            <a:r>
+              <a:rPr sz="1200" b="0">
+                <a:solidFill>
+                  <a:srgbClr val="333333"/>
+                </a:solidFill>
+              </a:rPr>
+              <a:t>Fail-fast with clear errors</a:t>
+            </a:r>
+          </a:p>
+          <a:p>
+            <a:r>
+              <a:rPr sz="1200" b="0">
+                <a:solidFill>
+                  <a:srgbClr val="333333"/>
+                </a:solidFill>
+              </a:rPr>
+              <a:t>Row count reconciliation</a:t>
             </a:r>
           </a:p>
         </p:txBody>
@@ -14560,8 +14498,8 @@
         </p:nvSpPr>
         <p:spPr>
           <a:xfrm>
-            <a:off x="400000" y="6000000"/>
-            <a:ext cx="11400000" cy="600000"/>
+            <a:off x="400000" y="3800000"/>
+            <a:ext cx="11400000" cy="900000"/>
           </a:xfrm>
           <a:prstGeom prst="roundRect">
             <a:avLst/>
@@ -14588,17 +14526,17 @@
           </a:fontRef>
         </p:style>
         <p:txBody>
-          <a:bodyPr wrap="square" rtlCol="0" anchor="ctr"/>
+          <a:bodyPr rtlCol="0" anchor="ctr" wrap="square" tIns="127000" bIns="127000" lIns="152400" rIns="152400"/>
           <a:lstStyle/>
           <a:p>
             <a:pPr algn="ctr"/>
             <a:r>
-              <a:rPr sz="1300" b="1">
-                <a:solidFill>
-                  <a:srgbClr val="2D2D2D"/>
-                </a:solidFill>
-              </a:rPr>
-              <a:t>Highest Impact: Real-Time Ingestion. Fleet operators need minute-level demand signals during active storms.</a:t>
+              <a:rPr sz="1300" b="0">
+                <a:solidFill>
+                  <a:srgbClr val="333333"/>
+                </a:solidFill>
+              </a:rPr>
+              <a:t>All three extensions are genuinely integrated into the core project. The Streamlit app queries the same Gold layer as Tableau, the ML model uses the same mart data, and orchestration builds the entire pipeline.</a:t>
             </a:r>
           </a:p>
         </p:txBody>
@@ -14612,7 +14550,7 @@
 </file>
 
 <file path=ppt/slides/slide22.xml><?xml version="1.0" encoding="utf-8"?>
-<p:sld xmlns:a="http://schemas.openxmlformats.org/drawingml/2006/main" xmlns:r="http://schemas.openxmlformats.org/officeDocument/2006/relationships" xmlns:p="http://schemas.openxmlformats.org/presentationml/2006/main">
+<p:sld xmlns:a="http://schemas.openxmlformats.org/drawingml/2006/main" xmlns:p="http://schemas.openxmlformats.org/presentationml/2006/main" xmlns:r="http://schemas.openxmlformats.org/officeDocument/2006/relationships">
   <p:cSld>
     <p:spTree>
       <p:nvGrpSpPr>
@@ -14620,14 +14558,7 @@
         <p:cNvGrpSpPr/>
         <p:nvPr/>
       </p:nvGrpSpPr>
-      <p:grpSpPr>
-        <a:xfrm>
-          <a:off x="0" y="0"/>
-          <a:ext cx="0" cy="0"/>
-          <a:chOff x="0" y="0"/>
-          <a:chExt cx="0" cy="0"/>
-        </a:xfrm>
-      </p:grpSpPr>
+      <p:grpSpPr/>
       <p:sp>
         <p:nvSpPr>
           <p:cNvPr id="2" name="Title 1"/>
@@ -14644,7 +14575,7 @@
           <a:lstStyle/>
           <a:p>
             <a:r>
-              <a:t>Future State Architecture</a:t>
+              <a:t>Extension: BigQuery ML Clustering</a:t>
             </a:r>
           </a:p>
         </p:txBody>
@@ -14663,9 +14594,7 @@
         <p:txBody>
           <a:bodyPr/>
           <a:lstStyle/>
-          <a:p>
-            <a:endParaRPr/>
-          </a:p>
+          <a:p/>
         </p:txBody>
       </p:sp>
       <p:sp>
@@ -14708,40 +14637,298 @@
           <a:lstStyle/>
           <a:p>
             <a:pPr algn="ctr"/>
-            <a:endParaRPr/>
-          </a:p>
-        </p:txBody>
-      </p:sp>
-      <p:sp>
-        <p:nvSpPr>
-          <p:cNvPr id="5" name="TextBox 4"/>
-          <p:cNvSpPr txBox="1"/>
+          </a:p>
+        </p:txBody>
+      </p:sp>
+      <p:sp>
+        <p:nvSpPr>
+          <p:cNvPr id="5" name="Rounded Rectangle 4"/>
+          <p:cNvSpPr/>
           <p:nvPr/>
         </p:nvSpPr>
         <p:spPr>
           <a:xfrm>
-            <a:off x="2000000" y="2500000"/>
-            <a:ext cx="8000000" cy="2000000"/>
+            <a:off x="400000" y="1100000"/>
+            <a:ext cx="5400000" cy="2000000"/>
           </a:xfrm>
-          <a:prstGeom prst="rect">
+          <a:prstGeom prst="roundRect">
             <a:avLst/>
           </a:prstGeom>
-          <a:noFill/>
+          <a:solidFill>
+            <a:srgbClr val="E3F2FD"/>
+          </a:solidFill>
+          <a:ln>
+            <a:noFill/>
+          </a:ln>
         </p:spPr>
-        <p:txBody>
-          <a:bodyPr wrap="none">
-            <a:spAutoFit/>
-          </a:bodyPr>
+        <p:style>
+          <a:lnRef idx="1">
+            <a:schemeClr val="accent1"/>
+          </a:lnRef>
+          <a:fillRef idx="3">
+            <a:schemeClr val="accent1"/>
+          </a:fillRef>
+          <a:effectRef idx="2">
+            <a:schemeClr val="accent1"/>
+          </a:effectRef>
+          <a:fontRef idx="minor">
+            <a:schemeClr val="lt1"/>
+          </a:fontRef>
+        </p:style>
+        <p:txBody>
+          <a:bodyPr rtlCol="0" anchor="ctr" wrap="square" tIns="127000" bIns="127000" lIns="152400" rIns="152400"/>
           <a:lstStyle/>
           <a:p>
             <a:pPr algn="ctr"/>
             <a:r>
-              <a:rPr sz="1800" i="1">
-                <a:solidFill>
-                  <a:srgbClr val="555555"/>
-                </a:solidFill>
-              </a:rPr>
-              <a:t>[Insert Future State Architecture Diagram]</a:t>
+              <a:rPr sz="1400" b="1">
+                <a:solidFill>
+                  <a:srgbClr val="333333"/>
+                </a:solidFill>
+              </a:rPr>
+              <a:t>Approach</a:t>
+            </a:r>
+          </a:p>
+          <a:p>
+            <a:r>
+              <a:rPr sz="1000" b="0">
+                <a:solidFill>
+                  <a:srgbClr val="333333"/>
+                </a:solidFill>
+              </a:rPr>
+              <a:t/>
+            </a:r>
+          </a:p>
+          <a:p>
+            <a:r>
+              <a:rPr sz="1200" b="0">
+                <a:solidFill>
+                  <a:srgbClr val="333333"/>
+                </a:solidFill>
+              </a:rPr>
+              <a:t>Algorithm: K-Means (BigQuery ML)</a:t>
+            </a:r>
+          </a:p>
+          <a:p>
+            <a:r>
+              <a:rPr sz="1200" b="0">
+                <a:solidFill>
+                  <a:srgbClr val="333333"/>
+                </a:solidFill>
+              </a:rPr>
+              <a:t>Features: distance, duration, fare, tip, trip count,</a:t>
+            </a:r>
+          </a:p>
+          <a:p>
+            <a:r>
+              <a:rPr sz="1200" b="0">
+                <a:solidFill>
+                  <a:srgbClr val="333333"/>
+                </a:solidFill>
+              </a:rPr>
+              <a:t>  rush hour %, night %, weekend %, adverse weather %</a:t>
+            </a:r>
+          </a:p>
+          <a:p>
+            <a:r>
+              <a:rPr sz="1200" b="0">
+                <a:solidFill>
+                  <a:srgbClr val="333333"/>
+                </a:solidFill>
+              </a:rPr>
+              <a:t>Evaluation: Davies-Bouldin Index</a:t>
+            </a:r>
+          </a:p>
+          <a:p>
+            <a:r>
+              <a:rPr sz="1200" b="0">
+                <a:solidFill>
+                  <a:srgbClr val="333333"/>
+                </a:solidFill>
+              </a:rPr>
+              <a:t>  k=3 (1.78), k=4 (1.42), k=5 (1.50), k=6 (1.40)</a:t>
+            </a:r>
+          </a:p>
+          <a:p>
+            <a:r>
+              <a:rPr sz="1200" b="1">
+                <a:solidFill>
+                  <a:srgbClr val="333333"/>
+                </a:solidFill>
+              </a:rPr>
+              <a:t>Selected: k=4 (best quality + interpretability balance)</a:t>
+            </a:r>
+          </a:p>
+        </p:txBody>
+      </p:sp>
+      <p:sp>
+        <p:nvSpPr>
+          <p:cNvPr id="6" name="Rounded Rectangle 5"/>
+          <p:cNvSpPr/>
+          <p:nvPr/>
+        </p:nvSpPr>
+        <p:spPr>
+          <a:xfrm>
+            <a:off x="6100000" y="1100000"/>
+            <a:ext cx="5700000" cy="2000000"/>
+          </a:xfrm>
+          <a:prstGeom prst="roundRect">
+            <a:avLst/>
+          </a:prstGeom>
+          <a:solidFill>
+            <a:srgbClr val="FFF3E0"/>
+          </a:solidFill>
+          <a:ln>
+            <a:noFill/>
+          </a:ln>
+        </p:spPr>
+        <p:style>
+          <a:lnRef idx="1">
+            <a:schemeClr val="accent1"/>
+          </a:lnRef>
+          <a:fillRef idx="3">
+            <a:schemeClr val="accent1"/>
+          </a:fillRef>
+          <a:effectRef idx="2">
+            <a:schemeClr val="accent1"/>
+          </a:effectRef>
+          <a:fontRef idx="minor">
+            <a:schemeClr val="lt1"/>
+          </a:fontRef>
+        </p:style>
+        <p:txBody>
+          <a:bodyPr rtlCol="0" anchor="ctr" wrap="square" tIns="127000" bIns="127000" lIns="152400" rIns="152400"/>
+          <a:lstStyle/>
+          <a:p>
+            <a:pPr algn="ctr"/>
+            <a:r>
+              <a:rPr sz="1400" b="1">
+                <a:solidFill>
+                  <a:srgbClr val="333333"/>
+                </a:solidFill>
+              </a:rPr>
+              <a:t>4 Trip Segments Identified</a:t>
+            </a:r>
+          </a:p>
+          <a:p>
+            <a:r>
+              <a:rPr sz="1000" b="0">
+                <a:solidFill>
+                  <a:srgbClr val="333333"/>
+                </a:solidFill>
+              </a:rPr>
+              <a:t/>
+            </a:r>
+          </a:p>
+          <a:p>
+            <a:r>
+              <a:rPr sz="1200" b="0">
+                <a:solidFill>
+                  <a:srgbClr val="333333"/>
+                </a:solidFill>
+              </a:rPr>
+              <a:t>Cluster 1 - Standard Trips: 5 mi, 23 min, $32 avg</a:t>
+            </a:r>
+          </a:p>
+          <a:p>
+            <a:r>
+              <a:rPr sz="1200" b="0">
+                <a:solidFill>
+                  <a:srgbClr val="333333"/>
+                </a:solidFill>
+              </a:rPr>
+              <a:t>Cluster 2 - High-Value Long: 9 mi, 28 min, $72 avg</a:t>
+            </a:r>
+          </a:p>
+          <a:p>
+            <a:r>
+              <a:rPr sz="1200" b="0">
+                <a:solidFill>
+                  <a:srgbClr val="333333"/>
+                </a:solidFill>
+              </a:rPr>
+              <a:t>Cluster 3 - Short Everyday: 2.4 mi, 15 min, $25 avg</a:t>
+            </a:r>
+          </a:p>
+          <a:p>
+            <a:r>
+              <a:rPr sz="1200" b="0">
+                <a:solidFill>
+                  <a:srgbClr val="333333"/>
+                </a:solidFill>
+              </a:rPr>
+              <a:t>Cluster 4 - Slow/Congested: 7.6 mi, 36 min, $39 avg</a:t>
+            </a:r>
+          </a:p>
+          <a:p>
+            <a:r>
+              <a:rPr sz="1000" b="0">
+                <a:solidFill>
+                  <a:srgbClr val="333333"/>
+                </a:solidFill>
+              </a:rPr>
+              <a:t/>
+            </a:r>
+          </a:p>
+          <a:p>
+            <a:r>
+              <a:rPr sz="1200" b="1">
+                <a:solidFill>
+                  <a:srgbClr val="333333"/>
+                </a:solidFill>
+              </a:rPr>
+              <a:t>Short trips (Cluster 3) dominate: 375K of 470K sample</a:t>
+            </a:r>
+          </a:p>
+        </p:txBody>
+      </p:sp>
+      <p:sp>
+        <p:nvSpPr>
+          <p:cNvPr id="7" name="Rounded Rectangle 6"/>
+          <p:cNvSpPr/>
+          <p:nvPr/>
+        </p:nvSpPr>
+        <p:spPr>
+          <a:xfrm>
+            <a:off x="400000" y="3400000"/>
+            <a:ext cx="11400000" cy="900000"/>
+          </a:xfrm>
+          <a:prstGeom prst="roundRect">
+            <a:avLst/>
+          </a:prstGeom>
+          <a:solidFill>
+            <a:srgbClr val="E8F5E9"/>
+          </a:solidFill>
+          <a:ln>
+            <a:noFill/>
+          </a:ln>
+        </p:spPr>
+        <p:style>
+          <a:lnRef idx="1">
+            <a:schemeClr val="accent1"/>
+          </a:lnRef>
+          <a:fillRef idx="3">
+            <a:schemeClr val="accent1"/>
+          </a:fillRef>
+          <a:effectRef idx="2">
+            <a:schemeClr val="accent1"/>
+          </a:effectRef>
+          <a:fontRef idx="minor">
+            <a:schemeClr val="lt1"/>
+          </a:fontRef>
+        </p:style>
+        <p:txBody>
+          <a:bodyPr rtlCol="0" anchor="ctr" wrap="square" tIns="127000" bIns="127000" lIns="152400" rIns="152400"/>
+          <a:lstStyle/>
+          <a:p>
+            <a:pPr algn="ctr"/>
+            <a:r>
+              <a:rPr sz="1200" b="0">
+                <a:solidFill>
+                  <a:srgbClr val="333333"/>
+                </a:solidFill>
+              </a:rPr>
+              <a:t>Key Finding: Weather showed minimal variation across clusters (~10% adverse in all 4). This confirms weather impacts demand volume (fewer trips happen) rather than trip characteristics (distance, fare, duration stay the same). Independently validates the core Streamlit finding.</a:t>
             </a:r>
           </a:p>
         </p:txBody>
@@ -14755,7 +14942,7 @@
 </file>
 
 <file path=ppt/slides/slide23.xml><?xml version="1.0" encoding="utf-8"?>
-<p:sld xmlns:a="http://schemas.openxmlformats.org/drawingml/2006/main" xmlns:r="http://schemas.openxmlformats.org/officeDocument/2006/relationships" xmlns:p="http://schemas.openxmlformats.org/presentationml/2006/main">
+<p:sld xmlns:a="http://schemas.openxmlformats.org/drawingml/2006/main" xmlns:p="http://schemas.openxmlformats.org/presentationml/2006/main" xmlns:r="http://schemas.openxmlformats.org/officeDocument/2006/relationships">
   <p:cSld>
     <p:spTree>
       <p:nvGrpSpPr>
@@ -14763,14 +14950,7 @@
         <p:cNvGrpSpPr/>
         <p:nvPr/>
       </p:nvGrpSpPr>
-      <p:grpSpPr>
-        <a:xfrm>
-          <a:off x="0" y="0"/>
-          <a:ext cx="0" cy="0"/>
-          <a:chOff x="0" y="0"/>
-          <a:chExt cx="0" cy="0"/>
-        </a:xfrm>
-      </p:grpSpPr>
+      <p:grpSpPr/>
       <p:sp>
         <p:nvSpPr>
           <p:cNvPr id="2" name="Title 1"/>
@@ -14787,7 +14967,7 @@
           <a:lstStyle/>
           <a:p>
             <a:r>
-              <a:t>Recommendation</a:t>
+              <a:t>Extension: Pipeline Orchestration</a:t>
             </a:r>
           </a:p>
         </p:txBody>
@@ -14806,9 +14986,7 @@
         <p:txBody>
           <a:bodyPr/>
           <a:lstStyle/>
-          <a:p>
-            <a:endParaRPr/>
-          </a:p>
+          <a:p/>
         </p:txBody>
       </p:sp>
       <p:sp>
@@ -14851,7 +15029,6 @@
           <a:lstStyle/>
           <a:p>
             <a:pPr algn="ctr"/>
-            <a:endParaRPr/>
           </a:p>
         </p:txBody>
       </p:sp>
@@ -14863,8 +15040,330 @@
         </p:nvSpPr>
         <p:spPr>
           <a:xfrm>
-            <a:off x="400000" y="1200000"/>
-            <a:ext cx="11400000" cy="1800000"/>
+            <a:off x="400000" y="1100000"/>
+            <a:ext cx="5400000" cy="2800000"/>
+          </a:xfrm>
+          <a:prstGeom prst="roundRect">
+            <a:avLst/>
+          </a:prstGeom>
+          <a:solidFill>
+            <a:srgbClr val="FFF3E0"/>
+          </a:solidFill>
+          <a:ln>
+            <a:noFill/>
+          </a:ln>
+        </p:spPr>
+        <p:style>
+          <a:lnRef idx="1">
+            <a:schemeClr val="accent1"/>
+          </a:lnRef>
+          <a:fillRef idx="3">
+            <a:schemeClr val="accent1"/>
+          </a:fillRef>
+          <a:effectRef idx="2">
+            <a:schemeClr val="accent1"/>
+          </a:effectRef>
+          <a:fontRef idx="minor">
+            <a:schemeClr val="lt1"/>
+          </a:fontRef>
+        </p:style>
+        <p:txBody>
+          <a:bodyPr rtlCol="0" anchor="ctr" wrap="square" tIns="127000" bIns="127000" lIns="152400" rIns="152400"/>
+          <a:lstStyle/>
+          <a:p>
+            <a:pPr algn="ctr"/>
+            <a:r>
+              <a:rPr sz="1400" b="1">
+                <a:solidFill>
+                  <a:srgbClr val="333333"/>
+                </a:solidFill>
+              </a:rPr>
+              <a:t>One Command, Full Pipeline</a:t>
+            </a:r>
+          </a:p>
+          <a:p>
+            <a:r>
+              <a:rPr sz="1000" b="0">
+                <a:solidFill>
+                  <a:srgbClr val="333333"/>
+                </a:solidFill>
+              </a:rPr>
+              <a:t/>
+            </a:r>
+          </a:p>
+          <a:p>
+            <a:r>
+              <a:rPr sz="1300" b="1">
+                <a:solidFill>
+                  <a:srgbClr val="333333"/>
+                </a:solidFill>
+              </a:rPr>
+              <a:t>python pipeline/orchestrate.py</a:t>
+            </a:r>
+          </a:p>
+          <a:p>
+            <a:r>
+              <a:rPr sz="1000" b="0">
+                <a:solidFill>
+                  <a:srgbClr val="333333"/>
+                </a:solidFill>
+              </a:rPr>
+              <a:t/>
+            </a:r>
+          </a:p>
+          <a:p>
+            <a:r>
+              <a:rPr sz="1200" b="0">
+                <a:solidFill>
+                  <a:srgbClr val="333333"/>
+                </a:solidFill>
+              </a:rPr>
+              <a:t>Step 1: Create Bronze infrastructure (stage, tables)</a:t>
+            </a:r>
+          </a:p>
+          <a:p>
+            <a:r>
+              <a:rPr sz="1200" b="0">
+                <a:solidFill>
+                  <a:srgbClr val="333333"/>
+                </a:solidFill>
+              </a:rPr>
+              <a:t>Step 2: Load taxi + zone data from S3 (39.2M rows)</a:t>
+            </a:r>
+          </a:p>
+          <a:p>
+            <a:r>
+              <a:rPr sz="1200" b="0">
+                <a:solidFill>
+                  <a:srgbClr val="333333"/>
+                </a:solidFill>
+              </a:rPr>
+              <a:t>Step 3: Fetch weather from Open-Meteo API (7,248 hrs)</a:t>
+            </a:r>
+          </a:p>
+          <a:p>
+            <a:r>
+              <a:rPr sz="1200" b="0">
+                <a:solidFill>
+                  <a:srgbClr val="333333"/>
+                </a:solidFill>
+              </a:rPr>
+              <a:t>Step 4: Verify Bronze row counts (reconciliation)</a:t>
+            </a:r>
+          </a:p>
+          <a:p>
+            <a:r>
+              <a:rPr sz="1200" b="0">
+                <a:solidFill>
+                  <a:srgbClr val="333333"/>
+                </a:solidFill>
+              </a:rPr>
+              <a:t>Step 5: dbt run (Silver + Gold transformations)</a:t>
+            </a:r>
+          </a:p>
+          <a:p>
+            <a:r>
+              <a:rPr sz="1200" b="0">
+                <a:solidFill>
+                  <a:srgbClr val="333333"/>
+                </a:solidFill>
+              </a:rPr>
+              <a:t>Step 6: dbt test (32 automated quality checks)</a:t>
+            </a:r>
+          </a:p>
+          <a:p>
+            <a:r>
+              <a:rPr sz="1200" b="0">
+                <a:solidFill>
+                  <a:srgbClr val="333333"/>
+                </a:solidFill>
+              </a:rPr>
+              <a:t>Step 7: Print summary with counts at every layer</a:t>
+            </a:r>
+          </a:p>
+        </p:txBody>
+      </p:sp>
+      <p:sp>
+        <p:nvSpPr>
+          <p:cNvPr id="6" name="Rounded Rectangle 5"/>
+          <p:cNvSpPr/>
+          <p:nvPr/>
+        </p:nvSpPr>
+        <p:spPr>
+          <a:xfrm>
+            <a:off x="6100000" y="1100000"/>
+            <a:ext cx="5700000" cy="2800000"/>
+          </a:xfrm>
+          <a:prstGeom prst="roundRect">
+            <a:avLst/>
+          </a:prstGeom>
+          <a:solidFill>
+            <a:srgbClr val="E8F5E9"/>
+          </a:solidFill>
+          <a:ln>
+            <a:noFill/>
+          </a:ln>
+        </p:spPr>
+        <p:style>
+          <a:lnRef idx="1">
+            <a:schemeClr val="accent1"/>
+          </a:lnRef>
+          <a:fillRef idx="3">
+            <a:schemeClr val="accent1"/>
+          </a:fillRef>
+          <a:effectRef idx="2">
+            <a:schemeClr val="accent1"/>
+          </a:effectRef>
+          <a:fontRef idx="minor">
+            <a:schemeClr val="lt1"/>
+          </a:fontRef>
+        </p:style>
+        <p:txBody>
+          <a:bodyPr rtlCol="0" anchor="ctr" wrap="square" tIns="127000" bIns="127000" lIns="152400" rIns="152400"/>
+          <a:lstStyle/>
+          <a:p>
+            <a:pPr algn="ctr"/>
+            <a:r>
+              <a:rPr sz="1400" b="1">
+                <a:solidFill>
+                  <a:srgbClr val="333333"/>
+                </a:solidFill>
+              </a:rPr>
+              <a:t>Design Properties</a:t>
+            </a:r>
+          </a:p>
+          <a:p>
+            <a:r>
+              <a:rPr sz="1000" b="0">
+                <a:solidFill>
+                  <a:srgbClr val="333333"/>
+                </a:solidFill>
+              </a:rPr>
+              <a:t/>
+            </a:r>
+          </a:p>
+          <a:p>
+            <a:r>
+              <a:rPr sz="1300" b="1">
+                <a:solidFill>
+                  <a:srgbClr val="333333"/>
+                </a:solidFill>
+              </a:rPr>
+              <a:t>Idempotent</a:t>
+            </a:r>
+          </a:p>
+          <a:p>
+            <a:r>
+              <a:rPr sz="1100" b="0">
+                <a:solidFill>
+                  <a:srgbClr val="333333"/>
+                </a:solidFill>
+              </a:rPr>
+              <a:t>  CREATE OR REPLACE + COPY INTO means</a:t>
+            </a:r>
+          </a:p>
+          <a:p>
+            <a:r>
+              <a:rPr sz="1100" b="0">
+                <a:solidFill>
+                  <a:srgbClr val="333333"/>
+                </a:solidFill>
+              </a:rPr>
+              <a:t>  re-running never duplicates data</a:t>
+            </a:r>
+          </a:p>
+          <a:p>
+            <a:r>
+              <a:rPr sz="1000" b="0">
+                <a:solidFill>
+                  <a:srgbClr val="333333"/>
+                </a:solidFill>
+              </a:rPr>
+              <a:t/>
+            </a:r>
+          </a:p>
+          <a:p>
+            <a:r>
+              <a:rPr sz="1300" b="1">
+                <a:solidFill>
+                  <a:srgbClr val="333333"/>
+                </a:solidFill>
+              </a:rPr>
+              <a:t>Fail-Fast</a:t>
+            </a:r>
+          </a:p>
+          <a:p>
+            <a:r>
+              <a:rPr sz="1100" b="0">
+                <a:solidFill>
+                  <a:srgbClr val="333333"/>
+                </a:solidFill>
+              </a:rPr>
+              <a:t>  Any step failure stops immediately</a:t>
+            </a:r>
+          </a:p>
+          <a:p>
+            <a:r>
+              <a:rPr sz="1100" b="0">
+                <a:solidFill>
+                  <a:srgbClr val="333333"/>
+                </a:solidFill>
+              </a:rPr>
+              <a:t>  with a clear error message</a:t>
+            </a:r>
+          </a:p>
+          <a:p>
+            <a:r>
+              <a:rPr sz="1000" b="0">
+                <a:solidFill>
+                  <a:srgbClr val="333333"/>
+                </a:solidFill>
+              </a:rPr>
+              <a:t/>
+            </a:r>
+          </a:p>
+          <a:p>
+            <a:r>
+              <a:rPr sz="1300" b="1">
+                <a:solidFill>
+                  <a:srgbClr val="333333"/>
+                </a:solidFill>
+              </a:rPr>
+              <a:t>Verified</a:t>
+            </a:r>
+          </a:p>
+          <a:p>
+            <a:r>
+              <a:rPr sz="1100" b="0">
+                <a:solidFill>
+                  <a:srgbClr val="333333"/>
+                </a:solidFill>
+              </a:rPr>
+              <a:t>  Row counts checked against expected</a:t>
+            </a:r>
+          </a:p>
+          <a:p>
+            <a:r>
+              <a:rPr sz="1100" b="0">
+                <a:solidFill>
+                  <a:srgbClr val="333333"/>
+                </a:solidFill>
+              </a:rPr>
+              <a:t>  minimums before proceeding to next step</a:t>
+            </a:r>
+          </a:p>
+        </p:txBody>
+      </p:sp>
+      <p:sp>
+        <p:nvSpPr>
+          <p:cNvPr id="7" name="Rounded Rectangle 6"/>
+          <p:cNvSpPr/>
+          <p:nvPr/>
+        </p:nvSpPr>
+        <p:spPr>
+          <a:xfrm>
+            <a:off x="400000" y="4200000"/>
+            <a:ext cx="11400000" cy="700000"/>
           </a:xfrm>
           <a:prstGeom prst="roundRect">
             <a:avLst/>
@@ -14891,164 +15390,17 @@
           </a:fontRef>
         </p:style>
         <p:txBody>
-          <a:bodyPr wrap="square" rtlCol="0" anchor="ctr"/>
+          <a:bodyPr rtlCol="0" anchor="ctr" wrap="square" tIns="127000" bIns="127000" lIns="152400" rIns="152400"/>
           <a:lstStyle/>
           <a:p>
             <a:pPr algn="ctr"/>
             <a:r>
-              <a:rPr sz="2200" b="1">
-                <a:solidFill>
-                  <a:srgbClr val="0D47A1"/>
-                </a:solidFill>
-              </a:rPr>
-              <a:t>[One clear recommendation tied to the finding]</a:t>
-            </a:r>
-          </a:p>
-          <a:p>
-            <a:pPr algn="ctr">
-              <a:spcBef>
-                <a:spcPts val="800"/>
-              </a:spcBef>
-            </a:pPr>
-            <a:r>
-              <a:rPr sz="1400" i="1">
-                <a:solidFill>
-                  <a:srgbClr val="555555"/>
-                </a:solidFill>
-              </a:rPr>
-              <a:t>e.g., Pre-position 15% more vehicles in outer boroughs during forecasted rain events</a:t>
-            </a:r>
-          </a:p>
-        </p:txBody>
-      </p:sp>
-      <p:sp>
-        <p:nvSpPr>
-          <p:cNvPr id="6" name="Rounded Rectangle 5"/>
-          <p:cNvSpPr/>
-          <p:nvPr/>
-        </p:nvSpPr>
-        <p:spPr>
-          <a:xfrm>
-            <a:off x="400000" y="3400000"/>
-            <a:ext cx="5400000" cy="1500000"/>
-          </a:xfrm>
-          <a:prstGeom prst="roundRect">
-            <a:avLst/>
-          </a:prstGeom>
-          <a:solidFill>
-            <a:srgbClr val="E8F5E9"/>
-          </a:solidFill>
-          <a:ln>
-            <a:noFill/>
-          </a:ln>
-        </p:spPr>
-        <p:style>
-          <a:lnRef idx="1">
-            <a:schemeClr val="accent1"/>
-          </a:lnRef>
-          <a:fillRef idx="3">
-            <a:schemeClr val="accent1"/>
-          </a:fillRef>
-          <a:effectRef idx="2">
-            <a:schemeClr val="accent1"/>
-          </a:effectRef>
-          <a:fontRef idx="minor">
-            <a:schemeClr val="lt1"/>
-          </a:fontRef>
-        </p:style>
-        <p:txBody>
-          <a:bodyPr wrap="square" rtlCol="0" anchor="ctr"/>
-          <a:lstStyle/>
-          <a:p>
-            <a:pPr algn="ctr"/>
-            <a:r>
-              <a:rPr sz="1400" b="1">
-                <a:solidFill>
-                  <a:srgbClr val="2E7D32"/>
-                </a:solidFill>
-              </a:rPr>
-              <a:t>Actionable Next Step</a:t>
-            </a:r>
-          </a:p>
-          <a:p>
-            <a:pPr>
-              <a:spcBef>
-                <a:spcPts val="800"/>
-              </a:spcBef>
-            </a:pPr>
-            <a:r>
-              <a:rPr sz="1300">
-                <a:solidFill>
-                  <a:srgbClr val="2D2D2D"/>
-                </a:solidFill>
-              </a:rPr>
-              <a:t>[What the client should do first]</a:t>
-            </a:r>
-          </a:p>
-        </p:txBody>
-      </p:sp>
-      <p:sp>
-        <p:nvSpPr>
-          <p:cNvPr id="7" name="Rounded Rectangle 6"/>
-          <p:cNvSpPr/>
-          <p:nvPr/>
-        </p:nvSpPr>
-        <p:spPr>
-          <a:xfrm>
-            <a:off x="6100000" y="3400000"/>
-            <a:ext cx="5700000" cy="1500000"/>
-          </a:xfrm>
-          <a:prstGeom prst="roundRect">
-            <a:avLst/>
-          </a:prstGeom>
-          <a:solidFill>
-            <a:srgbClr val="FFF3E0"/>
-          </a:solidFill>
-          <a:ln>
-            <a:noFill/>
-          </a:ln>
-        </p:spPr>
-        <p:style>
-          <a:lnRef idx="1">
-            <a:schemeClr val="accent1"/>
-          </a:lnRef>
-          <a:fillRef idx="3">
-            <a:schemeClr val="accent1"/>
-          </a:fillRef>
-          <a:effectRef idx="2">
-            <a:schemeClr val="accent1"/>
-          </a:effectRef>
-          <a:fontRef idx="minor">
-            <a:schemeClr val="lt1"/>
-          </a:fontRef>
-        </p:style>
-        <p:txBody>
-          <a:bodyPr wrap="square" rtlCol="0" anchor="ctr"/>
-          <a:lstStyle/>
-          <a:p>
-            <a:pPr algn="ctr"/>
-            <a:r>
-              <a:rPr sz="1400" b="1">
-                <a:solidFill>
-                  <a:srgbClr val="E65100"/>
-                </a:solidFill>
-              </a:rPr>
-              <a:t>Implementation Cost</a:t>
-            </a:r>
-          </a:p>
-          <a:p>
-            <a:pPr>
-              <a:spcBef>
-                <a:spcPts val="800"/>
-              </a:spcBef>
-            </a:pPr>
-            <a:r>
-              <a:rPr sz="1300">
-                <a:solidFill>
-                  <a:srgbClr val="2D2D2D"/>
-                </a:solidFill>
-              </a:rPr>
-              <a:t>[What it would take: time, team, tools]</a:t>
+              <a:rPr sz="1200" b="0">
+                <a:solidFill>
+                  <a:srgbClr val="333333"/>
+                </a:solidFill>
+              </a:rPr>
+              <a:t>Any team member can rebuild the entire pipeline from scratch with one command (~6 min). This eliminates 'works on my machine' and proves results are fully reproducible.</a:t>
             </a:r>
           </a:p>
         </p:txBody>
@@ -15080,12 +15432,12 @@
       </p:grpSpPr>
       <p:sp>
         <p:nvSpPr>
-          <p:cNvPr id="2" name="Title 1"/>
-          <p:cNvSpPr>
-            <a:spLocks noGrp="1"/>
-          </p:cNvSpPr>
-          <p:nvPr>
-            <p:ph type="ctrTitle"/>
+          <p:cNvPr id="2" name="Text Placeholder 1"/>
+          <p:cNvSpPr>
+            <a:spLocks noGrp="1"/>
+          </p:cNvSpPr>
+          <p:nvPr>
+            <p:ph type="body" sz="quarter" idx="13"/>
           </p:nvPr>
         </p:nvSpPr>
         <p:spPr/>
@@ -15093,15 +15445,34 @@
           <a:bodyPr/>
           <a:lstStyle/>
           <a:p>
-            <a:r>
-              <a:t>Thank You</a:t>
-            </a:r>
-          </a:p>
-        </p:txBody>
-      </p:sp>
-      <p:sp>
-        <p:nvSpPr>
-          <p:cNvPr id="3" name="Subtitle 2"/>
+            <a:endParaRPr/>
+          </a:p>
+        </p:txBody>
+      </p:sp>
+      <p:sp>
+        <p:nvSpPr>
+          <p:cNvPr id="3" name="Title 2"/>
+          <p:cNvSpPr>
+            <a:spLocks noGrp="1"/>
+          </p:cNvSpPr>
+          <p:nvPr>
+            <p:ph type="title"/>
+          </p:nvPr>
+        </p:nvSpPr>
+        <p:spPr/>
+        <p:txBody>
+          <a:bodyPr/>
+          <a:lstStyle/>
+          <a:p>
+            <a:r>
+              <a:t>6</a:t>
+            </a:r>
+          </a:p>
+        </p:txBody>
+      </p:sp>
+      <p:sp>
+        <p:nvSpPr>
+          <p:cNvPr id="4" name="Subtitle 3"/>
           <p:cNvSpPr>
             <a:spLocks noGrp="1"/>
           </p:cNvSpPr>
@@ -15115,7 +15486,7 @@
           <a:lstStyle/>
           <a:p>
             <a:r>
-              <a:t>Questions?</a:t>
+              <a:t>Future State and Recommendation</a:t>
             </a:r>
           </a:p>
         </p:txBody>
@@ -15161,7 +15532,7 @@
           <a:lstStyle/>
           <a:p>
             <a:r>
-              <a:t>AI Use Disclosure</a:t>
+              <a:t>Future State Proposal</a:t>
             </a:r>
           </a:p>
         </p:txBody>
@@ -15237,6 +15608,1061 @@
         </p:nvSpPr>
         <p:spPr>
           <a:xfrm>
+            <a:off x="400000" y="1000000"/>
+            <a:ext cx="3600000" cy="4800000"/>
+          </a:xfrm>
+          <a:prstGeom prst="roundRect">
+            <a:avLst/>
+          </a:prstGeom>
+          <a:solidFill>
+            <a:srgbClr val="E8F5E9"/>
+          </a:solidFill>
+          <a:ln>
+            <a:noFill/>
+          </a:ln>
+        </p:spPr>
+        <p:style>
+          <a:lnRef idx="1">
+            <a:schemeClr val="accent1"/>
+          </a:lnRef>
+          <a:fillRef idx="3">
+            <a:schemeClr val="accent1"/>
+          </a:fillRef>
+          <a:effectRef idx="2">
+            <a:schemeClr val="accent1"/>
+          </a:effectRef>
+          <a:fontRef idx="minor">
+            <a:schemeClr val="lt1"/>
+          </a:fontRef>
+        </p:style>
+        <p:txBody>
+          <a:bodyPr wrap="square" rtlCol="0" anchor="ctr"/>
+          <a:lstStyle/>
+          <a:p>
+            <a:pPr algn="ctr"/>
+            <a:r>
+              <a:rPr sz="1600" b="1">
+                <a:solidFill>
+                  <a:srgbClr val="2E7D32"/>
+                </a:solidFill>
+              </a:rPr>
+              <a:t>Real-Time Ingestion</a:t>
+            </a:r>
+          </a:p>
+          <a:p>
+            <a:pPr>
+              <a:spcBef>
+                <a:spcPts val="1600"/>
+              </a:spcBef>
+            </a:pPr>
+            <a:r>
+              <a:rPr sz="1100" b="1">
+                <a:solidFill>
+                  <a:srgbClr val="2E7D32"/>
+                </a:solidFill>
+              </a:rPr>
+              <a:t>What:</a:t>
+            </a:r>
+          </a:p>
+          <a:p>
+            <a:r>
+              <a:rPr sz="1100">
+                <a:solidFill>
+                  <a:srgbClr val="2D2D2D"/>
+                </a:solidFill>
+              </a:rPr>
+              <a:t>Snowpipe + streams for continuous loading</a:t>
+            </a:r>
+          </a:p>
+          <a:p>
+            <a:pPr>
+              <a:spcBef>
+                <a:spcPts val="1200"/>
+              </a:spcBef>
+            </a:pPr>
+            <a:r>
+              <a:rPr sz="1100" b="1">
+                <a:solidFill>
+                  <a:srgbClr val="2E7D32"/>
+                </a:solidFill>
+              </a:rPr>
+              <a:t>Effort:</a:t>
+            </a:r>
+          </a:p>
+          <a:p>
+            <a:r>
+              <a:rPr sz="1100">
+                <a:solidFill>
+                  <a:srgbClr val="2D2D2D"/>
+                </a:solidFill>
+              </a:rPr>
+              <a:t>1-2 sprints</a:t>
+            </a:r>
+          </a:p>
+          <a:p>
+            <a:pPr>
+              <a:spcBef>
+                <a:spcPts val="1200"/>
+              </a:spcBef>
+            </a:pPr>
+            <a:r>
+              <a:rPr sz="1100" b="1">
+                <a:solidFill>
+                  <a:srgbClr val="2E7D32"/>
+                </a:solidFill>
+              </a:rPr>
+              <a:t>Business Benefit:</a:t>
+            </a:r>
+          </a:p>
+          <a:p>
+            <a:r>
+              <a:rPr sz="1100">
+                <a:solidFill>
+                  <a:srgbClr val="2D2D2D"/>
+                </a:solidFill>
+              </a:rPr>
+              <a:t>Live demand monitoring during storms</a:t>
+            </a:r>
+          </a:p>
+        </p:txBody>
+      </p:sp>
+      <p:sp>
+        <p:nvSpPr>
+          <p:cNvPr id="6" name="Rounded Rectangle 5"/>
+          <p:cNvSpPr/>
+          <p:nvPr/>
+        </p:nvSpPr>
+        <p:spPr>
+          <a:xfrm>
+            <a:off x="4300000" y="1000000"/>
+            <a:ext cx="3600000" cy="4800000"/>
+          </a:xfrm>
+          <a:prstGeom prst="roundRect">
+            <a:avLst/>
+          </a:prstGeom>
+          <a:solidFill>
+            <a:srgbClr val="E3F2FD"/>
+          </a:solidFill>
+          <a:ln>
+            <a:noFill/>
+          </a:ln>
+        </p:spPr>
+        <p:style>
+          <a:lnRef idx="1">
+            <a:schemeClr val="accent1"/>
+          </a:lnRef>
+          <a:fillRef idx="3">
+            <a:schemeClr val="accent1"/>
+          </a:fillRef>
+          <a:effectRef idx="2">
+            <a:schemeClr val="accent1"/>
+          </a:effectRef>
+          <a:fontRef idx="minor">
+            <a:schemeClr val="lt1"/>
+          </a:fontRef>
+        </p:style>
+        <p:txBody>
+          <a:bodyPr wrap="square" rtlCol="0" anchor="ctr"/>
+          <a:lstStyle/>
+          <a:p>
+            <a:pPr algn="ctr"/>
+            <a:r>
+              <a:rPr sz="1600" b="1">
+                <a:solidFill>
+                  <a:srgbClr val="0D47A1"/>
+                </a:solidFill>
+              </a:rPr>
+              <a:t>ML Forecasting</a:t>
+            </a:r>
+          </a:p>
+          <a:p>
+            <a:pPr>
+              <a:spcBef>
+                <a:spcPts val="1600"/>
+              </a:spcBef>
+            </a:pPr>
+            <a:r>
+              <a:rPr sz="1100" b="1">
+                <a:solidFill>
+                  <a:srgbClr val="0D47A1"/>
+                </a:solidFill>
+              </a:rPr>
+              <a:t>What:</a:t>
+            </a:r>
+          </a:p>
+          <a:p>
+            <a:r>
+              <a:rPr sz="1100">
+                <a:solidFill>
+                  <a:srgbClr val="2D2D2D"/>
+                </a:solidFill>
+              </a:rPr>
+              <a:t>Predict demand drops by borough before storms hit</a:t>
+            </a:r>
+          </a:p>
+          <a:p>
+            <a:pPr>
+              <a:spcBef>
+                <a:spcPts val="1200"/>
+              </a:spcBef>
+            </a:pPr>
+            <a:r>
+              <a:rPr sz="1100" b="1">
+                <a:solidFill>
+                  <a:srgbClr val="0D47A1"/>
+                </a:solidFill>
+              </a:rPr>
+              <a:t>Effort:</a:t>
+            </a:r>
+          </a:p>
+          <a:p>
+            <a:r>
+              <a:rPr sz="1100">
+                <a:solidFill>
+                  <a:srgbClr val="2D2D2D"/>
+                </a:solidFill>
+              </a:rPr>
+              <a:t>2-3 sprints</a:t>
+            </a:r>
+          </a:p>
+          <a:p>
+            <a:pPr>
+              <a:spcBef>
+                <a:spcPts val="1200"/>
+              </a:spcBef>
+            </a:pPr>
+            <a:r>
+              <a:rPr sz="1100" b="1">
+                <a:solidFill>
+                  <a:srgbClr val="0D47A1"/>
+                </a:solidFill>
+              </a:rPr>
+              <a:t>Business Benefit:</a:t>
+            </a:r>
+          </a:p>
+          <a:p>
+            <a:r>
+              <a:rPr sz="1100">
+                <a:solidFill>
+                  <a:srgbClr val="2D2D2D"/>
+                </a:solidFill>
+              </a:rPr>
+              <a:t>Proactive fleet positioning, fewer empty cabs</a:t>
+            </a:r>
+          </a:p>
+        </p:txBody>
+      </p:sp>
+      <p:sp>
+        <p:nvSpPr>
+          <p:cNvPr id="7" name="Rounded Rectangle 6"/>
+          <p:cNvSpPr/>
+          <p:nvPr/>
+        </p:nvSpPr>
+        <p:spPr>
+          <a:xfrm>
+            <a:off x="8200000" y="1000000"/>
+            <a:ext cx="3600000" cy="4800000"/>
+          </a:xfrm>
+          <a:prstGeom prst="roundRect">
+            <a:avLst/>
+          </a:prstGeom>
+          <a:solidFill>
+            <a:srgbClr val="FFF3E0"/>
+          </a:solidFill>
+          <a:ln>
+            <a:noFill/>
+          </a:ln>
+        </p:spPr>
+        <p:style>
+          <a:lnRef idx="1">
+            <a:schemeClr val="accent1"/>
+          </a:lnRef>
+          <a:fillRef idx="3">
+            <a:schemeClr val="accent1"/>
+          </a:fillRef>
+          <a:effectRef idx="2">
+            <a:schemeClr val="accent1"/>
+          </a:effectRef>
+          <a:fontRef idx="minor">
+            <a:schemeClr val="lt1"/>
+          </a:fontRef>
+        </p:style>
+        <p:txBody>
+          <a:bodyPr wrap="square" rtlCol="0" anchor="ctr"/>
+          <a:lstStyle/>
+          <a:p>
+            <a:pPr algn="ctr"/>
+            <a:r>
+              <a:rPr sz="1600" b="1">
+                <a:solidFill>
+                  <a:srgbClr val="E65100"/>
+                </a:solidFill>
+              </a:rPr>
+              <a:t>Multi-City Expansion</a:t>
+            </a:r>
+          </a:p>
+          <a:p>
+            <a:pPr>
+              <a:spcBef>
+                <a:spcPts val="1600"/>
+              </a:spcBef>
+            </a:pPr>
+            <a:r>
+              <a:rPr sz="1100" b="1">
+                <a:solidFill>
+                  <a:srgbClr val="E65100"/>
+                </a:solidFill>
+              </a:rPr>
+              <a:t>What:</a:t>
+            </a:r>
+          </a:p>
+          <a:p>
+            <a:r>
+              <a:rPr sz="1100">
+                <a:solidFill>
+                  <a:srgbClr val="2D2D2D"/>
+                </a:solidFill>
+              </a:rPr>
+              <a:t>Replicate pipeline for Chicago, Boston, etc.</a:t>
+            </a:r>
+          </a:p>
+          <a:p>
+            <a:pPr>
+              <a:spcBef>
+                <a:spcPts val="1200"/>
+              </a:spcBef>
+            </a:pPr>
+            <a:r>
+              <a:rPr sz="1100" b="1">
+                <a:solidFill>
+                  <a:srgbClr val="E65100"/>
+                </a:solidFill>
+              </a:rPr>
+              <a:t>Effort:</a:t>
+            </a:r>
+          </a:p>
+          <a:p>
+            <a:r>
+              <a:rPr sz="1100">
+                <a:solidFill>
+                  <a:srgbClr val="2D2D2D"/>
+                </a:solidFill>
+              </a:rPr>
+              <a:t>3-4 sprints per city</a:t>
+            </a:r>
+          </a:p>
+          <a:p>
+            <a:pPr>
+              <a:spcBef>
+                <a:spcPts val="1200"/>
+              </a:spcBef>
+            </a:pPr>
+            <a:r>
+              <a:rPr sz="1100" b="1">
+                <a:solidFill>
+                  <a:srgbClr val="E65100"/>
+                </a:solidFill>
+              </a:rPr>
+              <a:t>Business Benefit:</a:t>
+            </a:r>
+          </a:p>
+          <a:p>
+            <a:r>
+              <a:rPr sz="1100">
+                <a:solidFill>
+                  <a:srgbClr val="2D2D2D"/>
+                </a:solidFill>
+              </a:rPr>
+              <a:t>National weather-demand intelligence</a:t>
+            </a:r>
+          </a:p>
+        </p:txBody>
+      </p:sp>
+      <p:sp>
+        <p:nvSpPr>
+          <p:cNvPr id="8" name="Rounded Rectangle 7"/>
+          <p:cNvSpPr/>
+          <p:nvPr/>
+        </p:nvSpPr>
+        <p:spPr>
+          <a:xfrm>
+            <a:off x="400000" y="6000000"/>
+            <a:ext cx="11400000" cy="600000"/>
+          </a:xfrm>
+          <a:prstGeom prst="roundRect">
+            <a:avLst/>
+          </a:prstGeom>
+          <a:solidFill>
+            <a:srgbClr val="FCE4EC"/>
+          </a:solidFill>
+          <a:ln>
+            <a:noFill/>
+          </a:ln>
+        </p:spPr>
+        <p:style>
+          <a:lnRef idx="1">
+            <a:schemeClr val="accent1"/>
+          </a:lnRef>
+          <a:fillRef idx="3">
+            <a:schemeClr val="accent1"/>
+          </a:fillRef>
+          <a:effectRef idx="2">
+            <a:schemeClr val="accent1"/>
+          </a:effectRef>
+          <a:fontRef idx="minor">
+            <a:schemeClr val="lt1"/>
+          </a:fontRef>
+        </p:style>
+        <p:txBody>
+          <a:bodyPr wrap="square" rtlCol="0" anchor="ctr"/>
+          <a:lstStyle/>
+          <a:p>
+            <a:pPr algn="ctr"/>
+            <a:r>
+              <a:rPr sz="1300" b="1">
+                <a:solidFill>
+                  <a:srgbClr val="2D2D2D"/>
+                </a:solidFill>
+              </a:rPr>
+              <a:t>Highest Impact: Real-Time Ingestion. Fleet operators need minute-level demand signals during active storms.</a:t>
+            </a:r>
+          </a:p>
+        </p:txBody>
+      </p:sp>
+    </p:spTree>
+  </p:cSld>
+  <p:clrMapOvr>
+    <a:masterClrMapping/>
+  </p:clrMapOvr>
+</p:sld>
+</file>
+
+<file path=ppt/slides/slide26.xml><?xml version="1.0" encoding="utf-8"?>
+<p:sld xmlns:a="http://schemas.openxmlformats.org/drawingml/2006/main" xmlns:r="http://schemas.openxmlformats.org/officeDocument/2006/relationships" xmlns:p="http://schemas.openxmlformats.org/presentationml/2006/main">
+  <p:cSld>
+    <p:spTree>
+      <p:nvGrpSpPr>
+        <p:cNvPr id="1" name=""/>
+        <p:cNvGrpSpPr/>
+        <p:nvPr/>
+      </p:nvGrpSpPr>
+      <p:grpSpPr>
+        <a:xfrm>
+          <a:off x="0" y="0"/>
+          <a:ext cx="0" cy="0"/>
+          <a:chOff x="0" y="0"/>
+          <a:chExt cx="0" cy="0"/>
+        </a:xfrm>
+      </p:grpSpPr>
+      <p:sp>
+        <p:nvSpPr>
+          <p:cNvPr id="2" name="Title 1"/>
+          <p:cNvSpPr>
+            <a:spLocks noGrp="1"/>
+          </p:cNvSpPr>
+          <p:nvPr>
+            <p:ph type="title"/>
+          </p:nvPr>
+        </p:nvSpPr>
+        <p:spPr/>
+        <p:txBody>
+          <a:bodyPr/>
+          <a:lstStyle/>
+          <a:p>
+            <a:r>
+              <a:t>Future State Architecture</a:t>
+            </a:r>
+          </a:p>
+        </p:txBody>
+      </p:sp>
+      <p:sp>
+        <p:nvSpPr>
+          <p:cNvPr id="3" name="Content Placeholder 2"/>
+          <p:cNvSpPr>
+            <a:spLocks noGrp="1"/>
+          </p:cNvSpPr>
+          <p:nvPr>
+            <p:ph idx="1"/>
+          </p:nvPr>
+        </p:nvSpPr>
+        <p:spPr/>
+        <p:txBody>
+          <a:bodyPr/>
+          <a:lstStyle/>
+          <a:p>
+            <a:endParaRPr/>
+          </a:p>
+        </p:txBody>
+      </p:sp>
+      <p:sp>
+        <p:nvSpPr>
+          <p:cNvPr id="4" name="Rectangle 3"/>
+          <p:cNvSpPr/>
+          <p:nvPr/>
+        </p:nvSpPr>
+        <p:spPr>
+          <a:xfrm>
+            <a:off x="0" y="800000"/>
+            <a:ext cx="12192000" cy="80000"/>
+          </a:xfrm>
+          <a:prstGeom prst="rect">
+            <a:avLst/>
+          </a:prstGeom>
+          <a:solidFill>
+            <a:srgbClr val="FE3082"/>
+          </a:solidFill>
+          <a:ln>
+            <a:noFill/>
+          </a:ln>
+        </p:spPr>
+        <p:style>
+          <a:lnRef idx="1">
+            <a:schemeClr val="accent1"/>
+          </a:lnRef>
+          <a:fillRef idx="3">
+            <a:schemeClr val="accent1"/>
+          </a:fillRef>
+          <a:effectRef idx="2">
+            <a:schemeClr val="accent1"/>
+          </a:effectRef>
+          <a:fontRef idx="minor">
+            <a:schemeClr val="lt1"/>
+          </a:fontRef>
+        </p:style>
+        <p:txBody>
+          <a:bodyPr rtlCol="0" anchor="ctr"/>
+          <a:lstStyle/>
+          <a:p>
+            <a:pPr algn="ctr"/>
+            <a:endParaRPr/>
+          </a:p>
+        </p:txBody>
+      </p:sp>
+      <p:sp>
+        <p:nvSpPr>
+          <p:cNvPr id="5" name="TextBox 4"/>
+          <p:cNvSpPr txBox="1"/>
+          <p:nvPr/>
+        </p:nvSpPr>
+        <p:spPr>
+          <a:xfrm>
+            <a:off x="2000000" y="2500000"/>
+            <a:ext cx="8000000" cy="2000000"/>
+          </a:xfrm>
+          <a:prstGeom prst="rect">
+            <a:avLst/>
+          </a:prstGeom>
+          <a:noFill/>
+        </p:spPr>
+        <p:txBody>
+          <a:bodyPr wrap="none">
+            <a:spAutoFit/>
+          </a:bodyPr>
+          <a:lstStyle/>
+          <a:p>
+            <a:pPr algn="ctr"/>
+            <a:r>
+              <a:rPr sz="1800" i="1">
+                <a:solidFill>
+                  <a:srgbClr val="555555"/>
+                </a:solidFill>
+              </a:rPr>
+              <a:t>[Insert Future State Architecture Diagram]</a:t>
+            </a:r>
+          </a:p>
+        </p:txBody>
+      </p:sp>
+    </p:spTree>
+  </p:cSld>
+  <p:clrMapOvr>
+    <a:masterClrMapping/>
+  </p:clrMapOvr>
+</p:sld>
+</file>
+
+<file path=ppt/slides/slide27.xml><?xml version="1.0" encoding="utf-8"?>
+<p:sld xmlns:a="http://schemas.openxmlformats.org/drawingml/2006/main" xmlns:r="http://schemas.openxmlformats.org/officeDocument/2006/relationships" xmlns:p="http://schemas.openxmlformats.org/presentationml/2006/main">
+  <p:cSld>
+    <p:spTree>
+      <p:nvGrpSpPr>
+        <p:cNvPr id="1" name=""/>
+        <p:cNvGrpSpPr/>
+        <p:nvPr/>
+      </p:nvGrpSpPr>
+      <p:grpSpPr>
+        <a:xfrm>
+          <a:off x="0" y="0"/>
+          <a:ext cx="0" cy="0"/>
+          <a:chOff x="0" y="0"/>
+          <a:chExt cx="0" cy="0"/>
+        </a:xfrm>
+      </p:grpSpPr>
+      <p:sp>
+        <p:nvSpPr>
+          <p:cNvPr id="2" name="Title 1"/>
+          <p:cNvSpPr>
+            <a:spLocks noGrp="1"/>
+          </p:cNvSpPr>
+          <p:nvPr>
+            <p:ph type="title"/>
+          </p:nvPr>
+        </p:nvSpPr>
+        <p:spPr/>
+        <p:txBody>
+          <a:bodyPr/>
+          <a:lstStyle/>
+          <a:p>
+            <a:r>
+              <a:t>Recommendation</a:t>
+            </a:r>
+          </a:p>
+        </p:txBody>
+      </p:sp>
+      <p:sp>
+        <p:nvSpPr>
+          <p:cNvPr id="3" name="Content Placeholder 2"/>
+          <p:cNvSpPr>
+            <a:spLocks noGrp="1"/>
+          </p:cNvSpPr>
+          <p:nvPr>
+            <p:ph idx="1"/>
+          </p:nvPr>
+        </p:nvSpPr>
+        <p:spPr/>
+        <p:txBody>
+          <a:bodyPr/>
+          <a:lstStyle/>
+          <a:p>
+            <a:endParaRPr/>
+          </a:p>
+        </p:txBody>
+      </p:sp>
+      <p:sp>
+        <p:nvSpPr>
+          <p:cNvPr id="4" name="Rectangle 3"/>
+          <p:cNvSpPr/>
+          <p:nvPr/>
+        </p:nvSpPr>
+        <p:spPr>
+          <a:xfrm>
+            <a:off x="0" y="800000"/>
+            <a:ext cx="12192000" cy="80000"/>
+          </a:xfrm>
+          <a:prstGeom prst="rect">
+            <a:avLst/>
+          </a:prstGeom>
+          <a:solidFill>
+            <a:srgbClr val="FE3082"/>
+          </a:solidFill>
+          <a:ln>
+            <a:noFill/>
+          </a:ln>
+        </p:spPr>
+        <p:style>
+          <a:lnRef idx="1">
+            <a:schemeClr val="accent1"/>
+          </a:lnRef>
+          <a:fillRef idx="3">
+            <a:schemeClr val="accent1"/>
+          </a:fillRef>
+          <a:effectRef idx="2">
+            <a:schemeClr val="accent1"/>
+          </a:effectRef>
+          <a:fontRef idx="minor">
+            <a:schemeClr val="lt1"/>
+          </a:fontRef>
+        </p:style>
+        <p:txBody>
+          <a:bodyPr rtlCol="0" anchor="ctr"/>
+          <a:lstStyle/>
+          <a:p>
+            <a:pPr algn="ctr"/>
+            <a:endParaRPr/>
+          </a:p>
+        </p:txBody>
+      </p:sp>
+      <p:sp>
+        <p:nvSpPr>
+          <p:cNvPr id="5" name="Rounded Rectangle 4"/>
+          <p:cNvSpPr/>
+          <p:nvPr/>
+        </p:nvSpPr>
+        <p:spPr>
+          <a:xfrm>
+            <a:off x="400000" y="1200000"/>
+            <a:ext cx="11400000" cy="1800000"/>
+          </a:xfrm>
+          <a:prstGeom prst="roundRect">
+            <a:avLst/>
+          </a:prstGeom>
+          <a:solidFill>
+            <a:srgbClr val="E3F2FD"/>
+          </a:solidFill>
+          <a:ln>
+            <a:noFill/>
+          </a:ln>
+        </p:spPr>
+        <p:style>
+          <a:lnRef idx="1">
+            <a:schemeClr val="accent1"/>
+          </a:lnRef>
+          <a:fillRef idx="3">
+            <a:schemeClr val="accent1"/>
+          </a:fillRef>
+          <a:effectRef idx="2">
+            <a:schemeClr val="accent1"/>
+          </a:effectRef>
+          <a:fontRef idx="minor">
+            <a:schemeClr val="lt1"/>
+          </a:fontRef>
+        </p:style>
+        <p:txBody>
+          <a:bodyPr wrap="square" rtlCol="0" anchor="ctr"/>
+          <a:lstStyle/>
+          <a:p>
+            <a:pPr algn="ctr"/>
+            <a:r>
+              <a:rPr sz="2200" b="1">
+                <a:solidFill>
+                  <a:srgbClr val="0D47A1"/>
+                </a:solidFill>
+              </a:rPr>
+              <a:t>[One clear recommendation tied to the finding]</a:t>
+            </a:r>
+          </a:p>
+          <a:p>
+            <a:pPr algn="ctr">
+              <a:spcBef>
+                <a:spcPts val="800"/>
+              </a:spcBef>
+            </a:pPr>
+            <a:r>
+              <a:rPr sz="1400" i="1">
+                <a:solidFill>
+                  <a:srgbClr val="555555"/>
+                </a:solidFill>
+              </a:rPr>
+              <a:t>e.g., Pre-position 15% more vehicles in outer boroughs during forecasted rain events</a:t>
+            </a:r>
+          </a:p>
+        </p:txBody>
+      </p:sp>
+      <p:sp>
+        <p:nvSpPr>
+          <p:cNvPr id="6" name="Rounded Rectangle 5"/>
+          <p:cNvSpPr/>
+          <p:nvPr/>
+        </p:nvSpPr>
+        <p:spPr>
+          <a:xfrm>
+            <a:off x="400000" y="3400000"/>
+            <a:ext cx="5400000" cy="1500000"/>
+          </a:xfrm>
+          <a:prstGeom prst="roundRect">
+            <a:avLst/>
+          </a:prstGeom>
+          <a:solidFill>
+            <a:srgbClr val="E8F5E9"/>
+          </a:solidFill>
+          <a:ln>
+            <a:noFill/>
+          </a:ln>
+        </p:spPr>
+        <p:style>
+          <a:lnRef idx="1">
+            <a:schemeClr val="accent1"/>
+          </a:lnRef>
+          <a:fillRef idx="3">
+            <a:schemeClr val="accent1"/>
+          </a:fillRef>
+          <a:effectRef idx="2">
+            <a:schemeClr val="accent1"/>
+          </a:effectRef>
+          <a:fontRef idx="minor">
+            <a:schemeClr val="lt1"/>
+          </a:fontRef>
+        </p:style>
+        <p:txBody>
+          <a:bodyPr wrap="square" rtlCol="0" anchor="ctr"/>
+          <a:lstStyle/>
+          <a:p>
+            <a:pPr algn="ctr"/>
+            <a:r>
+              <a:rPr sz="1400" b="1">
+                <a:solidFill>
+                  <a:srgbClr val="2E7D32"/>
+                </a:solidFill>
+              </a:rPr>
+              <a:t>Actionable Next Step</a:t>
+            </a:r>
+          </a:p>
+          <a:p>
+            <a:pPr>
+              <a:spcBef>
+                <a:spcPts val="800"/>
+              </a:spcBef>
+            </a:pPr>
+            <a:r>
+              <a:rPr sz="1300">
+                <a:solidFill>
+                  <a:srgbClr val="2D2D2D"/>
+                </a:solidFill>
+              </a:rPr>
+              <a:t>[What the client should do first]</a:t>
+            </a:r>
+          </a:p>
+        </p:txBody>
+      </p:sp>
+      <p:sp>
+        <p:nvSpPr>
+          <p:cNvPr id="7" name="Rounded Rectangle 6"/>
+          <p:cNvSpPr/>
+          <p:nvPr/>
+        </p:nvSpPr>
+        <p:spPr>
+          <a:xfrm>
+            <a:off x="6100000" y="3400000"/>
+            <a:ext cx="5700000" cy="1500000"/>
+          </a:xfrm>
+          <a:prstGeom prst="roundRect">
+            <a:avLst/>
+          </a:prstGeom>
+          <a:solidFill>
+            <a:srgbClr val="FFF3E0"/>
+          </a:solidFill>
+          <a:ln>
+            <a:noFill/>
+          </a:ln>
+        </p:spPr>
+        <p:style>
+          <a:lnRef idx="1">
+            <a:schemeClr val="accent1"/>
+          </a:lnRef>
+          <a:fillRef idx="3">
+            <a:schemeClr val="accent1"/>
+          </a:fillRef>
+          <a:effectRef idx="2">
+            <a:schemeClr val="accent1"/>
+          </a:effectRef>
+          <a:fontRef idx="minor">
+            <a:schemeClr val="lt1"/>
+          </a:fontRef>
+        </p:style>
+        <p:txBody>
+          <a:bodyPr wrap="square" rtlCol="0" anchor="ctr"/>
+          <a:lstStyle/>
+          <a:p>
+            <a:pPr algn="ctr"/>
+            <a:r>
+              <a:rPr sz="1400" b="1">
+                <a:solidFill>
+                  <a:srgbClr val="E65100"/>
+                </a:solidFill>
+              </a:rPr>
+              <a:t>Implementation Cost</a:t>
+            </a:r>
+          </a:p>
+          <a:p>
+            <a:pPr>
+              <a:spcBef>
+                <a:spcPts val="800"/>
+              </a:spcBef>
+            </a:pPr>
+            <a:r>
+              <a:rPr sz="1300">
+                <a:solidFill>
+                  <a:srgbClr val="2D2D2D"/>
+                </a:solidFill>
+              </a:rPr>
+              <a:t>[What it would take: time, team, tools]</a:t>
+            </a:r>
+          </a:p>
+        </p:txBody>
+      </p:sp>
+    </p:spTree>
+  </p:cSld>
+  <p:clrMapOvr>
+    <a:masterClrMapping/>
+  </p:clrMapOvr>
+</p:sld>
+</file>
+
+<file path=ppt/slides/slide28.xml><?xml version="1.0" encoding="utf-8"?>
+<p:sld xmlns:a="http://schemas.openxmlformats.org/drawingml/2006/main" xmlns:r="http://schemas.openxmlformats.org/officeDocument/2006/relationships" xmlns:p="http://schemas.openxmlformats.org/presentationml/2006/main">
+  <p:cSld>
+    <p:spTree>
+      <p:nvGrpSpPr>
+        <p:cNvPr id="1" name=""/>
+        <p:cNvGrpSpPr/>
+        <p:nvPr/>
+      </p:nvGrpSpPr>
+      <p:grpSpPr>
+        <a:xfrm>
+          <a:off x="0" y="0"/>
+          <a:ext cx="0" cy="0"/>
+          <a:chOff x="0" y="0"/>
+          <a:chExt cx="0" cy="0"/>
+        </a:xfrm>
+      </p:grpSpPr>
+      <p:sp>
+        <p:nvSpPr>
+          <p:cNvPr id="2" name="Title 1"/>
+          <p:cNvSpPr>
+            <a:spLocks noGrp="1"/>
+          </p:cNvSpPr>
+          <p:nvPr>
+            <p:ph type="ctrTitle"/>
+          </p:nvPr>
+        </p:nvSpPr>
+        <p:spPr/>
+        <p:txBody>
+          <a:bodyPr/>
+          <a:lstStyle/>
+          <a:p>
+            <a:r>
+              <a:t>Thank You</a:t>
+            </a:r>
+          </a:p>
+        </p:txBody>
+      </p:sp>
+      <p:sp>
+        <p:nvSpPr>
+          <p:cNvPr id="3" name="Subtitle 2"/>
+          <p:cNvSpPr>
+            <a:spLocks noGrp="1"/>
+          </p:cNvSpPr>
+          <p:nvPr>
+            <p:ph type="subTitle" idx="1"/>
+          </p:nvPr>
+        </p:nvSpPr>
+        <p:spPr/>
+        <p:txBody>
+          <a:bodyPr/>
+          <a:lstStyle/>
+          <a:p>
+            <a:r>
+              <a:t>Questions?</a:t>
+            </a:r>
+          </a:p>
+        </p:txBody>
+      </p:sp>
+    </p:spTree>
+  </p:cSld>
+  <p:clrMapOvr>
+    <a:masterClrMapping/>
+  </p:clrMapOvr>
+</p:sld>
+</file>
+
+<file path=ppt/slides/slide29.xml><?xml version="1.0" encoding="utf-8"?>
+<p:sld xmlns:a="http://schemas.openxmlformats.org/drawingml/2006/main" xmlns:r="http://schemas.openxmlformats.org/officeDocument/2006/relationships" xmlns:p="http://schemas.openxmlformats.org/presentationml/2006/main">
+  <p:cSld>
+    <p:spTree>
+      <p:nvGrpSpPr>
+        <p:cNvPr id="1" name=""/>
+        <p:cNvGrpSpPr/>
+        <p:nvPr/>
+      </p:nvGrpSpPr>
+      <p:grpSpPr>
+        <a:xfrm>
+          <a:off x="0" y="0"/>
+          <a:ext cx="0" cy="0"/>
+          <a:chOff x="0" y="0"/>
+          <a:chExt cx="0" cy="0"/>
+        </a:xfrm>
+      </p:grpSpPr>
+      <p:sp>
+        <p:nvSpPr>
+          <p:cNvPr id="2" name="Title 1"/>
+          <p:cNvSpPr>
+            <a:spLocks noGrp="1"/>
+          </p:cNvSpPr>
+          <p:nvPr>
+            <p:ph type="title"/>
+          </p:nvPr>
+        </p:nvSpPr>
+        <p:spPr/>
+        <p:txBody>
+          <a:bodyPr/>
+          <a:lstStyle/>
+          <a:p>
+            <a:r>
+              <a:t>AI Use Disclosure</a:t>
+            </a:r>
+          </a:p>
+        </p:txBody>
+      </p:sp>
+      <p:sp>
+        <p:nvSpPr>
+          <p:cNvPr id="3" name="Content Placeholder 2"/>
+          <p:cNvSpPr>
+            <a:spLocks noGrp="1"/>
+          </p:cNvSpPr>
+          <p:nvPr>
+            <p:ph idx="1"/>
+          </p:nvPr>
+        </p:nvSpPr>
+        <p:spPr/>
+        <p:txBody>
+          <a:bodyPr/>
+          <a:lstStyle/>
+          <a:p>
+            <a:endParaRPr/>
+          </a:p>
+        </p:txBody>
+      </p:sp>
+      <p:sp>
+        <p:nvSpPr>
+          <p:cNvPr id="4" name="Rectangle 3"/>
+          <p:cNvSpPr/>
+          <p:nvPr/>
+        </p:nvSpPr>
+        <p:spPr>
+          <a:xfrm>
+            <a:off x="0" y="800000"/>
+            <a:ext cx="12192000" cy="80000"/>
+          </a:xfrm>
+          <a:prstGeom prst="rect">
+            <a:avLst/>
+          </a:prstGeom>
+          <a:solidFill>
+            <a:srgbClr val="FE3082"/>
+          </a:solidFill>
+          <a:ln>
+            <a:noFill/>
+          </a:ln>
+        </p:spPr>
+        <p:style>
+          <a:lnRef idx="1">
+            <a:schemeClr val="accent1"/>
+          </a:lnRef>
+          <a:fillRef idx="3">
+            <a:schemeClr val="accent1"/>
+          </a:fillRef>
+          <a:effectRef idx="2">
+            <a:schemeClr val="accent1"/>
+          </a:effectRef>
+          <a:fontRef idx="minor">
+            <a:schemeClr val="lt1"/>
+          </a:fontRef>
+        </p:style>
+        <p:txBody>
+          <a:bodyPr rtlCol="0" anchor="ctr"/>
+          <a:lstStyle/>
+          <a:p>
+            <a:pPr algn="ctr"/>
+            <a:endParaRPr/>
+          </a:p>
+        </p:txBody>
+      </p:sp>
+      <p:sp>
+        <p:nvSpPr>
+          <p:cNvPr id="5" name="Rounded Rectangle 4"/>
+          <p:cNvSpPr/>
+          <p:nvPr/>
+        </p:nvSpPr>
+        <p:spPr>
+          <a:xfrm>
             <a:off x="400000" y="1100000"/>
             <a:ext cx="11400000" cy="500000"/>
           </a:xfrm>
@@ -15495,1628 +16921,6 @@
                 </a:solidFill>
               </a:rPr>
               <a:t>[Describe corrections made, things that required manual verification, etc.]</a:t>
-            </a:r>
-          </a:p>
-        </p:txBody>
-      </p:sp>
-    </p:spTree>
-  </p:cSld>
-  <p:clrMapOvr>
-    <a:masterClrMapping/>
-  </p:clrMapOvr>
-</p:sld>
-</file>
-
-<file path=ppt/slides/slide26.xml><?xml version="1.0" encoding="utf-8"?>
-<p:sld xmlns:a="http://schemas.openxmlformats.org/drawingml/2006/main" xmlns:p="http://schemas.openxmlformats.org/presentationml/2006/main" xmlns:r="http://schemas.openxmlformats.org/officeDocument/2006/relationships">
-  <p:cSld>
-    <p:spTree>
-      <p:nvGrpSpPr>
-        <p:cNvPr id="1" name=""/>
-        <p:cNvGrpSpPr/>
-        <p:nvPr/>
-      </p:nvGrpSpPr>
-      <p:grpSpPr/>
-      <p:sp>
-        <p:nvSpPr>
-          <p:cNvPr id="2" name="Title 1"/>
-          <p:cNvSpPr>
-            <a:spLocks noGrp="1"/>
-          </p:cNvSpPr>
-          <p:nvPr>
-            <p:ph type="title"/>
-          </p:nvPr>
-        </p:nvSpPr>
-        <p:spPr/>
-        <p:txBody>
-          <a:bodyPr/>
-          <a:lstStyle/>
-          <a:p>
-            <a:r>
-              <a:t>Headline Finding (NEW VERSION)</a:t>
-            </a:r>
-          </a:p>
-        </p:txBody>
-      </p:sp>
-      <p:sp>
-        <p:nvSpPr>
-          <p:cNvPr id="3" name="Content Placeholder 2"/>
-          <p:cNvSpPr>
-            <a:spLocks noGrp="1"/>
-          </p:cNvSpPr>
-          <p:nvPr>
-            <p:ph idx="1"/>
-          </p:nvPr>
-        </p:nvSpPr>
-        <p:spPr/>
-        <p:txBody>
-          <a:bodyPr/>
-          <a:lstStyle/>
-          <a:p/>
-        </p:txBody>
-      </p:sp>
-      <p:sp>
-        <p:nvSpPr>
-          <p:cNvPr id="4" name="Rectangle 3"/>
-          <p:cNvSpPr/>
-          <p:nvPr/>
-        </p:nvSpPr>
-        <p:spPr>
-          <a:xfrm>
-            <a:off x="0" y="800000"/>
-            <a:ext cx="12192000" cy="80000"/>
-          </a:xfrm>
-          <a:prstGeom prst="rect">
-            <a:avLst/>
-          </a:prstGeom>
-          <a:solidFill>
-            <a:srgbClr val="FE3082"/>
-          </a:solidFill>
-          <a:ln>
-            <a:noFill/>
-          </a:ln>
-        </p:spPr>
-        <p:style>
-          <a:lnRef idx="1">
-            <a:schemeClr val="accent1"/>
-          </a:lnRef>
-          <a:fillRef idx="3">
-            <a:schemeClr val="accent1"/>
-          </a:fillRef>
-          <a:effectRef idx="2">
-            <a:schemeClr val="accent1"/>
-          </a:effectRef>
-          <a:fontRef idx="minor">
-            <a:schemeClr val="lt1"/>
-          </a:fontRef>
-        </p:style>
-        <p:txBody>
-          <a:bodyPr rtlCol="0" anchor="ctr"/>
-          <a:lstStyle/>
-          <a:p>
-            <a:pPr algn="ctr"/>
-          </a:p>
-        </p:txBody>
-      </p:sp>
-      <p:sp>
-        <p:nvSpPr>
-          <p:cNvPr id="5" name="Rounded Rectangle 4"/>
-          <p:cNvSpPr/>
-          <p:nvPr/>
-        </p:nvSpPr>
-        <p:spPr>
-          <a:xfrm>
-            <a:off x="400000" y="1100000"/>
-            <a:ext cx="11400000" cy="1400000"/>
-          </a:xfrm>
-          <a:prstGeom prst="roundRect">
-            <a:avLst/>
-          </a:prstGeom>
-          <a:solidFill>
-            <a:srgbClr val="FCE4EC"/>
-          </a:solidFill>
-          <a:ln>
-            <a:noFill/>
-          </a:ln>
-        </p:spPr>
-        <p:style>
-          <a:lnRef idx="1">
-            <a:schemeClr val="accent1"/>
-          </a:lnRef>
-          <a:fillRef idx="3">
-            <a:schemeClr val="accent1"/>
-          </a:fillRef>
-          <a:effectRef idx="2">
-            <a:schemeClr val="accent1"/>
-          </a:effectRef>
-          <a:fontRef idx="minor">
-            <a:schemeClr val="lt1"/>
-          </a:fontRef>
-        </p:style>
-        <p:txBody>
-          <a:bodyPr rtlCol="0" anchor="ctr" wrap="square" tIns="127000" bIns="127000" lIns="152400" rIns="152400"/>
-          <a:lstStyle/>
-          <a:p>
-            <a:pPr algn="ctr"/>
-            <a:r>
-              <a:rPr sz="1500" b="1">
-                <a:solidFill>
-                  <a:srgbClr val="333333"/>
-                </a:solidFill>
-              </a:rPr>
-              <a:t>In 2025, adverse weather boosted taxi demand in Manhattan (+15.6%) and</a:t>
-            </a:r>
-          </a:p>
-          <a:p>
-            <a:r>
-              <a:rPr sz="1500" b="1">
-                <a:solidFill>
-                  <a:srgbClr val="333333"/>
-                </a:solidFill>
-              </a:rPr>
-              <a:t>Brooklyn (+20.6%) as riders switched to cabs. By 2026, that pattern reversed:</a:t>
-            </a:r>
-          </a:p>
-          <a:p>
-            <a:r>
-              <a:rPr sz="1500" b="1">
-                <a:solidFill>
-                  <a:srgbClr val="333333"/>
-                </a:solidFill>
-              </a:rPr>
-              <a:t>adverse weather now suppresses demand across all boroughs.</a:t>
-            </a:r>
-          </a:p>
-        </p:txBody>
-      </p:sp>
-      <p:sp>
-        <p:nvSpPr>
-          <p:cNvPr id="6" name="Rounded Rectangle 5"/>
-          <p:cNvSpPr/>
-          <p:nvPr/>
-        </p:nvSpPr>
-        <p:spPr>
-          <a:xfrm>
-            <a:off x="400000" y="2800000"/>
-            <a:ext cx="3200000" cy="1400000"/>
-          </a:xfrm>
-          <a:prstGeom prst="roundRect">
-            <a:avLst/>
-          </a:prstGeom>
-          <a:solidFill>
-            <a:srgbClr val="E3F2FD"/>
-          </a:solidFill>
-          <a:ln>
-            <a:noFill/>
-          </a:ln>
-        </p:spPr>
-        <p:style>
-          <a:lnRef idx="1">
-            <a:schemeClr val="accent1"/>
-          </a:lnRef>
-          <a:fillRef idx="3">
-            <a:schemeClr val="accent1"/>
-          </a:fillRef>
-          <a:effectRef idx="2">
-            <a:schemeClr val="accent1"/>
-          </a:effectRef>
-          <a:fontRef idx="minor">
-            <a:schemeClr val="lt1"/>
-          </a:fontRef>
-        </p:style>
-        <p:txBody>
-          <a:bodyPr rtlCol="0" anchor="ctr" wrap="square" tIns="127000" bIns="127000" lIns="152400" rIns="152400"/>
-          <a:lstStyle/>
-          <a:p>
-            <a:pPr algn="ctr"/>
-            <a:r>
-              <a:rPr sz="2800" b="1">
-                <a:solidFill>
-                  <a:srgbClr val="333333"/>
-                </a:solidFill>
-              </a:rPr>
-              <a:t>38M+</a:t>
-            </a:r>
-          </a:p>
-          <a:p>
-            <a:r>
-              <a:rPr sz="1400" b="0">
-                <a:solidFill>
-                  <a:srgbClr val="333333"/>
-                </a:solidFill>
-              </a:rPr>
-              <a:t>Trip Records Analyzed</a:t>
-            </a:r>
-          </a:p>
-        </p:txBody>
-      </p:sp>
-      <p:sp>
-        <p:nvSpPr>
-          <p:cNvPr id="7" name="Rounded Rectangle 6"/>
-          <p:cNvSpPr/>
-          <p:nvPr/>
-        </p:nvSpPr>
-        <p:spPr>
-          <a:xfrm>
-            <a:off x="4400000" y="2800000"/>
-            <a:ext cx="3200000" cy="1400000"/>
-          </a:xfrm>
-          <a:prstGeom prst="roundRect">
-            <a:avLst/>
-          </a:prstGeom>
-          <a:solidFill>
-            <a:srgbClr val="E3F2FD"/>
-          </a:solidFill>
-          <a:ln>
-            <a:noFill/>
-          </a:ln>
-        </p:spPr>
-        <p:style>
-          <a:lnRef idx="1">
-            <a:schemeClr val="accent1"/>
-          </a:lnRef>
-          <a:fillRef idx="3">
-            <a:schemeClr val="accent1"/>
-          </a:fillRef>
-          <a:effectRef idx="2">
-            <a:schemeClr val="accent1"/>
-          </a:effectRef>
-          <a:fontRef idx="minor">
-            <a:schemeClr val="lt1"/>
-          </a:fontRef>
-        </p:style>
-        <p:txBody>
-          <a:bodyPr rtlCol="0" anchor="ctr" wrap="square" tIns="127000" bIns="127000" lIns="152400" rIns="152400"/>
-          <a:lstStyle/>
-          <a:p>
-            <a:pPr algn="ctr"/>
-            <a:r>
-              <a:rPr sz="2800" b="1">
-                <a:solidFill>
-                  <a:srgbClr val="333333"/>
-                </a:solidFill>
-              </a:rPr>
-              <a:t>10 months</a:t>
-            </a:r>
-          </a:p>
-          <a:p>
-            <a:r>
-              <a:rPr sz="1400" b="0">
-                <a:solidFill>
-                  <a:srgbClr val="333333"/>
-                </a:solidFill>
-              </a:rPr>
-              <a:t>Jan-May 2025 vs 2026</a:t>
-            </a:r>
-          </a:p>
-        </p:txBody>
-      </p:sp>
-      <p:sp>
-        <p:nvSpPr>
-          <p:cNvPr id="8" name="Rounded Rectangle 7"/>
-          <p:cNvSpPr/>
-          <p:nvPr/>
-        </p:nvSpPr>
-        <p:spPr>
-          <a:xfrm>
-            <a:off x="8400000" y="2800000"/>
-            <a:ext cx="3200000" cy="1400000"/>
-          </a:xfrm>
-          <a:prstGeom prst="roundRect">
-            <a:avLst/>
-          </a:prstGeom>
-          <a:solidFill>
-            <a:srgbClr val="E3F2FD"/>
-          </a:solidFill>
-          <a:ln>
-            <a:noFill/>
-          </a:ln>
-        </p:spPr>
-        <p:style>
-          <a:lnRef idx="1">
-            <a:schemeClr val="accent1"/>
-          </a:lnRef>
-          <a:fillRef idx="3">
-            <a:schemeClr val="accent1"/>
-          </a:fillRef>
-          <a:effectRef idx="2">
-            <a:schemeClr val="accent1"/>
-          </a:effectRef>
-          <a:fontRef idx="minor">
-            <a:schemeClr val="lt1"/>
-          </a:fontRef>
-        </p:style>
-        <p:txBody>
-          <a:bodyPr rtlCol="0" anchor="ctr" wrap="square" tIns="127000" bIns="127000" lIns="152400" rIns="152400"/>
-          <a:lstStyle/>
-          <a:p>
-            <a:pPr algn="ctr"/>
-            <a:r>
-              <a:rPr sz="2800" b="1">
-                <a:solidFill>
-                  <a:srgbClr val="333333"/>
-                </a:solidFill>
-              </a:rPr>
-              <a:t>5 boroughs</a:t>
-            </a:r>
-          </a:p>
-          <a:p>
-            <a:r>
-              <a:rPr sz="1400" b="0">
-                <a:solidFill>
-                  <a:srgbClr val="333333"/>
-                </a:solidFill>
-              </a:rPr>
-              <a:t>Weather Impact Compared</a:t>
-            </a:r>
-          </a:p>
-        </p:txBody>
-      </p:sp>
-      <p:sp>
-        <p:nvSpPr>
-          <p:cNvPr id="9" name="Rounded Rectangle 8"/>
-          <p:cNvSpPr/>
-          <p:nvPr/>
-        </p:nvSpPr>
-        <p:spPr>
-          <a:xfrm>
-            <a:off x="400000" y="4600000"/>
-            <a:ext cx="11400000" cy="1000000"/>
-          </a:xfrm>
-          <a:prstGeom prst="roundRect">
-            <a:avLst/>
-          </a:prstGeom>
-          <a:solidFill>
-            <a:srgbClr val="E8F5E9"/>
-          </a:solidFill>
-          <a:ln>
-            <a:noFill/>
-          </a:ln>
-        </p:spPr>
-        <p:style>
-          <a:lnRef idx="1">
-            <a:schemeClr val="accent1"/>
-          </a:lnRef>
-          <a:fillRef idx="3">
-            <a:schemeClr val="accent1"/>
-          </a:fillRef>
-          <a:effectRef idx="2">
-            <a:schemeClr val="accent1"/>
-          </a:effectRef>
-          <a:fontRef idx="minor">
-            <a:schemeClr val="lt1"/>
-          </a:fontRef>
-        </p:style>
-        <p:txBody>
-          <a:bodyPr rtlCol="0" anchor="ctr" wrap="square" tIns="127000" bIns="127000" lIns="152400" rIns="152400"/>
-          <a:lstStyle/>
-          <a:p>
-            <a:pPr algn="ctr"/>
-            <a:r>
-              <a:rPr sz="1300" b="1">
-                <a:solidFill>
-                  <a:srgbClr val="333333"/>
-                </a:solidFill>
-              </a:rPr>
-              <a:t>Key Insight: Snow severity doubled (25.2 in vs. 11.6 in), causing rush-hour storm losses to exceed off-peak losses by 3-5x. Pre-positioning vehicles is the highest-value intervention.</a:t>
-            </a:r>
-          </a:p>
-        </p:txBody>
-      </p:sp>
-    </p:spTree>
-  </p:cSld>
-  <p:clrMapOvr>
-    <a:masterClrMapping/>
-  </p:clrMapOvr>
-</p:sld>
-</file>
-
-<file path=ppt/slides/slide27.xml><?xml version="1.0" encoding="utf-8"?>
-<p:sld xmlns:a="http://schemas.openxmlformats.org/drawingml/2006/main" xmlns:p="http://schemas.openxmlformats.org/presentationml/2006/main" xmlns:r="http://schemas.openxmlformats.org/officeDocument/2006/relationships">
-  <p:cSld>
-    <p:spTree>
-      <p:nvGrpSpPr>
-        <p:cNvPr id="1" name=""/>
-        <p:cNvGrpSpPr/>
-        <p:nvPr/>
-      </p:nvGrpSpPr>
-      <p:grpSpPr/>
-      <p:sp>
-        <p:nvSpPr>
-          <p:cNvPr id="2" name="Title 1"/>
-          <p:cNvSpPr>
-            <a:spLocks noGrp="1"/>
-          </p:cNvSpPr>
-          <p:nvPr>
-            <p:ph type="title"/>
-          </p:nvPr>
-        </p:nvSpPr>
-        <p:spPr/>
-        <p:txBody>
-          <a:bodyPr/>
-          <a:lstStyle/>
-          <a:p>
-            <a:r>
-              <a:t>The Business Question (NEW VERSION)</a:t>
-            </a:r>
-          </a:p>
-        </p:txBody>
-      </p:sp>
-      <p:sp>
-        <p:nvSpPr>
-          <p:cNvPr id="3" name="Content Placeholder 2"/>
-          <p:cNvSpPr>
-            <a:spLocks noGrp="1"/>
-          </p:cNvSpPr>
-          <p:nvPr>
-            <p:ph idx="1"/>
-          </p:nvPr>
-        </p:nvSpPr>
-        <p:spPr/>
-        <p:txBody>
-          <a:bodyPr/>
-          <a:lstStyle/>
-          <a:p/>
-        </p:txBody>
-      </p:sp>
-      <p:sp>
-        <p:nvSpPr>
-          <p:cNvPr id="4" name="Rectangle 3"/>
-          <p:cNvSpPr/>
-          <p:nvPr/>
-        </p:nvSpPr>
-        <p:spPr>
-          <a:xfrm>
-            <a:off x="0" y="800000"/>
-            <a:ext cx="12192000" cy="80000"/>
-          </a:xfrm>
-          <a:prstGeom prst="rect">
-            <a:avLst/>
-          </a:prstGeom>
-          <a:solidFill>
-            <a:srgbClr val="FE3082"/>
-          </a:solidFill>
-          <a:ln>
-            <a:noFill/>
-          </a:ln>
-        </p:spPr>
-        <p:style>
-          <a:lnRef idx="1">
-            <a:schemeClr val="accent1"/>
-          </a:lnRef>
-          <a:fillRef idx="3">
-            <a:schemeClr val="accent1"/>
-          </a:fillRef>
-          <a:effectRef idx="2">
-            <a:schemeClr val="accent1"/>
-          </a:effectRef>
-          <a:fontRef idx="minor">
-            <a:schemeClr val="lt1"/>
-          </a:fontRef>
-        </p:style>
-        <p:txBody>
-          <a:bodyPr rtlCol="0" anchor="ctr"/>
-          <a:lstStyle/>
-          <a:p>
-            <a:pPr algn="ctr"/>
-          </a:p>
-        </p:txBody>
-      </p:sp>
-      <p:sp>
-        <p:nvSpPr>
-          <p:cNvPr id="5" name="Rounded Rectangle 4"/>
-          <p:cNvSpPr/>
-          <p:nvPr/>
-        </p:nvSpPr>
-        <p:spPr>
-          <a:xfrm>
-            <a:off x="400000" y="1100000"/>
-            <a:ext cx="11400000" cy="1200000"/>
-          </a:xfrm>
-          <a:prstGeom prst="roundRect">
-            <a:avLst/>
-          </a:prstGeom>
-          <a:solidFill>
-            <a:srgbClr val="E3F2FD"/>
-          </a:solidFill>
-          <a:ln>
-            <a:noFill/>
-          </a:ln>
-        </p:spPr>
-        <p:style>
-          <a:lnRef idx="1">
-            <a:schemeClr val="accent1"/>
-          </a:lnRef>
-          <a:fillRef idx="3">
-            <a:schemeClr val="accent1"/>
-          </a:fillRef>
-          <a:effectRef idx="2">
-            <a:schemeClr val="accent1"/>
-          </a:effectRef>
-          <a:fontRef idx="minor">
-            <a:schemeClr val="lt1"/>
-          </a:fontRef>
-        </p:style>
-        <p:txBody>
-          <a:bodyPr rtlCol="0" anchor="ctr" wrap="square" tIns="127000" bIns="127000" lIns="152400" rIns="152400"/>
-          <a:lstStyle/>
-          <a:p>
-            <a:pPr algn="ctr"/>
-            <a:r>
-              <a:rPr sz="1600" b="1">
-                <a:solidFill>
-                  <a:srgbClr val="333333"/>
-                </a:solidFill>
-              </a:rPr>
-              <a:t>How does adverse weather affect taxi demand across NYC boroughs,</a:t>
-            </a:r>
-          </a:p>
-          <a:p>
-            <a:r>
-              <a:rPr sz="1600" b="1">
-                <a:solidFill>
-                  <a:srgbClr val="333333"/>
-                </a:solidFill>
-              </a:rPr>
-              <a:t>and how did those patterns shift between 2025 and 2026?</a:t>
-            </a:r>
-          </a:p>
-        </p:txBody>
-      </p:sp>
-      <p:sp>
-        <p:nvSpPr>
-          <p:cNvPr id="6" name="Rounded Rectangle 5"/>
-          <p:cNvSpPr/>
-          <p:nvPr/>
-        </p:nvSpPr>
-        <p:spPr>
-          <a:xfrm>
-            <a:off x="400000" y="2600000"/>
-            <a:ext cx="5400000" cy="2200000"/>
-          </a:xfrm>
-          <a:prstGeom prst="roundRect">
-            <a:avLst/>
-          </a:prstGeom>
-          <a:solidFill>
-            <a:srgbClr val="FFF3E0"/>
-          </a:solidFill>
-          <a:ln>
-            <a:noFill/>
-          </a:ln>
-        </p:spPr>
-        <p:style>
-          <a:lnRef idx="1">
-            <a:schemeClr val="accent1"/>
-          </a:lnRef>
-          <a:fillRef idx="3">
-            <a:schemeClr val="accent1"/>
-          </a:fillRef>
-          <a:effectRef idx="2">
-            <a:schemeClr val="accent1"/>
-          </a:effectRef>
-          <a:fontRef idx="minor">
-            <a:schemeClr val="lt1"/>
-          </a:fontRef>
-        </p:style>
-        <p:txBody>
-          <a:bodyPr rtlCol="0" anchor="ctr" wrap="square" tIns="127000" bIns="127000" lIns="152400" rIns="152400"/>
-          <a:lstStyle/>
-          <a:p>
-            <a:pPr algn="ctr"/>
-            <a:r>
-              <a:rPr sz="1400" b="1">
-                <a:solidFill>
-                  <a:srgbClr val="333333"/>
-                </a:solidFill>
-              </a:rPr>
-              <a:t>Why It Matters</a:t>
-            </a:r>
-          </a:p>
-          <a:p>
-            <a:r>
-              <a:rPr sz="1000" b="0">
-                <a:solidFill>
-                  <a:srgbClr val="333333"/>
-                </a:solidFill>
-              </a:rPr>
-              <a:t/>
-            </a:r>
-          </a:p>
-          <a:p>
-            <a:r>
-              <a:rPr sz="1200" b="0">
-                <a:solidFill>
-                  <a:srgbClr val="333333"/>
-                </a:solidFill>
-              </a:rPr>
-              <a:t>Fleet operators need to know where demand drops during storms</a:t>
-            </a:r>
-          </a:p>
-          <a:p>
-            <a:r>
-              <a:rPr sz="1200" b="0">
-                <a:solidFill>
-                  <a:srgbClr val="333333"/>
-                </a:solidFill>
-              </a:rPr>
-              <a:t>Surge pricing decisions depend on weather sensitivity by zone</a:t>
-            </a:r>
-          </a:p>
-          <a:p>
-            <a:r>
-              <a:rPr sz="1200" b="0">
-                <a:solidFill>
-                  <a:srgbClr val="333333"/>
-                </a:solidFill>
-              </a:rPr>
-              <a:t>NYC TLC planning benefits from quantified weather impact</a:t>
-            </a:r>
-          </a:p>
-        </p:txBody>
-      </p:sp>
-      <p:sp>
-        <p:nvSpPr>
-          <p:cNvPr id="7" name="Rounded Rectangle 6"/>
-          <p:cNvSpPr/>
-          <p:nvPr/>
-        </p:nvSpPr>
-        <p:spPr>
-          <a:xfrm>
-            <a:off x="6100000" y="2600000"/>
-            <a:ext cx="5700000" cy="2200000"/>
-          </a:xfrm>
-          <a:prstGeom prst="roundRect">
-            <a:avLst/>
-          </a:prstGeom>
-          <a:solidFill>
-            <a:srgbClr val="E8F5E9"/>
-          </a:solidFill>
-          <a:ln>
-            <a:noFill/>
-          </a:ln>
-        </p:spPr>
-        <p:style>
-          <a:lnRef idx="1">
-            <a:schemeClr val="accent1"/>
-          </a:lnRef>
-          <a:fillRef idx="3">
-            <a:schemeClr val="accent1"/>
-          </a:fillRef>
-          <a:effectRef idx="2">
-            <a:schemeClr val="accent1"/>
-          </a:effectRef>
-          <a:fontRef idx="minor">
-            <a:schemeClr val="lt1"/>
-          </a:fontRef>
-        </p:style>
-        <p:txBody>
-          <a:bodyPr rtlCol="0" anchor="ctr" wrap="square" tIns="127000" bIns="127000" lIns="152400" rIns="152400"/>
-          <a:lstStyle/>
-          <a:p>
-            <a:pPr algn="ctr"/>
-            <a:r>
-              <a:rPr sz="1400" b="1">
-                <a:solidFill>
-                  <a:srgbClr val="333333"/>
-                </a:solidFill>
-              </a:rPr>
-              <a:t>Scope</a:t>
-            </a:r>
-          </a:p>
-          <a:p>
-            <a:r>
-              <a:rPr sz="1000" b="0">
-                <a:solidFill>
-                  <a:srgbClr val="333333"/>
-                </a:solidFill>
-              </a:rPr>
-              <a:t/>
-            </a:r>
-          </a:p>
-          <a:p>
-            <a:r>
-              <a:rPr sz="1200" b="0">
-                <a:solidFill>
-                  <a:srgbClr val="333333"/>
-                </a:solidFill>
-              </a:rPr>
-              <a:t>Yellow + Green taxi, Jan-May 2025 vs Jan-May 2026</a:t>
-            </a:r>
-          </a:p>
-          <a:p>
-            <a:r>
-              <a:rPr sz="1200" b="0">
-                <a:solidFill>
-                  <a:srgbClr val="333333"/>
-                </a:solidFill>
-              </a:rPr>
-              <a:t>39.2 million trip records from S3</a:t>
-            </a:r>
-          </a:p>
-          <a:p>
-            <a:r>
-              <a:rPr sz="1200" b="0">
-                <a:solidFill>
-                  <a:srgbClr val="333333"/>
-                </a:solidFill>
-              </a:rPr>
-              <a:t>Weather enrichment: hourly NYC conditions (7,248 hrs)</a:t>
-            </a:r>
-          </a:p>
-          <a:p>
-            <a:r>
-              <a:rPr sz="1200" b="0">
-                <a:solidFill>
-                  <a:srgbClr val="333333"/>
-                </a:solidFill>
-              </a:rPr>
-              <a:t>265 taxi zones mapped to 5 boroughs</a:t>
-            </a:r>
-          </a:p>
-        </p:txBody>
-      </p:sp>
-      <p:sp>
-        <p:nvSpPr>
-          <p:cNvPr id="8" name="Rounded Rectangle 7"/>
-          <p:cNvSpPr/>
-          <p:nvPr/>
-        </p:nvSpPr>
-        <p:spPr>
-          <a:xfrm>
-            <a:off x="400000" y="5100000"/>
-            <a:ext cx="11400000" cy="1000000"/>
-          </a:xfrm>
-          <a:prstGeom prst="roundRect">
-            <a:avLst/>
-          </a:prstGeom>
-          <a:solidFill>
-            <a:srgbClr val="FCE4EC"/>
-          </a:solidFill>
-          <a:ln>
-            <a:noFill/>
-          </a:ln>
-        </p:spPr>
-        <p:style>
-          <a:lnRef idx="1">
-            <a:schemeClr val="accent1"/>
-          </a:lnRef>
-          <a:fillRef idx="3">
-            <a:schemeClr val="accent1"/>
-          </a:fillRef>
-          <a:effectRef idx="2">
-            <a:schemeClr val="accent1"/>
-          </a:effectRef>
-          <a:fontRef idx="minor">
-            <a:schemeClr val="lt1"/>
-          </a:fontRef>
-        </p:style>
-        <p:txBody>
-          <a:bodyPr rtlCol="0" anchor="ctr" wrap="square" tIns="127000" bIns="127000" lIns="152400" rIns="152400"/>
-          <a:lstStyle/>
-          <a:p>
-            <a:pPr algn="ctr"/>
-            <a:r>
-              <a:rPr sz="1300" b="1">
-                <a:solidFill>
-                  <a:srgbClr val="333333"/>
-                </a:solidFill>
-              </a:rPr>
-              <a:t>How We Know We Answered It: Pre-aggregated mart (30,251 rows) with trip counts, revenue, and duration by borough, weather, year, month, hour, rush hour, night, weekend, and payment type.</a:t>
-            </a:r>
-          </a:p>
-        </p:txBody>
-      </p:sp>
-    </p:spTree>
-  </p:cSld>
-  <p:clrMapOvr>
-    <a:masterClrMapping/>
-  </p:clrMapOvr>
-</p:sld>
-</file>
-
-<file path=ppt/slides/slide28.xml><?xml version="1.0" encoding="utf-8"?>
-<p:sld xmlns:a="http://schemas.openxmlformats.org/drawingml/2006/main" xmlns:p="http://schemas.openxmlformats.org/presentationml/2006/main" xmlns:r="http://schemas.openxmlformats.org/officeDocument/2006/relationships">
-  <p:cSld>
-    <p:spTree>
-      <p:nvGrpSpPr>
-        <p:cNvPr id="1" name=""/>
-        <p:cNvGrpSpPr/>
-        <p:nvPr/>
-      </p:nvGrpSpPr>
-      <p:grpSpPr/>
-      <p:sp>
-        <p:nvSpPr>
-          <p:cNvPr id="2" name="Title 1"/>
-          <p:cNvSpPr>
-            <a:spLocks noGrp="1"/>
-          </p:cNvSpPr>
-          <p:nvPr>
-            <p:ph type="title"/>
-          </p:nvPr>
-        </p:nvSpPr>
-        <p:spPr/>
-        <p:txBody>
-          <a:bodyPr/>
-          <a:lstStyle/>
-          <a:p>
-            <a:r>
-              <a:t>Year-over-Year Finding (NEW VERSION)</a:t>
-            </a:r>
-          </a:p>
-        </p:txBody>
-      </p:sp>
-      <p:sp>
-        <p:nvSpPr>
-          <p:cNvPr id="3" name="Content Placeholder 2"/>
-          <p:cNvSpPr>
-            <a:spLocks noGrp="1"/>
-          </p:cNvSpPr>
-          <p:nvPr>
-            <p:ph idx="1"/>
-          </p:nvPr>
-        </p:nvSpPr>
-        <p:spPr/>
-        <p:txBody>
-          <a:bodyPr/>
-          <a:lstStyle/>
-          <a:p/>
-        </p:txBody>
-      </p:sp>
-      <p:sp>
-        <p:nvSpPr>
-          <p:cNvPr id="4" name="Rectangle 3"/>
-          <p:cNvSpPr/>
-          <p:nvPr/>
-        </p:nvSpPr>
-        <p:spPr>
-          <a:xfrm>
-            <a:off x="0" y="800000"/>
-            <a:ext cx="12192000" cy="80000"/>
-          </a:xfrm>
-          <a:prstGeom prst="rect">
-            <a:avLst/>
-          </a:prstGeom>
-          <a:solidFill>
-            <a:srgbClr val="FE3082"/>
-          </a:solidFill>
-          <a:ln>
-            <a:noFill/>
-          </a:ln>
-        </p:spPr>
-        <p:style>
-          <a:lnRef idx="1">
-            <a:schemeClr val="accent1"/>
-          </a:lnRef>
-          <a:fillRef idx="3">
-            <a:schemeClr val="accent1"/>
-          </a:fillRef>
-          <a:effectRef idx="2">
-            <a:schemeClr val="accent1"/>
-          </a:effectRef>
-          <a:fontRef idx="minor">
-            <a:schemeClr val="lt1"/>
-          </a:fontRef>
-        </p:style>
-        <p:txBody>
-          <a:bodyPr rtlCol="0" anchor="ctr"/>
-          <a:lstStyle/>
-          <a:p>
-            <a:pPr algn="ctr"/>
-          </a:p>
-        </p:txBody>
-      </p:sp>
-      <p:sp>
-        <p:nvSpPr>
-          <p:cNvPr id="5" name="Rounded Rectangle 4"/>
-          <p:cNvSpPr/>
-          <p:nvPr/>
-        </p:nvSpPr>
-        <p:spPr>
-          <a:xfrm>
-            <a:off x="400000" y="1100000"/>
-            <a:ext cx="11400000" cy="1500000"/>
-          </a:xfrm>
-          <a:prstGeom prst="roundRect">
-            <a:avLst/>
-          </a:prstGeom>
-          <a:solidFill>
-            <a:srgbClr val="FCE4EC"/>
-          </a:solidFill>
-          <a:ln>
-            <a:noFill/>
-          </a:ln>
-        </p:spPr>
-        <p:style>
-          <a:lnRef idx="1">
-            <a:schemeClr val="accent1"/>
-          </a:lnRef>
-          <a:fillRef idx="3">
-            <a:schemeClr val="accent1"/>
-          </a:fillRef>
-          <a:effectRef idx="2">
-            <a:schemeClr val="accent1"/>
-          </a:effectRef>
-          <a:fontRef idx="minor">
-            <a:schemeClr val="lt1"/>
-          </a:fontRef>
-        </p:style>
-        <p:txBody>
-          <a:bodyPr rtlCol="0" anchor="ctr" wrap="square" tIns="127000" bIns="127000" lIns="152400" rIns="152400"/>
-          <a:lstStyle/>
-          <a:p>
-            <a:pPr algn="ctr"/>
-            <a:r>
-              <a:rPr sz="1300" b="1">
-                <a:solidFill>
-                  <a:srgbClr val="333333"/>
-                </a:solidFill>
-              </a:rPr>
-              <a:t>2025: Adverse weather INCREASED daytime taxi demand in Manhattan (+15.6%)</a:t>
-            </a:r>
-          </a:p>
-          <a:p>
-            <a:r>
-              <a:rPr sz="1300" b="1">
-                <a:solidFill>
-                  <a:srgbClr val="333333"/>
-                </a:solidFill>
-              </a:rPr>
-              <a:t>and Brooklyn (+20.6%) as riders switched from walking/transit to cabs.</a:t>
-            </a:r>
-          </a:p>
-          <a:p>
-            <a:r>
-              <a:rPr sz="1000" b="0">
-                <a:solidFill>
-                  <a:srgbClr val="333333"/>
-                </a:solidFill>
-              </a:rPr>
-              <a:t/>
-            </a:r>
-          </a:p>
-          <a:p>
-            <a:r>
-              <a:rPr sz="1300" b="1">
-                <a:solidFill>
-                  <a:srgbClr val="333333"/>
-                </a:solidFill>
-              </a:rPr>
-              <a:t>2026: That same weather DECREASED demand everywhere. Manhattan -18.4%,</a:t>
-            </a:r>
-          </a:p>
-          <a:p>
-            <a:r>
-              <a:rPr sz="1300" b="1">
-                <a:solidFill>
-                  <a:srgbClr val="333333"/>
-                </a:solidFill>
-              </a:rPr>
-              <a:t>Brooklyn -9.7%, Queens -24.3%, Bronx -24.1%.</a:t>
-            </a:r>
-          </a:p>
-        </p:txBody>
-      </p:sp>
-      <p:sp>
-        <p:nvSpPr>
-          <p:cNvPr id="6" name="Rounded Rectangle 5"/>
-          <p:cNvSpPr/>
-          <p:nvPr/>
-        </p:nvSpPr>
-        <p:spPr>
-          <a:xfrm>
-            <a:off x="400000" y="2900000"/>
-            <a:ext cx="5400000" cy="1600000"/>
-          </a:xfrm>
-          <a:prstGeom prst="roundRect">
-            <a:avLst/>
-          </a:prstGeom>
-          <a:solidFill>
-            <a:srgbClr val="E3F2FD"/>
-          </a:solidFill>
-          <a:ln>
-            <a:noFill/>
-          </a:ln>
-        </p:spPr>
-        <p:style>
-          <a:lnRef idx="1">
-            <a:schemeClr val="accent1"/>
-          </a:lnRef>
-          <a:fillRef idx="3">
-            <a:schemeClr val="accent1"/>
-          </a:fillRef>
-          <a:effectRef idx="2">
-            <a:schemeClr val="accent1"/>
-          </a:effectRef>
-          <a:fontRef idx="minor">
-            <a:schemeClr val="lt1"/>
-          </a:fontRef>
-        </p:style>
-        <p:txBody>
-          <a:bodyPr rtlCol="0" anchor="ctr" wrap="square" tIns="127000" bIns="127000" lIns="152400" rIns="152400"/>
-          <a:lstStyle/>
-          <a:p>
-            <a:pPr algn="ctr"/>
-            <a:r>
-              <a:rPr sz="1300" b="1">
-                <a:solidFill>
-                  <a:srgbClr val="333333"/>
-                </a:solidFill>
-              </a:rPr>
-              <a:t>Is the comparison fair?</a:t>
-            </a:r>
-          </a:p>
-          <a:p>
-            <a:r>
-              <a:rPr sz="1000" b="0">
-                <a:solidFill>
-                  <a:srgbClr val="333333"/>
-                </a:solidFill>
-              </a:rPr>
-              <a:t/>
-            </a:r>
-          </a:p>
-          <a:p>
-            <a:r>
-              <a:rPr sz="1100" b="0">
-                <a:solidFill>
-                  <a:srgbClr val="333333"/>
-                </a:solidFill>
-              </a:rPr>
-              <a:t>Same months (Jan-May), same vehicle types, same DQ</a:t>
-            </a:r>
-          </a:p>
-          <a:p>
-            <a:r>
-              <a:rPr sz="1100" b="0">
-                <a:solidFill>
-                  <a:srgbClr val="333333"/>
-                </a:solidFill>
-              </a:rPr>
-              <a:t>filters applied to both years. Weather matched on</a:t>
-            </a:r>
-          </a:p>
-          <a:p>
-            <a:r>
-              <a:rPr sz="1100" b="0">
-                <a:solidFill>
-                  <a:srgbClr val="333333"/>
-                </a:solidFill>
-              </a:rPr>
-              <a:t>same hourly granularity. 3.0% flagged invalid in both.</a:t>
-            </a:r>
-          </a:p>
-        </p:txBody>
-      </p:sp>
-      <p:sp>
-        <p:nvSpPr>
-          <p:cNvPr id="7" name="Rounded Rectangle 6"/>
-          <p:cNvSpPr/>
-          <p:nvPr/>
-        </p:nvSpPr>
-        <p:spPr>
-          <a:xfrm>
-            <a:off x="6100000" y="2900000"/>
-            <a:ext cx="5700000" cy="1600000"/>
-          </a:xfrm>
-          <a:prstGeom prst="roundRect">
-            <a:avLst/>
-          </a:prstGeom>
-          <a:solidFill>
-            <a:srgbClr val="FFF3E0"/>
-          </a:solidFill>
-          <a:ln>
-            <a:noFill/>
-          </a:ln>
-        </p:spPr>
-        <p:style>
-          <a:lnRef idx="1">
-            <a:schemeClr val="accent1"/>
-          </a:lnRef>
-          <a:fillRef idx="3">
-            <a:schemeClr val="accent1"/>
-          </a:fillRef>
-          <a:effectRef idx="2">
-            <a:schemeClr val="accent1"/>
-          </a:effectRef>
-          <a:fontRef idx="minor">
-            <a:schemeClr val="lt1"/>
-          </a:fontRef>
-        </p:style>
-        <p:txBody>
-          <a:bodyPr rtlCol="0" anchor="ctr" wrap="square" tIns="127000" bIns="127000" lIns="152400" rIns="152400"/>
-          <a:lstStyle/>
-          <a:p>
-            <a:pPr algn="ctr"/>
-            <a:r>
-              <a:rPr sz="1300" b="1">
-                <a:solidFill>
-                  <a:srgbClr val="333333"/>
-                </a:solidFill>
-              </a:rPr>
-              <a:t>What drove it?</a:t>
-            </a:r>
-          </a:p>
-          <a:p>
-            <a:r>
-              <a:rPr sz="1000" b="0">
-                <a:solidFill>
-                  <a:srgbClr val="333333"/>
-                </a:solidFill>
-              </a:rPr>
-              <a:t/>
-            </a:r>
-          </a:p>
-          <a:p>
-            <a:r>
-              <a:rPr sz="1100" b="0">
-                <a:solidFill>
-                  <a:srgbClr val="333333"/>
-                </a:solidFill>
-              </a:rPr>
-              <a:t>Snow severity doubled: 11.6 in (2025) vs 25.2 in (2026)</a:t>
-            </a:r>
-          </a:p>
-          <a:p>
-            <a:r>
-              <a:rPr sz="1100" b="0">
-                <a:solidFill>
-                  <a:srgbClr val="333333"/>
-                </a:solidFill>
-              </a:rPr>
-              <a:t>Snow hours: 84 vs 133. Rain still boosts demand both years.</a:t>
-            </a:r>
-          </a:p>
-          <a:p>
-            <a:r>
-              <a:rPr sz="1100" b="0">
-                <a:solidFill>
-                  <a:srgbClr val="333333"/>
-                </a:solidFill>
-              </a:rPr>
-              <a:t>Snow drove Manhattan -31.3%, Queens -31.4% in 2026.</a:t>
-            </a:r>
-          </a:p>
-        </p:txBody>
-      </p:sp>
-      <p:sp>
-        <p:nvSpPr>
-          <p:cNvPr id="8" name="Rounded Rectangle 7"/>
-          <p:cNvSpPr/>
-          <p:nvPr/>
-        </p:nvSpPr>
-        <p:spPr>
-          <a:xfrm>
-            <a:off x="400000" y="4800000"/>
-            <a:ext cx="11400000" cy="1000000"/>
-          </a:xfrm>
-          <a:prstGeom prst="roundRect">
-            <a:avLst/>
-          </a:prstGeom>
-          <a:solidFill>
-            <a:srgbClr val="E8F5E9"/>
-          </a:solidFill>
-          <a:ln>
-            <a:noFill/>
-          </a:ln>
-        </p:spPr>
-        <p:style>
-          <a:lnRef idx="1">
-            <a:schemeClr val="accent1"/>
-          </a:lnRef>
-          <a:fillRef idx="3">
-            <a:schemeClr val="accent1"/>
-          </a:fillRef>
-          <a:effectRef idx="2">
-            <a:schemeClr val="accent1"/>
-          </a:effectRef>
-          <a:fontRef idx="minor">
-            <a:schemeClr val="lt1"/>
-          </a:fontRef>
-        </p:style>
-        <p:txBody>
-          <a:bodyPr rtlCol="0" anchor="ctr" wrap="square" tIns="127000" bIns="127000" lIns="152400" rIns="152400"/>
-          <a:lstStyle/>
-          <a:p>
-            <a:pPr algn="ctr"/>
-            <a:r>
-              <a:rPr sz="1200" b="1">
-                <a:solidFill>
-                  <a:srgbClr val="333333"/>
-                </a:solidFill>
-              </a:rPr>
-              <a:t>So What? Pre-position vehicles before forecasted snow events, prioritize rush-hour coverage. Rain = revenue opportunity (+11-22% demand). Snow = risk requiring proactive fleet response (-19% to -31% demand).</a:t>
-            </a:r>
-          </a:p>
-        </p:txBody>
-      </p:sp>
-    </p:spTree>
-  </p:cSld>
-  <p:clrMapOvr>
-    <a:masterClrMapping/>
-  </p:clrMapOvr>
-</p:sld>
-</file>
-
-<file path=ppt/slides/slide29.xml><?xml version="1.0" encoding="utf-8"?>
-<p:sld xmlns:a="http://schemas.openxmlformats.org/drawingml/2006/main" xmlns:p="http://schemas.openxmlformats.org/presentationml/2006/main" xmlns:r="http://schemas.openxmlformats.org/officeDocument/2006/relationships">
-  <p:cSld>
-    <p:spTree>
-      <p:nvGrpSpPr>
-        <p:cNvPr id="1" name=""/>
-        <p:cNvGrpSpPr/>
-        <p:nvPr/>
-      </p:nvGrpSpPr>
-      <p:grpSpPr/>
-      <p:sp>
-        <p:nvSpPr>
-          <p:cNvPr id="2" name="Title 1"/>
-          <p:cNvSpPr>
-            <a:spLocks noGrp="1"/>
-          </p:cNvSpPr>
-          <p:nvPr>
-            <p:ph type="title"/>
-          </p:nvPr>
-        </p:nvSpPr>
-        <p:spPr/>
-        <p:txBody>
-          <a:bodyPr/>
-          <a:lstStyle/>
-          <a:p>
-            <a:r>
-              <a:t>Streamlit Dashboard (NEW VERSION - place before Tableau)</a:t>
-            </a:r>
-          </a:p>
-        </p:txBody>
-      </p:sp>
-      <p:sp>
-        <p:nvSpPr>
-          <p:cNvPr id="3" name="Content Placeholder 2"/>
-          <p:cNvSpPr>
-            <a:spLocks noGrp="1"/>
-          </p:cNvSpPr>
-          <p:nvPr>
-            <p:ph idx="1"/>
-          </p:nvPr>
-        </p:nvSpPr>
-        <p:spPr/>
-        <p:txBody>
-          <a:bodyPr/>
-          <a:lstStyle/>
-          <a:p/>
-        </p:txBody>
-      </p:sp>
-      <p:sp>
-        <p:nvSpPr>
-          <p:cNvPr id="4" name="Rectangle 3"/>
-          <p:cNvSpPr/>
-          <p:nvPr/>
-        </p:nvSpPr>
-        <p:spPr>
-          <a:xfrm>
-            <a:off x="0" y="800000"/>
-            <a:ext cx="12192000" cy="80000"/>
-          </a:xfrm>
-          <a:prstGeom prst="rect">
-            <a:avLst/>
-          </a:prstGeom>
-          <a:solidFill>
-            <a:srgbClr val="FE3082"/>
-          </a:solidFill>
-          <a:ln>
-            <a:noFill/>
-          </a:ln>
-        </p:spPr>
-        <p:style>
-          <a:lnRef idx="1">
-            <a:schemeClr val="accent1"/>
-          </a:lnRef>
-          <a:fillRef idx="3">
-            <a:schemeClr val="accent1"/>
-          </a:fillRef>
-          <a:effectRef idx="2">
-            <a:schemeClr val="accent1"/>
-          </a:effectRef>
-          <a:fontRef idx="minor">
-            <a:schemeClr val="lt1"/>
-          </a:fontRef>
-        </p:style>
-        <p:txBody>
-          <a:bodyPr rtlCol="0" anchor="ctr"/>
-          <a:lstStyle/>
-          <a:p>
-            <a:pPr algn="ctr"/>
-          </a:p>
-        </p:txBody>
-      </p:sp>
-      <p:sp>
-        <p:nvSpPr>
-          <p:cNvPr id="5" name="Rounded Rectangle 4"/>
-          <p:cNvSpPr/>
-          <p:nvPr/>
-        </p:nvSpPr>
-        <p:spPr>
-          <a:xfrm>
-            <a:off x="400000" y="1100000"/>
-            <a:ext cx="11400000" cy="800000"/>
-          </a:xfrm>
-          <a:prstGeom prst="roundRect">
-            <a:avLst/>
-          </a:prstGeom>
-          <a:solidFill>
-            <a:srgbClr val="E3F2FD"/>
-          </a:solidFill>
-          <a:ln>
-            <a:noFill/>
-          </a:ln>
-        </p:spPr>
-        <p:style>
-          <a:lnRef idx="1">
-            <a:schemeClr val="accent1"/>
-          </a:lnRef>
-          <a:fillRef idx="3">
-            <a:schemeClr val="accent1"/>
-          </a:fillRef>
-          <a:effectRef idx="2">
-            <a:schemeClr val="accent1"/>
-          </a:effectRef>
-          <a:fontRef idx="minor">
-            <a:schemeClr val="lt1"/>
-          </a:fontRef>
-        </p:style>
-        <p:txBody>
-          <a:bodyPr rtlCol="0" anchor="ctr" wrap="square" tIns="127000" bIns="127000" lIns="152400" rIns="152400"/>
-          <a:lstStyle/>
-          <a:p>
-            <a:pPr algn="ctr"/>
-            <a:r>
-              <a:rPr sz="1400" b="0">
-                <a:solidFill>
-                  <a:srgbClr val="333333"/>
-                </a:solidFill>
-              </a:rPr>
-              <a:t>[Insert Streamlit Dashboard Screenshot]</a:t>
-            </a:r>
-          </a:p>
-          <a:p>
-            <a:r>
-              <a:rPr sz="1200" b="0">
-                <a:solidFill>
-                  <a:srgbClr val="333333"/>
-                </a:solidFill>
-              </a:rPr>
-              <a:t>Deployed on Streamlit Community Cloud | Live Snowflake connection | 6 interactive visualizations with borough tabs</a:t>
-            </a:r>
-          </a:p>
-        </p:txBody>
-      </p:sp>
-      <p:sp>
-        <p:nvSpPr>
-          <p:cNvPr id="6" name="Rounded Rectangle 5"/>
-          <p:cNvSpPr/>
-          <p:nvPr/>
-        </p:nvSpPr>
-        <p:spPr>
-          <a:xfrm>
-            <a:off x="400000" y="2100000"/>
-            <a:ext cx="5400000" cy="2400000"/>
-          </a:xfrm>
-          <a:prstGeom prst="roundRect">
-            <a:avLst/>
-          </a:prstGeom>
-          <a:solidFill>
-            <a:srgbClr val="E8F5E9"/>
-          </a:solidFill>
-          <a:ln>
-            <a:noFill/>
-          </a:ln>
-        </p:spPr>
-        <p:style>
-          <a:lnRef idx="1">
-            <a:schemeClr val="accent1"/>
-          </a:lnRef>
-          <a:fillRef idx="3">
-            <a:schemeClr val="accent1"/>
-          </a:fillRef>
-          <a:effectRef idx="2">
-            <a:schemeClr val="accent1"/>
-          </a:effectRef>
-          <a:fontRef idx="minor">
-            <a:schemeClr val="lt1"/>
-          </a:fontRef>
-        </p:style>
-        <p:txBody>
-          <a:bodyPr rtlCol="0" anchor="ctr" wrap="square" tIns="127000" bIns="127000" lIns="152400" rIns="152400"/>
-          <a:lstStyle/>
-          <a:p>
-            <a:pPr algn="ctr"/>
-            <a:r>
-              <a:rPr sz="1400" b="1">
-                <a:solidFill>
-                  <a:srgbClr val="333333"/>
-                </a:solidFill>
-              </a:rPr>
-              <a:t>6 Visualizations Tell the Story</a:t>
-            </a:r>
-          </a:p>
-          <a:p>
-            <a:r>
-              <a:rPr sz="1000" b="0">
-                <a:solidFill>
-                  <a:srgbClr val="333333"/>
-                </a:solidFill>
-              </a:rPr>
-              <a:t/>
-            </a:r>
-          </a:p>
-          <a:p>
-            <a:r>
-              <a:rPr sz="1100" b="0">
-                <a:solidFill>
-                  <a:srgbClr val="333333"/>
-                </a:solidFill>
-              </a:rPr>
-              <a:t>1. Monthly trip volume (YoY growth trend)</a:t>
-            </a:r>
-          </a:p>
-          <a:p>
-            <a:r>
-              <a:rPr sz="1100" b="0">
-                <a:solidFill>
-                  <a:srgbClr val="333333"/>
-                </a:solidFill>
-              </a:rPr>
-              <a:t>2. Weekday vs. weekend hourly demand patterns</a:t>
-            </a:r>
-          </a:p>
-          <a:p>
-            <a:r>
-              <a:rPr sz="1100" b="0">
-                <a:solidFill>
-                  <a:srgbClr val="333333"/>
-                </a:solidFill>
-              </a:rPr>
-              <a:t>3. Average trip cost by weather (stable across conditions)</a:t>
-            </a:r>
-          </a:p>
-          <a:p>
-            <a:r>
-              <a:rPr sz="1100" b="0">
-                <a:solidFill>
-                  <a:srgbClr val="333333"/>
-                </a:solidFill>
-              </a:rPr>
-              <a:t>4. Weather's demand effect flipped 2025 to 2026 (core finding)</a:t>
-            </a:r>
-          </a:p>
-          <a:p>
-            <a:r>
-              <a:rPr sz="1100" b="0">
-                <a:solidFill>
-                  <a:srgbClr val="333333"/>
-                </a:solidFill>
-              </a:rPr>
-              <a:t>5. Rain vs. snow breakdown (snow is the driver)</a:t>
-            </a:r>
-          </a:p>
-          <a:p>
-            <a:r>
-              <a:rPr sz="1100" b="0">
-                <a:solidFill>
-                  <a:srgbClr val="333333"/>
-                </a:solidFill>
-              </a:rPr>
-              <a:t>6. Revenue per storm-hour (dollar impact, rush vs off-peak)</a:t>
-            </a:r>
-          </a:p>
-        </p:txBody>
-      </p:sp>
-      <p:sp>
-        <p:nvSpPr>
-          <p:cNvPr id="7" name="Rounded Rectangle 6"/>
-          <p:cNvSpPr/>
-          <p:nvPr/>
-        </p:nvSpPr>
-        <p:spPr>
-          <a:xfrm>
-            <a:off x="6100000" y="2100000"/>
-            <a:ext cx="5700000" cy="2400000"/>
-          </a:xfrm>
-          <a:prstGeom prst="roundRect">
-            <a:avLst/>
-          </a:prstGeom>
-          <a:solidFill>
-            <a:srgbClr val="FFF3E0"/>
-          </a:solidFill>
-          <a:ln>
-            <a:noFill/>
-          </a:ln>
-        </p:spPr>
-        <p:style>
-          <a:lnRef idx="1">
-            <a:schemeClr val="accent1"/>
-          </a:lnRef>
-          <a:fillRef idx="3">
-            <a:schemeClr val="accent1"/>
-          </a:fillRef>
-          <a:effectRef idx="2">
-            <a:schemeClr val="accent1"/>
-          </a:effectRef>
-          <a:fontRef idx="minor">
-            <a:schemeClr val="lt1"/>
-          </a:fontRef>
-        </p:style>
-        <p:txBody>
-          <a:bodyPr rtlCol="0" anchor="ctr" wrap="square" tIns="127000" bIns="127000" lIns="152400" rIns="152400"/>
-          <a:lstStyle/>
-          <a:p>
-            <a:pPr algn="ctr"/>
-            <a:r>
-              <a:rPr sz="1400" b="1">
-                <a:solidFill>
-                  <a:srgbClr val="333333"/>
-                </a:solidFill>
-              </a:rPr>
-              <a:t>Key Insights from the Dashboard</a:t>
-            </a:r>
-          </a:p>
-          <a:p>
-            <a:r>
-              <a:rPr sz="1000" b="0">
-                <a:solidFill>
-                  <a:srgbClr val="333333"/>
-                </a:solidFill>
-              </a:rPr>
-              <a:t/>
-            </a:r>
-          </a:p>
-          <a:p>
-            <a:r>
-              <a:rPr sz="1100" b="0">
-                <a:solidFill>
-                  <a:srgbClr val="333333"/>
-                </a:solidFill>
-              </a:rPr>
-              <a:t>Manhattan: +15.6% demand in storms (2025) to -18.4% (2026)</a:t>
-            </a:r>
-          </a:p>
-          <a:p>
-            <a:r>
-              <a:rPr sz="1100" b="0">
-                <a:solidFill>
-                  <a:srgbClr val="333333"/>
-                </a:solidFill>
-              </a:rPr>
-              <a:t>Snow drove -31% demand in Manhattan/Queens in 2026</a:t>
-            </a:r>
-          </a:p>
-          <a:p>
-            <a:r>
-              <a:rPr sz="1100" b="0">
-                <a:solidFill>
-                  <a:srgbClr val="333333"/>
-                </a:solidFill>
-              </a:rPr>
-              <a:t>Rain STILL boosts demand (+11-22%) in both years</a:t>
-            </a:r>
-          </a:p>
-          <a:p>
-            <a:r>
-              <a:rPr sz="1100" b="0">
-                <a:solidFill>
-                  <a:srgbClr val="333333"/>
-                </a:solidFill>
-              </a:rPr>
-              <a:t>Trip cost stable across weather (volume, not price, changes)</a:t>
-            </a:r>
-          </a:p>
-          <a:p>
-            <a:r>
-              <a:rPr sz="1100" b="0">
-                <a:solidFill>
-                  <a:srgbClr val="333333"/>
-                </a:solidFill>
-              </a:rPr>
-              <a:t>Rush-hour storm losses exceed off-peak by 3-5x</a:t>
             </a:r>
           </a:p>
         </p:txBody>
@@ -17241,7 +17045,7 @@
           <a:lstStyle/>
           <a:p>
             <a:r>
-              <a:t>Recommendation (NEW VERSION)</a:t>
+              <a:t>Headline Finding (NEW VERSION)</a:t>
             </a:r>
           </a:p>
         </p:txBody>
@@ -17347,42 +17151,32 @@
           <a:p>
             <a:pPr algn="ctr"/>
             <a:r>
-              <a:rPr sz="1400" b="1">
+              <a:rPr sz="1500" b="1">
                 <a:solidFill>
                   <a:srgbClr val="333333"/>
                 </a:solidFill>
               </a:rPr>
-              <a:t>Implement a storm-response protocol: pre-position 15-20% more vehicles in Manhattan and</a:t>
-            </a:r>
-          </a:p>
-          <a:p>
-            <a:r>
-              <a:rPr sz="1400" b="1">
+              <a:t>In 2025, adverse weather boosted taxi demand in Manhattan (+15.6%) and</a:t>
+            </a:r>
+          </a:p>
+          <a:p>
+            <a:r>
+              <a:rPr sz="1500" b="1">
                 <a:solidFill>
                   <a:srgbClr val="333333"/>
                 </a:solidFill>
               </a:rPr>
-              <a:t>Brooklyn during forecasted snow events, with priority coverage during rush hours (7-10 AM, 4-7 PM).</a:t>
-            </a:r>
-          </a:p>
-          <a:p>
-            <a:r>
-              <a:rPr sz="1000" b="0">
+              <a:t>Brooklyn (+20.6%) as riders switched to cabs. By 2026, that pattern reversed:</a:t>
+            </a:r>
+          </a:p>
+          <a:p>
+            <a:r>
+              <a:rPr sz="1500" b="1">
                 <a:solidFill>
                   <a:srgbClr val="333333"/>
                 </a:solidFill>
               </a:rPr>
-              <a:t/>
-            </a:r>
-          </a:p>
-          <a:p>
-            <a:r>
-              <a:rPr sz="1200" b="0">
-                <a:solidFill>
-                  <a:srgbClr val="333333"/>
-                </a:solidFill>
-              </a:rPr>
-              <a:t>Rain events remain a revenue opportunity (demand increases +11-22%), so maintain or expand coverage during rain.</a:t>
+              <a:t>adverse weather now suppresses demand across all boroughs.</a:t>
             </a:r>
           </a:p>
         </p:txBody>
@@ -17396,7 +17190,190 @@
         <p:spPr>
           <a:xfrm>
             <a:off x="400000" y="2800000"/>
-            <a:ext cx="5400000" cy="1800000"/>
+            <a:ext cx="3200000" cy="1400000"/>
+          </a:xfrm>
+          <a:prstGeom prst="roundRect">
+            <a:avLst/>
+          </a:prstGeom>
+          <a:solidFill>
+            <a:srgbClr val="E3F2FD"/>
+          </a:solidFill>
+          <a:ln>
+            <a:noFill/>
+          </a:ln>
+        </p:spPr>
+        <p:style>
+          <a:lnRef idx="1">
+            <a:schemeClr val="accent1"/>
+          </a:lnRef>
+          <a:fillRef idx="3">
+            <a:schemeClr val="accent1"/>
+          </a:fillRef>
+          <a:effectRef idx="2">
+            <a:schemeClr val="accent1"/>
+          </a:effectRef>
+          <a:fontRef idx="minor">
+            <a:schemeClr val="lt1"/>
+          </a:fontRef>
+        </p:style>
+        <p:txBody>
+          <a:bodyPr rtlCol="0" anchor="ctr" wrap="square" tIns="127000" bIns="127000" lIns="152400" rIns="152400"/>
+          <a:lstStyle/>
+          <a:p>
+            <a:pPr algn="ctr"/>
+            <a:r>
+              <a:rPr sz="2800" b="1">
+                <a:solidFill>
+                  <a:srgbClr val="333333"/>
+                </a:solidFill>
+              </a:rPr>
+              <a:t>38M+</a:t>
+            </a:r>
+          </a:p>
+          <a:p>
+            <a:r>
+              <a:rPr sz="1400" b="0">
+                <a:solidFill>
+                  <a:srgbClr val="333333"/>
+                </a:solidFill>
+              </a:rPr>
+              <a:t>Trip Records Analyzed</a:t>
+            </a:r>
+          </a:p>
+        </p:txBody>
+      </p:sp>
+      <p:sp>
+        <p:nvSpPr>
+          <p:cNvPr id="7" name="Rounded Rectangle 6"/>
+          <p:cNvSpPr/>
+          <p:nvPr/>
+        </p:nvSpPr>
+        <p:spPr>
+          <a:xfrm>
+            <a:off x="4400000" y="2800000"/>
+            <a:ext cx="3200000" cy="1400000"/>
+          </a:xfrm>
+          <a:prstGeom prst="roundRect">
+            <a:avLst/>
+          </a:prstGeom>
+          <a:solidFill>
+            <a:srgbClr val="E3F2FD"/>
+          </a:solidFill>
+          <a:ln>
+            <a:noFill/>
+          </a:ln>
+        </p:spPr>
+        <p:style>
+          <a:lnRef idx="1">
+            <a:schemeClr val="accent1"/>
+          </a:lnRef>
+          <a:fillRef idx="3">
+            <a:schemeClr val="accent1"/>
+          </a:fillRef>
+          <a:effectRef idx="2">
+            <a:schemeClr val="accent1"/>
+          </a:effectRef>
+          <a:fontRef idx="minor">
+            <a:schemeClr val="lt1"/>
+          </a:fontRef>
+        </p:style>
+        <p:txBody>
+          <a:bodyPr rtlCol="0" anchor="ctr" wrap="square" tIns="127000" bIns="127000" lIns="152400" rIns="152400"/>
+          <a:lstStyle/>
+          <a:p>
+            <a:pPr algn="ctr"/>
+            <a:r>
+              <a:rPr sz="2800" b="1">
+                <a:solidFill>
+                  <a:srgbClr val="333333"/>
+                </a:solidFill>
+              </a:rPr>
+              <a:t>10 months</a:t>
+            </a:r>
+          </a:p>
+          <a:p>
+            <a:r>
+              <a:rPr sz="1400" b="0">
+                <a:solidFill>
+                  <a:srgbClr val="333333"/>
+                </a:solidFill>
+              </a:rPr>
+              <a:t>Jan-May 2025 vs 2026</a:t>
+            </a:r>
+          </a:p>
+        </p:txBody>
+      </p:sp>
+      <p:sp>
+        <p:nvSpPr>
+          <p:cNvPr id="8" name="Rounded Rectangle 7"/>
+          <p:cNvSpPr/>
+          <p:nvPr/>
+        </p:nvSpPr>
+        <p:spPr>
+          <a:xfrm>
+            <a:off x="8400000" y="2800000"/>
+            <a:ext cx="3200000" cy="1400000"/>
+          </a:xfrm>
+          <a:prstGeom prst="roundRect">
+            <a:avLst/>
+          </a:prstGeom>
+          <a:solidFill>
+            <a:srgbClr val="E3F2FD"/>
+          </a:solidFill>
+          <a:ln>
+            <a:noFill/>
+          </a:ln>
+        </p:spPr>
+        <p:style>
+          <a:lnRef idx="1">
+            <a:schemeClr val="accent1"/>
+          </a:lnRef>
+          <a:fillRef idx="3">
+            <a:schemeClr val="accent1"/>
+          </a:fillRef>
+          <a:effectRef idx="2">
+            <a:schemeClr val="accent1"/>
+          </a:effectRef>
+          <a:fontRef idx="minor">
+            <a:schemeClr val="lt1"/>
+          </a:fontRef>
+        </p:style>
+        <p:txBody>
+          <a:bodyPr rtlCol="0" anchor="ctr" wrap="square" tIns="127000" bIns="127000" lIns="152400" rIns="152400"/>
+          <a:lstStyle/>
+          <a:p>
+            <a:pPr algn="ctr"/>
+            <a:r>
+              <a:rPr sz="2800" b="1">
+                <a:solidFill>
+                  <a:srgbClr val="333333"/>
+                </a:solidFill>
+              </a:rPr>
+              <a:t>5 boroughs</a:t>
+            </a:r>
+          </a:p>
+          <a:p>
+            <a:r>
+              <a:rPr sz="1400" b="0">
+                <a:solidFill>
+                  <a:srgbClr val="333333"/>
+                </a:solidFill>
+              </a:rPr>
+              <a:t>Weather Impact Compared</a:t>
+            </a:r>
+          </a:p>
+        </p:txBody>
+      </p:sp>
+      <p:sp>
+        <p:nvSpPr>
+          <p:cNvPr id="9" name="Rounded Rectangle 8"/>
+          <p:cNvSpPr/>
+          <p:nvPr/>
+        </p:nvSpPr>
+        <p:spPr>
+          <a:xfrm>
+            <a:off x="400000" y="4600000"/>
+            <a:ext cx="11400000" cy="1000000"/>
           </a:xfrm>
           <a:prstGeom prst="roundRect">
             <a:avLst/>
@@ -17428,153 +17405,12 @@
           <a:p>
             <a:pPr algn="ctr"/>
             <a:r>
-              <a:rPr sz="1400" b="1">
+              <a:rPr sz="1300" b="1">
                 <a:solidFill>
                   <a:srgbClr val="333333"/>
                 </a:solidFill>
               </a:rPr>
-              <a:t>Actionable Next Step</a:t>
-            </a:r>
-          </a:p>
-          <a:p>
-            <a:r>
-              <a:rPr sz="1000" b="0">
-                <a:solidFill>
-                  <a:srgbClr val="333333"/>
-                </a:solidFill>
-              </a:rPr>
-              <a:t/>
-            </a:r>
-          </a:p>
-          <a:p>
-            <a:r>
-              <a:rPr sz="1200" b="0">
-                <a:solidFill>
-                  <a:srgbClr val="333333"/>
-                </a:solidFill>
-              </a:rPr>
-              <a:t>Integrate hourly weather forecasts into dispatch.</a:t>
-            </a:r>
-          </a:p>
-          <a:p>
-            <a:r>
-              <a:rPr sz="1200" b="0">
-                <a:solidFill>
-                  <a:srgbClr val="333333"/>
-                </a:solidFill>
-              </a:rPr>
-              <a:t>Trigger pre-positioning 2 hours before snow onset.</a:t>
-            </a:r>
-          </a:p>
-          <a:p>
-            <a:r>
-              <a:rPr sz="1200" b="0">
-                <a:solidFill>
-                  <a:srgbClr val="333333"/>
-                </a:solidFill>
-              </a:rPr>
-              <a:t>Track revenue-per-storm-hour as the KPI.</a:t>
-            </a:r>
-          </a:p>
-        </p:txBody>
-      </p:sp>
-      <p:sp>
-        <p:nvSpPr>
-          <p:cNvPr id="7" name="Rounded Rectangle 6"/>
-          <p:cNvSpPr/>
-          <p:nvPr/>
-        </p:nvSpPr>
-        <p:spPr>
-          <a:xfrm>
-            <a:off x="6100000" y="2800000"/>
-            <a:ext cx="5700000" cy="1800000"/>
-          </a:xfrm>
-          <a:prstGeom prst="roundRect">
-            <a:avLst/>
-          </a:prstGeom>
-          <a:solidFill>
-            <a:srgbClr val="E3F2FD"/>
-          </a:solidFill>
-          <a:ln>
-            <a:noFill/>
-          </a:ln>
-        </p:spPr>
-        <p:style>
-          <a:lnRef idx="1">
-            <a:schemeClr val="accent1"/>
-          </a:lnRef>
-          <a:fillRef idx="3">
-            <a:schemeClr val="accent1"/>
-          </a:fillRef>
-          <a:effectRef idx="2">
-            <a:schemeClr val="accent1"/>
-          </a:effectRef>
-          <a:fontRef idx="minor">
-            <a:schemeClr val="lt1"/>
-          </a:fontRef>
-        </p:style>
-        <p:txBody>
-          <a:bodyPr rtlCol="0" anchor="ctr" wrap="square" tIns="127000" bIns="127000" lIns="152400" rIns="152400"/>
-          <a:lstStyle/>
-          <a:p>
-            <a:pPr algn="ctr"/>
-            <a:r>
-              <a:rPr sz="1400" b="1">
-                <a:solidFill>
-                  <a:srgbClr val="333333"/>
-                </a:solidFill>
-              </a:rPr>
-              <a:t>Implementation Cost</a:t>
-            </a:r>
-          </a:p>
-          <a:p>
-            <a:r>
-              <a:rPr sz="1000" b="0">
-                <a:solidFill>
-                  <a:srgbClr val="333333"/>
-                </a:solidFill>
-              </a:rPr>
-              <a:t/>
-            </a:r>
-          </a:p>
-          <a:p>
-            <a:r>
-              <a:rPr sz="1200" b="0">
-                <a:solidFill>
-                  <a:srgbClr val="333333"/>
-                </a:solidFill>
-              </a:rPr>
-              <a:t>1-2 sprint integration with existing dispatch</a:t>
-            </a:r>
-          </a:p>
-          <a:p>
-            <a:r>
-              <a:rPr sz="1200" b="0">
-                <a:solidFill>
-                  <a:srgbClr val="333333"/>
-                </a:solidFill>
-              </a:rPr>
-              <a:t>Weather API subscription: $0 (Open-Meteo)</a:t>
-            </a:r>
-          </a:p>
-          <a:p>
-            <a:r>
-              <a:rPr sz="1200" b="0">
-                <a:solidFill>
-                  <a:srgbClr val="333333"/>
-                </a:solidFill>
-              </a:rPr>
-              <a:t>Snowpipe for real-time data: included in Snowflake</a:t>
-            </a:r>
-          </a:p>
-          <a:p>
-            <a:r>
-              <a:rPr sz="1200" b="0">
-                <a:solidFill>
-                  <a:srgbClr val="333333"/>
-                </a:solidFill>
-              </a:rPr>
-              <a:t>Alerting logic: 1 engineer, 2 weeks</a:t>
+              <a:t>Key Insight: Snow severity doubled (25.2 in vs. 11.6 in), causing rush-hour storm losses to exceed off-peak losses by 3-5x. Pre-positioning vehicles is the highest-value intervention.</a:t>
             </a:r>
           </a:p>
         </p:txBody>
@@ -17599,59 +17435,385 @@
       <p:grpSpPr/>
       <p:sp>
         <p:nvSpPr>
-          <p:cNvPr id="2" name="Text Placeholder 1"/>
-          <p:cNvSpPr>
-            <a:spLocks noGrp="1"/>
-          </p:cNvSpPr>
-          <p:nvPr>
-            <p:ph type="body" idx="13" sz="quarter"/>
+          <p:cNvPr id="2" name="Title 1"/>
+          <p:cNvSpPr>
+            <a:spLocks noGrp="1"/>
+          </p:cNvSpPr>
+          <p:nvPr>
+            <p:ph type="title"/>
           </p:nvPr>
         </p:nvSpPr>
         <p:spPr/>
         <p:txBody>
           <a:bodyPr/>
           <a:lstStyle/>
+          <a:p>
+            <a:r>
+              <a:t>The Business Question (NEW VERSION)</a:t>
+            </a:r>
+          </a:p>
+        </p:txBody>
+      </p:sp>
+      <p:sp>
+        <p:nvSpPr>
+          <p:cNvPr id="3" name="Content Placeholder 2"/>
+          <p:cNvSpPr>
+            <a:spLocks noGrp="1"/>
+          </p:cNvSpPr>
+          <p:nvPr>
+            <p:ph idx="1"/>
+          </p:nvPr>
+        </p:nvSpPr>
+        <p:spPr/>
+        <p:txBody>
+          <a:bodyPr/>
+          <a:lstStyle/>
           <a:p/>
         </p:txBody>
       </p:sp>
       <p:sp>
         <p:nvSpPr>
-          <p:cNvPr id="3" name="Title 2"/>
-          <p:cNvSpPr>
-            <a:spLocks noGrp="1"/>
-          </p:cNvSpPr>
-          <p:nvPr>
-            <p:ph type="title"/>
-          </p:nvPr>
-        </p:nvSpPr>
-        <p:spPr/>
-        <p:txBody>
-          <a:bodyPr/>
-          <a:lstStyle/>
-          <a:p>
-            <a:r>
-              <a:t>6</a:t>
-            </a:r>
-          </a:p>
-        </p:txBody>
-      </p:sp>
-      <p:sp>
-        <p:nvSpPr>
-          <p:cNvPr id="4" name="Subtitle 3"/>
-          <p:cNvSpPr>
-            <a:spLocks noGrp="1"/>
-          </p:cNvSpPr>
-          <p:nvPr>
-            <p:ph type="subTitle" idx="1"/>
-          </p:nvPr>
-        </p:nvSpPr>
-        <p:spPr/>
-        <p:txBody>
-          <a:bodyPr/>
-          <a:lstStyle/>
-          <a:p>
-            <a:r>
-              <a:t>Extensions: Beyond the Requirements</a:t>
+          <p:cNvPr id="4" name="Rectangle 3"/>
+          <p:cNvSpPr/>
+          <p:nvPr/>
+        </p:nvSpPr>
+        <p:spPr>
+          <a:xfrm>
+            <a:off x="0" y="800000"/>
+            <a:ext cx="12192000" cy="80000"/>
+          </a:xfrm>
+          <a:prstGeom prst="rect">
+            <a:avLst/>
+          </a:prstGeom>
+          <a:solidFill>
+            <a:srgbClr val="FE3082"/>
+          </a:solidFill>
+          <a:ln>
+            <a:noFill/>
+          </a:ln>
+        </p:spPr>
+        <p:style>
+          <a:lnRef idx="1">
+            <a:schemeClr val="accent1"/>
+          </a:lnRef>
+          <a:fillRef idx="3">
+            <a:schemeClr val="accent1"/>
+          </a:fillRef>
+          <a:effectRef idx="2">
+            <a:schemeClr val="accent1"/>
+          </a:effectRef>
+          <a:fontRef idx="minor">
+            <a:schemeClr val="lt1"/>
+          </a:fontRef>
+        </p:style>
+        <p:txBody>
+          <a:bodyPr rtlCol="0" anchor="ctr"/>
+          <a:lstStyle/>
+          <a:p>
+            <a:pPr algn="ctr"/>
+          </a:p>
+        </p:txBody>
+      </p:sp>
+      <p:sp>
+        <p:nvSpPr>
+          <p:cNvPr id="5" name="Rounded Rectangle 4"/>
+          <p:cNvSpPr/>
+          <p:nvPr/>
+        </p:nvSpPr>
+        <p:spPr>
+          <a:xfrm>
+            <a:off x="400000" y="1100000"/>
+            <a:ext cx="11400000" cy="1200000"/>
+          </a:xfrm>
+          <a:prstGeom prst="roundRect">
+            <a:avLst/>
+          </a:prstGeom>
+          <a:solidFill>
+            <a:srgbClr val="E3F2FD"/>
+          </a:solidFill>
+          <a:ln>
+            <a:noFill/>
+          </a:ln>
+        </p:spPr>
+        <p:style>
+          <a:lnRef idx="1">
+            <a:schemeClr val="accent1"/>
+          </a:lnRef>
+          <a:fillRef idx="3">
+            <a:schemeClr val="accent1"/>
+          </a:fillRef>
+          <a:effectRef idx="2">
+            <a:schemeClr val="accent1"/>
+          </a:effectRef>
+          <a:fontRef idx="minor">
+            <a:schemeClr val="lt1"/>
+          </a:fontRef>
+        </p:style>
+        <p:txBody>
+          <a:bodyPr rtlCol="0" anchor="ctr" wrap="square" tIns="127000" bIns="127000" lIns="152400" rIns="152400"/>
+          <a:lstStyle/>
+          <a:p>
+            <a:pPr algn="ctr"/>
+            <a:r>
+              <a:rPr sz="1600" b="1">
+                <a:solidFill>
+                  <a:srgbClr val="333333"/>
+                </a:solidFill>
+              </a:rPr>
+              <a:t>How does adverse weather affect taxi demand across NYC boroughs,</a:t>
+            </a:r>
+          </a:p>
+          <a:p>
+            <a:r>
+              <a:rPr sz="1600" b="1">
+                <a:solidFill>
+                  <a:srgbClr val="333333"/>
+                </a:solidFill>
+              </a:rPr>
+              <a:t>and how did those patterns shift between 2025 and 2026?</a:t>
+            </a:r>
+          </a:p>
+        </p:txBody>
+      </p:sp>
+      <p:sp>
+        <p:nvSpPr>
+          <p:cNvPr id="6" name="Rounded Rectangle 5"/>
+          <p:cNvSpPr/>
+          <p:nvPr/>
+        </p:nvSpPr>
+        <p:spPr>
+          <a:xfrm>
+            <a:off x="400000" y="2600000"/>
+            <a:ext cx="5400000" cy="2200000"/>
+          </a:xfrm>
+          <a:prstGeom prst="roundRect">
+            <a:avLst/>
+          </a:prstGeom>
+          <a:solidFill>
+            <a:srgbClr val="FFF3E0"/>
+          </a:solidFill>
+          <a:ln>
+            <a:noFill/>
+          </a:ln>
+        </p:spPr>
+        <p:style>
+          <a:lnRef idx="1">
+            <a:schemeClr val="accent1"/>
+          </a:lnRef>
+          <a:fillRef idx="3">
+            <a:schemeClr val="accent1"/>
+          </a:fillRef>
+          <a:effectRef idx="2">
+            <a:schemeClr val="accent1"/>
+          </a:effectRef>
+          <a:fontRef idx="minor">
+            <a:schemeClr val="lt1"/>
+          </a:fontRef>
+        </p:style>
+        <p:txBody>
+          <a:bodyPr rtlCol="0" anchor="ctr" wrap="square" tIns="127000" bIns="127000" lIns="152400" rIns="152400"/>
+          <a:lstStyle/>
+          <a:p>
+            <a:pPr algn="ctr"/>
+            <a:r>
+              <a:rPr sz="1400" b="1">
+                <a:solidFill>
+                  <a:srgbClr val="333333"/>
+                </a:solidFill>
+              </a:rPr>
+              <a:t>Why It Matters</a:t>
+            </a:r>
+          </a:p>
+          <a:p>
+            <a:r>
+              <a:rPr sz="1000" b="0">
+                <a:solidFill>
+                  <a:srgbClr val="333333"/>
+                </a:solidFill>
+              </a:rPr>
+              <a:t/>
+            </a:r>
+          </a:p>
+          <a:p>
+            <a:r>
+              <a:rPr sz="1200" b="0">
+                <a:solidFill>
+                  <a:srgbClr val="333333"/>
+                </a:solidFill>
+              </a:rPr>
+              <a:t>Fleet operators need to know where demand drops during storms</a:t>
+            </a:r>
+          </a:p>
+          <a:p>
+            <a:r>
+              <a:rPr sz="1200" b="0">
+                <a:solidFill>
+                  <a:srgbClr val="333333"/>
+                </a:solidFill>
+              </a:rPr>
+              <a:t>Surge pricing decisions depend on weather sensitivity by zone</a:t>
+            </a:r>
+          </a:p>
+          <a:p>
+            <a:r>
+              <a:rPr sz="1200" b="0">
+                <a:solidFill>
+                  <a:srgbClr val="333333"/>
+                </a:solidFill>
+              </a:rPr>
+              <a:t>NYC TLC planning benefits from quantified weather impact</a:t>
+            </a:r>
+          </a:p>
+        </p:txBody>
+      </p:sp>
+      <p:sp>
+        <p:nvSpPr>
+          <p:cNvPr id="7" name="Rounded Rectangle 6"/>
+          <p:cNvSpPr/>
+          <p:nvPr/>
+        </p:nvSpPr>
+        <p:spPr>
+          <a:xfrm>
+            <a:off x="6100000" y="2600000"/>
+            <a:ext cx="5700000" cy="2200000"/>
+          </a:xfrm>
+          <a:prstGeom prst="roundRect">
+            <a:avLst/>
+          </a:prstGeom>
+          <a:solidFill>
+            <a:srgbClr val="E8F5E9"/>
+          </a:solidFill>
+          <a:ln>
+            <a:noFill/>
+          </a:ln>
+        </p:spPr>
+        <p:style>
+          <a:lnRef idx="1">
+            <a:schemeClr val="accent1"/>
+          </a:lnRef>
+          <a:fillRef idx="3">
+            <a:schemeClr val="accent1"/>
+          </a:fillRef>
+          <a:effectRef idx="2">
+            <a:schemeClr val="accent1"/>
+          </a:effectRef>
+          <a:fontRef idx="minor">
+            <a:schemeClr val="lt1"/>
+          </a:fontRef>
+        </p:style>
+        <p:txBody>
+          <a:bodyPr rtlCol="0" anchor="ctr" wrap="square" tIns="127000" bIns="127000" lIns="152400" rIns="152400"/>
+          <a:lstStyle/>
+          <a:p>
+            <a:pPr algn="ctr"/>
+            <a:r>
+              <a:rPr sz="1400" b="1">
+                <a:solidFill>
+                  <a:srgbClr val="333333"/>
+                </a:solidFill>
+              </a:rPr>
+              <a:t>Scope</a:t>
+            </a:r>
+          </a:p>
+          <a:p>
+            <a:r>
+              <a:rPr sz="1000" b="0">
+                <a:solidFill>
+                  <a:srgbClr val="333333"/>
+                </a:solidFill>
+              </a:rPr>
+              <a:t/>
+            </a:r>
+          </a:p>
+          <a:p>
+            <a:r>
+              <a:rPr sz="1200" b="0">
+                <a:solidFill>
+                  <a:srgbClr val="333333"/>
+                </a:solidFill>
+              </a:rPr>
+              <a:t>Yellow + Green taxi, Jan-May 2025 vs Jan-May 2026</a:t>
+            </a:r>
+          </a:p>
+          <a:p>
+            <a:r>
+              <a:rPr sz="1200" b="0">
+                <a:solidFill>
+                  <a:srgbClr val="333333"/>
+                </a:solidFill>
+              </a:rPr>
+              <a:t>39.2 million trip records from S3</a:t>
+            </a:r>
+          </a:p>
+          <a:p>
+            <a:r>
+              <a:rPr sz="1200" b="0">
+                <a:solidFill>
+                  <a:srgbClr val="333333"/>
+                </a:solidFill>
+              </a:rPr>
+              <a:t>Weather enrichment: hourly NYC conditions (7,248 hrs)</a:t>
+            </a:r>
+          </a:p>
+          <a:p>
+            <a:r>
+              <a:rPr sz="1200" b="0">
+                <a:solidFill>
+                  <a:srgbClr val="333333"/>
+                </a:solidFill>
+              </a:rPr>
+              <a:t>265 taxi zones mapped to 5 boroughs</a:t>
+            </a:r>
+          </a:p>
+        </p:txBody>
+      </p:sp>
+      <p:sp>
+        <p:nvSpPr>
+          <p:cNvPr id="8" name="Rounded Rectangle 7"/>
+          <p:cNvSpPr/>
+          <p:nvPr/>
+        </p:nvSpPr>
+        <p:spPr>
+          <a:xfrm>
+            <a:off x="400000" y="5100000"/>
+            <a:ext cx="11400000" cy="1000000"/>
+          </a:xfrm>
+          <a:prstGeom prst="roundRect">
+            <a:avLst/>
+          </a:prstGeom>
+          <a:solidFill>
+            <a:srgbClr val="FCE4EC"/>
+          </a:solidFill>
+          <a:ln>
+            <a:noFill/>
+          </a:ln>
+        </p:spPr>
+        <p:style>
+          <a:lnRef idx="1">
+            <a:schemeClr val="accent1"/>
+          </a:lnRef>
+          <a:fillRef idx="3">
+            <a:schemeClr val="accent1"/>
+          </a:fillRef>
+          <a:effectRef idx="2">
+            <a:schemeClr val="accent1"/>
+          </a:effectRef>
+          <a:fontRef idx="minor">
+            <a:schemeClr val="lt1"/>
+          </a:fontRef>
+        </p:style>
+        <p:txBody>
+          <a:bodyPr rtlCol="0" anchor="ctr" wrap="square" tIns="127000" bIns="127000" lIns="152400" rIns="152400"/>
+          <a:lstStyle/>
+          <a:p>
+            <a:pPr algn="ctr"/>
+            <a:r>
+              <a:rPr sz="1300" b="1">
+                <a:solidFill>
+                  <a:srgbClr val="333333"/>
+                </a:solidFill>
+              </a:rPr>
+              <a:t>How We Know We Answered It: Pre-aggregated mart (30,251 rows) with trip counts, revenue, and duration by borough, weather, year, month, hour, rush hour, night, weekend, and payment type.</a:t>
             </a:r>
           </a:p>
         </p:txBody>
@@ -17690,7 +17852,7 @@
           <a:lstStyle/>
           <a:p>
             <a:r>
-              <a:t>Extensions Overview</a:t>
+              <a:t>Year-over-Year Finding (NEW VERSION)</a:t>
             </a:r>
           </a:p>
         </p:txBody>
@@ -17764,7 +17926,280 @@
         <p:spPr>
           <a:xfrm>
             <a:off x="400000" y="1100000"/>
-            <a:ext cx="3500000" cy="2400000"/>
+            <a:ext cx="11400000" cy="1500000"/>
+          </a:xfrm>
+          <a:prstGeom prst="roundRect">
+            <a:avLst/>
+          </a:prstGeom>
+          <a:solidFill>
+            <a:srgbClr val="FCE4EC"/>
+          </a:solidFill>
+          <a:ln>
+            <a:noFill/>
+          </a:ln>
+        </p:spPr>
+        <p:style>
+          <a:lnRef idx="1">
+            <a:schemeClr val="accent1"/>
+          </a:lnRef>
+          <a:fillRef idx="3">
+            <a:schemeClr val="accent1"/>
+          </a:fillRef>
+          <a:effectRef idx="2">
+            <a:schemeClr val="accent1"/>
+          </a:effectRef>
+          <a:fontRef idx="minor">
+            <a:schemeClr val="lt1"/>
+          </a:fontRef>
+        </p:style>
+        <p:txBody>
+          <a:bodyPr rtlCol="0" anchor="ctr" wrap="square" tIns="127000" bIns="127000" lIns="152400" rIns="152400"/>
+          <a:lstStyle/>
+          <a:p>
+            <a:pPr algn="ctr"/>
+            <a:r>
+              <a:rPr sz="1300" b="1">
+                <a:solidFill>
+                  <a:srgbClr val="333333"/>
+                </a:solidFill>
+              </a:rPr>
+              <a:t>2025: Adverse weather INCREASED daytime taxi demand in Manhattan (+15.6%)</a:t>
+            </a:r>
+          </a:p>
+          <a:p>
+            <a:r>
+              <a:rPr sz="1300" b="1">
+                <a:solidFill>
+                  <a:srgbClr val="333333"/>
+                </a:solidFill>
+              </a:rPr>
+              <a:t>and Brooklyn (+20.6%) as riders switched from walking/transit to cabs.</a:t>
+            </a:r>
+          </a:p>
+          <a:p>
+            <a:r>
+              <a:rPr sz="1000" b="0">
+                <a:solidFill>
+                  <a:srgbClr val="333333"/>
+                </a:solidFill>
+              </a:rPr>
+              <a:t/>
+            </a:r>
+          </a:p>
+          <a:p>
+            <a:r>
+              <a:rPr sz="1300" b="1">
+                <a:solidFill>
+                  <a:srgbClr val="333333"/>
+                </a:solidFill>
+              </a:rPr>
+              <a:t>2026: That same weather DECREASED demand everywhere. Manhattan -18.4%,</a:t>
+            </a:r>
+          </a:p>
+          <a:p>
+            <a:r>
+              <a:rPr sz="1300" b="1">
+                <a:solidFill>
+                  <a:srgbClr val="333333"/>
+                </a:solidFill>
+              </a:rPr>
+              <a:t>Brooklyn -9.7%, Queens -24.3%, Bronx -24.1%.</a:t>
+            </a:r>
+          </a:p>
+        </p:txBody>
+      </p:sp>
+      <p:sp>
+        <p:nvSpPr>
+          <p:cNvPr id="6" name="Rounded Rectangle 5"/>
+          <p:cNvSpPr/>
+          <p:nvPr/>
+        </p:nvSpPr>
+        <p:spPr>
+          <a:xfrm>
+            <a:off x="400000" y="2900000"/>
+            <a:ext cx="5400000" cy="1600000"/>
+          </a:xfrm>
+          <a:prstGeom prst="roundRect">
+            <a:avLst/>
+          </a:prstGeom>
+          <a:solidFill>
+            <a:srgbClr val="E3F2FD"/>
+          </a:solidFill>
+          <a:ln>
+            <a:noFill/>
+          </a:ln>
+        </p:spPr>
+        <p:style>
+          <a:lnRef idx="1">
+            <a:schemeClr val="accent1"/>
+          </a:lnRef>
+          <a:fillRef idx="3">
+            <a:schemeClr val="accent1"/>
+          </a:fillRef>
+          <a:effectRef idx="2">
+            <a:schemeClr val="accent1"/>
+          </a:effectRef>
+          <a:fontRef idx="minor">
+            <a:schemeClr val="lt1"/>
+          </a:fontRef>
+        </p:style>
+        <p:txBody>
+          <a:bodyPr rtlCol="0" anchor="ctr" wrap="square" tIns="127000" bIns="127000" lIns="152400" rIns="152400"/>
+          <a:lstStyle/>
+          <a:p>
+            <a:pPr algn="ctr"/>
+            <a:r>
+              <a:rPr sz="1300" b="1">
+                <a:solidFill>
+                  <a:srgbClr val="333333"/>
+                </a:solidFill>
+              </a:rPr>
+              <a:t>Is the comparison fair?</a:t>
+            </a:r>
+          </a:p>
+          <a:p>
+            <a:r>
+              <a:rPr sz="1000" b="0">
+                <a:solidFill>
+                  <a:srgbClr val="333333"/>
+                </a:solidFill>
+              </a:rPr>
+              <a:t/>
+            </a:r>
+          </a:p>
+          <a:p>
+            <a:r>
+              <a:rPr sz="1100" b="0">
+                <a:solidFill>
+                  <a:srgbClr val="333333"/>
+                </a:solidFill>
+              </a:rPr>
+              <a:t>Same months (Jan-May), same vehicle types, same DQ</a:t>
+            </a:r>
+          </a:p>
+          <a:p>
+            <a:r>
+              <a:rPr sz="1100" b="0">
+                <a:solidFill>
+                  <a:srgbClr val="333333"/>
+                </a:solidFill>
+              </a:rPr>
+              <a:t>filters applied to both years. Weather matched on</a:t>
+            </a:r>
+          </a:p>
+          <a:p>
+            <a:r>
+              <a:rPr sz="1100" b="0">
+                <a:solidFill>
+                  <a:srgbClr val="333333"/>
+                </a:solidFill>
+              </a:rPr>
+              <a:t>same hourly granularity. 3.0% flagged invalid in both.</a:t>
+            </a:r>
+          </a:p>
+        </p:txBody>
+      </p:sp>
+      <p:sp>
+        <p:nvSpPr>
+          <p:cNvPr id="7" name="Rounded Rectangle 6"/>
+          <p:cNvSpPr/>
+          <p:nvPr/>
+        </p:nvSpPr>
+        <p:spPr>
+          <a:xfrm>
+            <a:off x="6100000" y="2900000"/>
+            <a:ext cx="5700000" cy="1600000"/>
+          </a:xfrm>
+          <a:prstGeom prst="roundRect">
+            <a:avLst/>
+          </a:prstGeom>
+          <a:solidFill>
+            <a:srgbClr val="FFF3E0"/>
+          </a:solidFill>
+          <a:ln>
+            <a:noFill/>
+          </a:ln>
+        </p:spPr>
+        <p:style>
+          <a:lnRef idx="1">
+            <a:schemeClr val="accent1"/>
+          </a:lnRef>
+          <a:fillRef idx="3">
+            <a:schemeClr val="accent1"/>
+          </a:fillRef>
+          <a:effectRef idx="2">
+            <a:schemeClr val="accent1"/>
+          </a:effectRef>
+          <a:fontRef idx="minor">
+            <a:schemeClr val="lt1"/>
+          </a:fontRef>
+        </p:style>
+        <p:txBody>
+          <a:bodyPr rtlCol="0" anchor="ctr" wrap="square" tIns="127000" bIns="127000" lIns="152400" rIns="152400"/>
+          <a:lstStyle/>
+          <a:p>
+            <a:pPr algn="ctr"/>
+            <a:r>
+              <a:rPr sz="1300" b="1">
+                <a:solidFill>
+                  <a:srgbClr val="333333"/>
+                </a:solidFill>
+              </a:rPr>
+              <a:t>What drove it?</a:t>
+            </a:r>
+          </a:p>
+          <a:p>
+            <a:r>
+              <a:rPr sz="1000" b="0">
+                <a:solidFill>
+                  <a:srgbClr val="333333"/>
+                </a:solidFill>
+              </a:rPr>
+              <a:t/>
+            </a:r>
+          </a:p>
+          <a:p>
+            <a:r>
+              <a:rPr sz="1100" b="0">
+                <a:solidFill>
+                  <a:srgbClr val="333333"/>
+                </a:solidFill>
+              </a:rPr>
+              <a:t>Snow severity doubled: 11.6 in (2025) vs 25.2 in (2026)</a:t>
+            </a:r>
+          </a:p>
+          <a:p>
+            <a:r>
+              <a:rPr sz="1100" b="0">
+                <a:solidFill>
+                  <a:srgbClr val="333333"/>
+                </a:solidFill>
+              </a:rPr>
+              <a:t>Snow hours: 84 vs 133. Rain still boosts demand both years.</a:t>
+            </a:r>
+          </a:p>
+          <a:p>
+            <a:r>
+              <a:rPr sz="1100" b="0">
+                <a:solidFill>
+                  <a:srgbClr val="333333"/>
+                </a:solidFill>
+              </a:rPr>
+              <a:t>Snow drove Manhattan -31.3%, Queens -31.4% in 2026.</a:t>
+            </a:r>
+          </a:p>
+        </p:txBody>
+      </p:sp>
+      <p:sp>
+        <p:nvSpPr>
+          <p:cNvPr id="8" name="Rounded Rectangle 7"/>
+          <p:cNvSpPr/>
+          <p:nvPr/>
+        </p:nvSpPr>
+        <p:spPr>
+          <a:xfrm>
+            <a:off x="400000" y="4800000"/>
+            <a:ext cx="11400000" cy="1000000"/>
           </a:xfrm>
           <a:prstGeom prst="roundRect">
             <a:avLst/>
@@ -17796,345 +18231,12 @@
           <a:p>
             <a:pPr algn="ctr"/>
             <a:r>
-              <a:rPr sz="1600" b="1">
+              <a:rPr sz="1200" b="1">
                 <a:solidFill>
                   <a:srgbClr val="333333"/>
                 </a:solidFill>
               </a:rPr>
-              <a:t>Streamlit Dashboard</a:t>
-            </a:r>
-          </a:p>
-          <a:p>
-            <a:r>
-              <a:rPr sz="1000" b="0">
-                <a:solidFill>
-                  <a:srgbClr val="333333"/>
-                </a:solidFill>
-              </a:rPr>
-              <a:t/>
-            </a:r>
-          </a:p>
-          <a:p>
-            <a:r>
-              <a:rPr sz="1200" b="0">
-                <a:solidFill>
-                  <a:srgbClr val="333333"/>
-                </a:solidFill>
-              </a:rPr>
-              <a:t>Deployed interactive app</a:t>
-            </a:r>
-          </a:p>
-          <a:p>
-            <a:r>
-              <a:rPr sz="1200" b="0">
-                <a:solidFill>
-                  <a:srgbClr val="333333"/>
-                </a:solidFill>
-              </a:rPr>
-              <a:t>6 progressive visualizations</a:t>
-            </a:r>
-          </a:p>
-          <a:p>
-            <a:r>
-              <a:rPr sz="1200" b="0">
-                <a:solidFill>
-                  <a:srgbClr val="333333"/>
-                </a:solidFill>
-              </a:rPr>
-              <a:t>Live Snowflake connection</a:t>
-            </a:r>
-          </a:p>
-          <a:p>
-            <a:r>
-              <a:rPr sz="1200" b="0">
-                <a:solidFill>
-                  <a:srgbClr val="333333"/>
-                </a:solidFill>
-              </a:rPr>
-              <a:t>Streamlit Community Cloud</a:t>
-            </a:r>
-          </a:p>
-          <a:p>
-            <a:r>
-              <a:rPr sz="1200" b="0">
-                <a:solidFill>
-                  <a:srgbClr val="333333"/>
-                </a:solidFill>
-              </a:rPr>
-              <a:t>CI/CD via GitHub Actions</a:t>
-            </a:r>
-          </a:p>
-        </p:txBody>
-      </p:sp>
-      <p:sp>
-        <p:nvSpPr>
-          <p:cNvPr id="6" name="Rounded Rectangle 5"/>
-          <p:cNvSpPr/>
-          <p:nvPr/>
-        </p:nvSpPr>
-        <p:spPr>
-          <a:xfrm>
-            <a:off x="4200000" y="1100000"/>
-            <a:ext cx="3500000" cy="2400000"/>
-          </a:xfrm>
-          <a:prstGeom prst="roundRect">
-            <a:avLst/>
-          </a:prstGeom>
-          <a:solidFill>
-            <a:srgbClr val="E3F2FD"/>
-          </a:solidFill>
-          <a:ln>
-            <a:noFill/>
-          </a:ln>
-        </p:spPr>
-        <p:style>
-          <a:lnRef idx="1">
-            <a:schemeClr val="accent1"/>
-          </a:lnRef>
-          <a:fillRef idx="3">
-            <a:schemeClr val="accent1"/>
-          </a:fillRef>
-          <a:effectRef idx="2">
-            <a:schemeClr val="accent1"/>
-          </a:effectRef>
-          <a:fontRef idx="minor">
-            <a:schemeClr val="lt1"/>
-          </a:fontRef>
-        </p:style>
-        <p:txBody>
-          <a:bodyPr rtlCol="0" anchor="ctr" wrap="square" tIns="127000" bIns="127000" lIns="152400" rIns="152400"/>
-          <a:lstStyle/>
-          <a:p>
-            <a:pPr algn="ctr"/>
-            <a:r>
-              <a:rPr sz="1600" b="1">
-                <a:solidFill>
-                  <a:srgbClr val="333333"/>
-                </a:solidFill>
-              </a:rPr>
-              <a:t>BigQuery ML</a:t>
-            </a:r>
-          </a:p>
-          <a:p>
-            <a:r>
-              <a:rPr sz="1000" b="0">
-                <a:solidFill>
-                  <a:srgbClr val="333333"/>
-                </a:solidFill>
-              </a:rPr>
-              <a:t/>
-            </a:r>
-          </a:p>
-          <a:p>
-            <a:r>
-              <a:rPr sz="1200" b="0">
-                <a:solidFill>
-                  <a:srgbClr val="333333"/>
-                </a:solidFill>
-              </a:rPr>
-              <a:t>K-Means trip segmentation</a:t>
-            </a:r>
-          </a:p>
-          <a:p>
-            <a:r>
-              <a:rPr sz="1200" b="0">
-                <a:solidFill>
-                  <a:srgbClr val="333333"/>
-                </a:solidFill>
-              </a:rPr>
-              <a:t>Tested k=3, 4, 5, 6</a:t>
-            </a:r>
-          </a:p>
-          <a:p>
-            <a:r>
-              <a:rPr sz="1200" b="0">
-                <a:solidFill>
-                  <a:srgbClr val="333333"/>
-                </a:solidFill>
-              </a:rPr>
-              <a:t>Davies-Bouldin evaluation</a:t>
-            </a:r>
-          </a:p>
-          <a:p>
-            <a:r>
-              <a:rPr sz="1200" b="0">
-                <a:solidFill>
-                  <a:srgbClr val="333333"/>
-                </a:solidFill>
-              </a:rPr>
-              <a:t>4 clusters selected</a:t>
-            </a:r>
-          </a:p>
-          <a:p>
-            <a:r>
-              <a:rPr sz="1200" b="0">
-                <a:solidFill>
-                  <a:srgbClr val="333333"/>
-                </a:solidFill>
-              </a:rPr>
-              <a:t>Zone-level behavior patterns</a:t>
-            </a:r>
-          </a:p>
-        </p:txBody>
-      </p:sp>
-      <p:sp>
-        <p:nvSpPr>
-          <p:cNvPr id="7" name="Rounded Rectangle 6"/>
-          <p:cNvSpPr/>
-          <p:nvPr/>
-        </p:nvSpPr>
-        <p:spPr>
-          <a:xfrm>
-            <a:off x="8000000" y="1100000"/>
-            <a:ext cx="3500000" cy="2400000"/>
-          </a:xfrm>
-          <a:prstGeom prst="roundRect">
-            <a:avLst/>
-          </a:prstGeom>
-          <a:solidFill>
-            <a:srgbClr val="FFF3E0"/>
-          </a:solidFill>
-          <a:ln>
-            <a:noFill/>
-          </a:ln>
-        </p:spPr>
-        <p:style>
-          <a:lnRef idx="1">
-            <a:schemeClr val="accent1"/>
-          </a:lnRef>
-          <a:fillRef idx="3">
-            <a:schemeClr val="accent1"/>
-          </a:fillRef>
-          <a:effectRef idx="2">
-            <a:schemeClr val="accent1"/>
-          </a:effectRef>
-          <a:fontRef idx="minor">
-            <a:schemeClr val="lt1"/>
-          </a:fontRef>
-        </p:style>
-        <p:txBody>
-          <a:bodyPr rtlCol="0" anchor="ctr" wrap="square" tIns="127000" bIns="127000" lIns="152400" rIns="152400"/>
-          <a:lstStyle/>
-          <a:p>
-            <a:pPr algn="ctr"/>
-            <a:r>
-              <a:rPr sz="1600" b="1">
-                <a:solidFill>
-                  <a:srgbClr val="333333"/>
-                </a:solidFill>
-              </a:rPr>
-              <a:t>Pipeline Orchestration</a:t>
-            </a:r>
-          </a:p>
-          <a:p>
-            <a:r>
-              <a:rPr sz="1000" b="0">
-                <a:solidFill>
-                  <a:srgbClr val="333333"/>
-                </a:solidFill>
-              </a:rPr>
-              <a:t/>
-            </a:r>
-          </a:p>
-          <a:p>
-            <a:r>
-              <a:rPr sz="1200" b="0">
-                <a:solidFill>
-                  <a:srgbClr val="333333"/>
-                </a:solidFill>
-              </a:rPr>
-              <a:t>Single-command execution</a:t>
-            </a:r>
-          </a:p>
-          <a:p>
-            <a:r>
-              <a:rPr sz="1200" b="0">
-                <a:solidFill>
-                  <a:srgbClr val="333333"/>
-                </a:solidFill>
-              </a:rPr>
-              <a:t>7 steps, ~6 min end-to-end</a:t>
-            </a:r>
-          </a:p>
-          <a:p>
-            <a:r>
-              <a:rPr sz="1200" b="0">
-                <a:solidFill>
-                  <a:srgbClr val="333333"/>
-                </a:solidFill>
-              </a:rPr>
-              <a:t>Idempotent (safe to re-run)</a:t>
-            </a:r>
-          </a:p>
-          <a:p>
-            <a:r>
-              <a:rPr sz="1200" b="0">
-                <a:solidFill>
-                  <a:srgbClr val="333333"/>
-                </a:solidFill>
-              </a:rPr>
-              <a:t>Fail-fast with clear errors</a:t>
-            </a:r>
-          </a:p>
-          <a:p>
-            <a:r>
-              <a:rPr sz="1200" b="0">
-                <a:solidFill>
-                  <a:srgbClr val="333333"/>
-                </a:solidFill>
-              </a:rPr>
-              <a:t>Row count reconciliation</a:t>
-            </a:r>
-          </a:p>
-        </p:txBody>
-      </p:sp>
-      <p:sp>
-        <p:nvSpPr>
-          <p:cNvPr id="8" name="Rounded Rectangle 7"/>
-          <p:cNvSpPr/>
-          <p:nvPr/>
-        </p:nvSpPr>
-        <p:spPr>
-          <a:xfrm>
-            <a:off x="400000" y="3800000"/>
-            <a:ext cx="11400000" cy="900000"/>
-          </a:xfrm>
-          <a:prstGeom prst="roundRect">
-            <a:avLst/>
-          </a:prstGeom>
-          <a:solidFill>
-            <a:srgbClr val="FCE4EC"/>
-          </a:solidFill>
-          <a:ln>
-            <a:noFill/>
-          </a:ln>
-        </p:spPr>
-        <p:style>
-          <a:lnRef idx="1">
-            <a:schemeClr val="accent1"/>
-          </a:lnRef>
-          <a:fillRef idx="3">
-            <a:schemeClr val="accent1"/>
-          </a:fillRef>
-          <a:effectRef idx="2">
-            <a:schemeClr val="accent1"/>
-          </a:effectRef>
-          <a:fontRef idx="minor">
-            <a:schemeClr val="lt1"/>
-          </a:fontRef>
-        </p:style>
-        <p:txBody>
-          <a:bodyPr rtlCol="0" anchor="ctr" wrap="square" tIns="127000" bIns="127000" lIns="152400" rIns="152400"/>
-          <a:lstStyle/>
-          <a:p>
-            <a:pPr algn="ctr"/>
-            <a:r>
-              <a:rPr sz="1300" b="0">
-                <a:solidFill>
-                  <a:srgbClr val="333333"/>
-                </a:solidFill>
-              </a:rPr>
-              <a:t>All three extensions are genuinely integrated into the core project. The Streamlit app queries the same Gold layer as Tableau, the ML model uses the same mart data, and orchestration builds the entire pipeline.</a:t>
+              <a:t>So What? Pre-position vehicles before forecasted snow events, prioritize rush-hour coverage. Rain = revenue opportunity (+11-22% demand). Snow = risk requiring proactive fleet response (-19% to -31% demand).</a:t>
             </a:r>
           </a:p>
         </p:txBody>
@@ -18173,7 +18275,7 @@
           <a:lstStyle/>
           <a:p>
             <a:r>
-              <a:t>Extension: BigQuery ML Clustering</a:t>
+              <a:t>Streamlit Dashboard (NEW VERSION - place before Tableau)</a:t>
             </a:r>
           </a:p>
         </p:txBody>
@@ -18247,7 +18349,7 @@
         <p:spPr>
           <a:xfrm>
             <a:off x="400000" y="1100000"/>
-            <a:ext cx="5400000" cy="2000000"/>
+            <a:ext cx="11400000" cy="800000"/>
           </a:xfrm>
           <a:prstGeom prst="roundRect">
             <a:avLst/>
@@ -18279,82 +18381,22 @@
           <a:p>
             <a:pPr algn="ctr"/>
             <a:r>
-              <a:rPr sz="1400" b="1">
+              <a:rPr sz="1400" b="0">
                 <a:solidFill>
                   <a:srgbClr val="333333"/>
                 </a:solidFill>
               </a:rPr>
-              <a:t>Approach</a:t>
-            </a:r>
-          </a:p>
-          <a:p>
-            <a:r>
-              <a:rPr sz="1000" b="0">
+              <a:t>[Insert Streamlit Dashboard Screenshot]</a:t>
+            </a:r>
+          </a:p>
+          <a:p>
+            <a:r>
+              <a:rPr sz="1200" b="0">
                 <a:solidFill>
                   <a:srgbClr val="333333"/>
                 </a:solidFill>
               </a:rPr>
-              <a:t/>
-            </a:r>
-          </a:p>
-          <a:p>
-            <a:r>
-              <a:rPr sz="1200" b="0">
-                <a:solidFill>
-                  <a:srgbClr val="333333"/>
-                </a:solidFill>
-              </a:rPr>
-              <a:t>Algorithm: K-Means (BigQuery ML)</a:t>
-            </a:r>
-          </a:p>
-          <a:p>
-            <a:r>
-              <a:rPr sz="1200" b="0">
-                <a:solidFill>
-                  <a:srgbClr val="333333"/>
-                </a:solidFill>
-              </a:rPr>
-              <a:t>Features: distance, duration, fare, tip, trip count,</a:t>
-            </a:r>
-          </a:p>
-          <a:p>
-            <a:r>
-              <a:rPr sz="1200" b="0">
-                <a:solidFill>
-                  <a:srgbClr val="333333"/>
-                </a:solidFill>
-              </a:rPr>
-              <a:t>  rush hour %, night %, weekend %, adverse weather %</a:t>
-            </a:r>
-          </a:p>
-          <a:p>
-            <a:r>
-              <a:rPr sz="1200" b="0">
-                <a:solidFill>
-                  <a:srgbClr val="333333"/>
-                </a:solidFill>
-              </a:rPr>
-              <a:t>Evaluation: Davies-Bouldin Index</a:t>
-            </a:r>
-          </a:p>
-          <a:p>
-            <a:r>
-              <a:rPr sz="1200" b="0">
-                <a:solidFill>
-                  <a:srgbClr val="333333"/>
-                </a:solidFill>
-              </a:rPr>
-              <a:t>  k=3 (1.78), k=4 (1.42), k=5 (1.50), k=6 (1.40)</a:t>
-            </a:r>
-          </a:p>
-          <a:p>
-            <a:r>
-              <a:rPr sz="1200" b="1">
-                <a:solidFill>
-                  <a:srgbClr val="333333"/>
-                </a:solidFill>
-              </a:rPr>
-              <a:t>Selected: k=4 (best quality + interpretability balance)</a:t>
+              <a:t>Deployed on Streamlit Community Cloud | Live Snowflake connection | 6 interactive visualizations with borough tabs</a:t>
             </a:r>
           </a:p>
         </p:txBody>
@@ -18367,8 +18409,129 @@
         </p:nvSpPr>
         <p:spPr>
           <a:xfrm>
-            <a:off x="6100000" y="1100000"/>
-            <a:ext cx="5700000" cy="2000000"/>
+            <a:off x="400000" y="2100000"/>
+            <a:ext cx="5400000" cy="2400000"/>
+          </a:xfrm>
+          <a:prstGeom prst="roundRect">
+            <a:avLst/>
+          </a:prstGeom>
+          <a:solidFill>
+            <a:srgbClr val="E8F5E9"/>
+          </a:solidFill>
+          <a:ln>
+            <a:noFill/>
+          </a:ln>
+        </p:spPr>
+        <p:style>
+          <a:lnRef idx="1">
+            <a:schemeClr val="accent1"/>
+          </a:lnRef>
+          <a:fillRef idx="3">
+            <a:schemeClr val="accent1"/>
+          </a:fillRef>
+          <a:effectRef idx="2">
+            <a:schemeClr val="accent1"/>
+          </a:effectRef>
+          <a:fontRef idx="minor">
+            <a:schemeClr val="lt1"/>
+          </a:fontRef>
+        </p:style>
+        <p:txBody>
+          <a:bodyPr rtlCol="0" anchor="ctr" wrap="square" tIns="127000" bIns="127000" lIns="152400" rIns="152400"/>
+          <a:lstStyle/>
+          <a:p>
+            <a:pPr algn="ctr"/>
+            <a:r>
+              <a:rPr sz="1400" b="1">
+                <a:solidFill>
+                  <a:srgbClr val="333333"/>
+                </a:solidFill>
+              </a:rPr>
+              <a:t>6 Visualizations Tell the Story</a:t>
+            </a:r>
+          </a:p>
+          <a:p>
+            <a:r>
+              <a:rPr sz="1000" b="0">
+                <a:solidFill>
+                  <a:srgbClr val="333333"/>
+                </a:solidFill>
+              </a:rPr>
+              <a:t/>
+            </a:r>
+          </a:p>
+          <a:p>
+            <a:r>
+              <a:rPr sz="1100" b="0">
+                <a:solidFill>
+                  <a:srgbClr val="333333"/>
+                </a:solidFill>
+              </a:rPr>
+              <a:t>1. Monthly trip volume (YoY growth trend)</a:t>
+            </a:r>
+          </a:p>
+          <a:p>
+            <a:r>
+              <a:rPr sz="1100" b="0">
+                <a:solidFill>
+                  <a:srgbClr val="333333"/>
+                </a:solidFill>
+              </a:rPr>
+              <a:t>2. Weekday vs. weekend hourly demand patterns</a:t>
+            </a:r>
+          </a:p>
+          <a:p>
+            <a:r>
+              <a:rPr sz="1100" b="0">
+                <a:solidFill>
+                  <a:srgbClr val="333333"/>
+                </a:solidFill>
+              </a:rPr>
+              <a:t>3. Average trip cost by weather (stable across conditions)</a:t>
+            </a:r>
+          </a:p>
+          <a:p>
+            <a:r>
+              <a:rPr sz="1100" b="0">
+                <a:solidFill>
+                  <a:srgbClr val="333333"/>
+                </a:solidFill>
+              </a:rPr>
+              <a:t>4. Weather's demand effect flipped 2025 to 2026 (core finding)</a:t>
+            </a:r>
+          </a:p>
+          <a:p>
+            <a:r>
+              <a:rPr sz="1100" b="0">
+                <a:solidFill>
+                  <a:srgbClr val="333333"/>
+                </a:solidFill>
+              </a:rPr>
+              <a:t>5. Rain vs. snow breakdown (snow is the driver)</a:t>
+            </a:r>
+          </a:p>
+          <a:p>
+            <a:r>
+              <a:rPr sz="1100" b="0">
+                <a:solidFill>
+                  <a:srgbClr val="333333"/>
+                </a:solidFill>
+              </a:rPr>
+              <a:t>6. Revenue per storm-hour (dollar impact, rush vs off-peak)</a:t>
+            </a:r>
+          </a:p>
+        </p:txBody>
+      </p:sp>
+      <p:sp>
+        <p:nvSpPr>
+          <p:cNvPr id="7" name="Rounded Rectangle 6"/>
+          <p:cNvSpPr/>
+          <p:nvPr/>
+        </p:nvSpPr>
+        <p:spPr>
+          <a:xfrm>
+            <a:off x="6100000" y="2100000"/>
+            <a:ext cx="5700000" cy="2400000"/>
           </a:xfrm>
           <a:prstGeom prst="roundRect">
             <a:avLst/>
@@ -18405,7 +18568,7 @@
                   <a:srgbClr val="333333"/>
                 </a:solidFill>
               </a:rPr>
-              <a:t>4 Trip Segments Identified</a:t>
+              <a:t>Key Insights from the Dashboard</a:t>
             </a:r>
           </a:p>
           <a:p>
@@ -18420,113 +18583,52 @@
           </a:p>
           <a:p>
             <a:r>
-              <a:rPr sz="1200" b="0">
+              <a:rPr sz="1100" b="0">
                 <a:solidFill>
                   <a:srgbClr val="333333"/>
                 </a:solidFill>
               </a:rPr>
-              <a:t>Cluster 1 - Standard Trips: 5 mi, 23 min, $32 avg</a:t>
-            </a:r>
-          </a:p>
-          <a:p>
-            <a:r>
-              <a:rPr sz="1200" b="0">
+              <a:t>Manhattan: +15.6% demand in storms (2025) to -18.4% (2026)</a:t>
+            </a:r>
+          </a:p>
+          <a:p>
+            <a:r>
+              <a:rPr sz="1100" b="0">
                 <a:solidFill>
                   <a:srgbClr val="333333"/>
                 </a:solidFill>
               </a:rPr>
-              <a:t>Cluster 2 - High-Value Long: 9 mi, 28 min, $72 avg</a:t>
-            </a:r>
-          </a:p>
-          <a:p>
-            <a:r>
-              <a:rPr sz="1200" b="0">
+              <a:t>Snow drove -31% demand in Manhattan/Queens in 2026</a:t>
+            </a:r>
+          </a:p>
+          <a:p>
+            <a:r>
+              <a:rPr sz="1100" b="0">
                 <a:solidFill>
                   <a:srgbClr val="333333"/>
                 </a:solidFill>
               </a:rPr>
-              <a:t>Cluster 3 - Short Everyday: 2.4 mi, 15 min, $25 avg</a:t>
-            </a:r>
-          </a:p>
-          <a:p>
-            <a:r>
-              <a:rPr sz="1200" b="0">
+              <a:t>Rain STILL boosts demand (+11-22%) in both years</a:t>
+            </a:r>
+          </a:p>
+          <a:p>
+            <a:r>
+              <a:rPr sz="1100" b="0">
                 <a:solidFill>
                   <a:srgbClr val="333333"/>
                 </a:solidFill>
               </a:rPr>
-              <a:t>Cluster 4 - Slow/Congested: 7.6 mi, 36 min, $39 avg</a:t>
-            </a:r>
-          </a:p>
-          <a:p>
-            <a:r>
-              <a:rPr sz="1000" b="0">
+              <a:t>Trip cost stable across weather (volume, not price, changes)</a:t>
+            </a:r>
+          </a:p>
+          <a:p>
+            <a:r>
+              <a:rPr sz="1100" b="0">
                 <a:solidFill>
                   <a:srgbClr val="333333"/>
                 </a:solidFill>
               </a:rPr>
-              <a:t/>
-            </a:r>
-          </a:p>
-          <a:p>
-            <a:r>
-              <a:rPr sz="1200" b="1">
-                <a:solidFill>
-                  <a:srgbClr val="333333"/>
-                </a:solidFill>
-              </a:rPr>
-              <a:t>Short trips (Cluster 3) dominate: 375K of 470K sample</a:t>
-            </a:r>
-          </a:p>
-        </p:txBody>
-      </p:sp>
-      <p:sp>
-        <p:nvSpPr>
-          <p:cNvPr id="7" name="Rounded Rectangle 6"/>
-          <p:cNvSpPr/>
-          <p:nvPr/>
-        </p:nvSpPr>
-        <p:spPr>
-          <a:xfrm>
-            <a:off x="400000" y="3400000"/>
-            <a:ext cx="11400000" cy="900000"/>
-          </a:xfrm>
-          <a:prstGeom prst="roundRect">
-            <a:avLst/>
-          </a:prstGeom>
-          <a:solidFill>
-            <a:srgbClr val="E8F5E9"/>
-          </a:solidFill>
-          <a:ln>
-            <a:noFill/>
-          </a:ln>
-        </p:spPr>
-        <p:style>
-          <a:lnRef idx="1">
-            <a:schemeClr val="accent1"/>
-          </a:lnRef>
-          <a:fillRef idx="3">
-            <a:schemeClr val="accent1"/>
-          </a:fillRef>
-          <a:effectRef idx="2">
-            <a:schemeClr val="accent1"/>
-          </a:effectRef>
-          <a:fontRef idx="minor">
-            <a:schemeClr val="lt1"/>
-          </a:fontRef>
-        </p:style>
-        <p:txBody>
-          <a:bodyPr rtlCol="0" anchor="ctr" wrap="square" tIns="127000" bIns="127000" lIns="152400" rIns="152400"/>
-          <a:lstStyle/>
-          <a:p>
-            <a:pPr algn="ctr"/>
-            <a:r>
-              <a:rPr sz="1200" b="0">
-                <a:solidFill>
-                  <a:srgbClr val="333333"/>
-                </a:solidFill>
-              </a:rPr>
-              <a:t>Key Finding: Weather showed minimal variation across clusters (~10% adverse in all 4). This confirms weather impacts demand volume (fewer trips happen) rather than trip characteristics (distance, fare, duration stay the same). Independently validates the core Streamlit finding.</a:t>
+              <a:t>Rush-hour storm losses exceed off-peak by 3-5x</a:t>
             </a:r>
           </a:p>
         </p:txBody>
@@ -18565,7 +18667,7 @@
           <a:lstStyle/>
           <a:p>
             <a:r>
-              <a:t>Extension: Pipeline Orchestration</a:t>
+              <a:t>Recommendation (NEW VERSION)</a:t>
             </a:r>
           </a:p>
         </p:txBody>
@@ -18639,13 +18741,13 @@
         <p:spPr>
           <a:xfrm>
             <a:off x="400000" y="1100000"/>
-            <a:ext cx="5400000" cy="2800000"/>
+            <a:ext cx="11400000" cy="1400000"/>
           </a:xfrm>
           <a:prstGeom prst="roundRect">
             <a:avLst/>
           </a:prstGeom>
           <a:solidFill>
-            <a:srgbClr val="FFF3E0"/>
+            <a:srgbClr val="FCE4EC"/>
           </a:solidFill>
           <a:ln>
             <a:noFill/>
@@ -18676,7 +18778,17 @@
                   <a:srgbClr val="333333"/>
                 </a:solidFill>
               </a:rPr>
-              <a:t>One Command, Full Pipeline</a:t>
+              <a:t>Implement a storm-response protocol: pre-position 15-20% more vehicles in Manhattan and</a:t>
+            </a:r>
+          </a:p>
+          <a:p>
+            <a:r>
+              <a:rPr sz="1400" b="1">
+                <a:solidFill>
+                  <a:srgbClr val="333333"/>
+                </a:solidFill>
+              </a:rPr>
+              <a:t>Brooklyn during forecasted snow events, with priority coverage during rush hours (7-10 AM, 4-7 PM).</a:t>
             </a:r>
           </a:p>
           <a:p>
@@ -18691,92 +18803,12 @@
           </a:p>
           <a:p>
             <a:r>
-              <a:rPr sz="1300" b="1">
+              <a:rPr sz="1200" b="0">
                 <a:solidFill>
                   <a:srgbClr val="333333"/>
                 </a:solidFill>
               </a:rPr>
-              <a:t>python pipeline/orchestrate.py</a:t>
-            </a:r>
-          </a:p>
-          <a:p>
-            <a:r>
-              <a:rPr sz="1000" b="0">
-                <a:solidFill>
-                  <a:srgbClr val="333333"/>
-                </a:solidFill>
-              </a:rPr>
-              <a:t/>
-            </a:r>
-          </a:p>
-          <a:p>
-            <a:r>
-              <a:rPr sz="1200" b="0">
-                <a:solidFill>
-                  <a:srgbClr val="333333"/>
-                </a:solidFill>
-              </a:rPr>
-              <a:t>Step 1: Create Bronze infrastructure (stage, tables)</a:t>
-            </a:r>
-          </a:p>
-          <a:p>
-            <a:r>
-              <a:rPr sz="1200" b="0">
-                <a:solidFill>
-                  <a:srgbClr val="333333"/>
-                </a:solidFill>
-              </a:rPr>
-              <a:t>Step 2: Load taxi + zone data from S3 (39.2M rows)</a:t>
-            </a:r>
-          </a:p>
-          <a:p>
-            <a:r>
-              <a:rPr sz="1200" b="0">
-                <a:solidFill>
-                  <a:srgbClr val="333333"/>
-                </a:solidFill>
-              </a:rPr>
-              <a:t>Step 3: Fetch weather from Open-Meteo API (7,248 hrs)</a:t>
-            </a:r>
-          </a:p>
-          <a:p>
-            <a:r>
-              <a:rPr sz="1200" b="0">
-                <a:solidFill>
-                  <a:srgbClr val="333333"/>
-                </a:solidFill>
-              </a:rPr>
-              <a:t>Step 4: Verify Bronze row counts (reconciliation)</a:t>
-            </a:r>
-          </a:p>
-          <a:p>
-            <a:r>
-              <a:rPr sz="1200" b="0">
-                <a:solidFill>
-                  <a:srgbClr val="333333"/>
-                </a:solidFill>
-              </a:rPr>
-              <a:t>Step 5: dbt run (Silver + Gold transformations)</a:t>
-            </a:r>
-          </a:p>
-          <a:p>
-            <a:r>
-              <a:rPr sz="1200" b="0">
-                <a:solidFill>
-                  <a:srgbClr val="333333"/>
-                </a:solidFill>
-              </a:rPr>
-              <a:t>Step 6: dbt test (32 automated quality checks)</a:t>
-            </a:r>
-          </a:p>
-          <a:p>
-            <a:r>
-              <a:rPr sz="1200" b="0">
-                <a:solidFill>
-                  <a:srgbClr val="333333"/>
-                </a:solidFill>
-              </a:rPr>
-              <a:t>Step 7: Print summary with counts at every layer</a:t>
+              <a:t>Rain events remain a revenue opportunity (demand increases +11-22%), so maintain or expand coverage during rain.</a:t>
             </a:r>
           </a:p>
         </p:txBody>
@@ -18789,8 +18821,8 @@
         </p:nvSpPr>
         <p:spPr>
           <a:xfrm>
-            <a:off x="6100000" y="1100000"/>
-            <a:ext cx="5700000" cy="2800000"/>
+            <a:off x="400000" y="2800000"/>
+            <a:ext cx="5400000" cy="1800000"/>
           </a:xfrm>
           <a:prstGeom prst="roundRect">
             <a:avLst/>
@@ -18827,7 +18859,7 @@
                   <a:srgbClr val="333333"/>
                 </a:solidFill>
               </a:rPr>
-              <a:t>Design Properties</a:t>
+              <a:t>Actionable Next Step</a:t>
             </a:r>
           </a:p>
           <a:p>
@@ -18842,112 +18874,32 @@
           </a:p>
           <a:p>
             <a:r>
-              <a:rPr sz="1300" b="1">
+              <a:rPr sz="1200" b="0">
                 <a:solidFill>
                   <a:srgbClr val="333333"/>
                 </a:solidFill>
               </a:rPr>
-              <a:t>Idempotent</a:t>
-            </a:r>
-          </a:p>
-          <a:p>
-            <a:r>
-              <a:rPr sz="1100" b="0">
+              <a:t>Integrate hourly weather forecasts into dispatch.</a:t>
+            </a:r>
+          </a:p>
+          <a:p>
+            <a:r>
+              <a:rPr sz="1200" b="0">
                 <a:solidFill>
                   <a:srgbClr val="333333"/>
                 </a:solidFill>
               </a:rPr>
-              <a:t>  CREATE OR REPLACE + COPY INTO means</a:t>
-            </a:r>
-          </a:p>
-          <a:p>
-            <a:r>
-              <a:rPr sz="1100" b="0">
+              <a:t>Trigger pre-positioning 2 hours before snow onset.</a:t>
+            </a:r>
+          </a:p>
+          <a:p>
+            <a:r>
+              <a:rPr sz="1200" b="0">
                 <a:solidFill>
                   <a:srgbClr val="333333"/>
                 </a:solidFill>
               </a:rPr>
-              <a:t>  re-running never duplicates data</a:t>
-            </a:r>
-          </a:p>
-          <a:p>
-            <a:r>
-              <a:rPr sz="1000" b="0">
-                <a:solidFill>
-                  <a:srgbClr val="333333"/>
-                </a:solidFill>
-              </a:rPr>
-              <a:t/>
-            </a:r>
-          </a:p>
-          <a:p>
-            <a:r>
-              <a:rPr sz="1300" b="1">
-                <a:solidFill>
-                  <a:srgbClr val="333333"/>
-                </a:solidFill>
-              </a:rPr>
-              <a:t>Fail-Fast</a:t>
-            </a:r>
-          </a:p>
-          <a:p>
-            <a:r>
-              <a:rPr sz="1100" b="0">
-                <a:solidFill>
-                  <a:srgbClr val="333333"/>
-                </a:solidFill>
-              </a:rPr>
-              <a:t>  Any step failure stops immediately</a:t>
-            </a:r>
-          </a:p>
-          <a:p>
-            <a:r>
-              <a:rPr sz="1100" b="0">
-                <a:solidFill>
-                  <a:srgbClr val="333333"/>
-                </a:solidFill>
-              </a:rPr>
-              <a:t>  with a clear error message</a:t>
-            </a:r>
-          </a:p>
-          <a:p>
-            <a:r>
-              <a:rPr sz="1000" b="0">
-                <a:solidFill>
-                  <a:srgbClr val="333333"/>
-                </a:solidFill>
-              </a:rPr>
-              <a:t/>
-            </a:r>
-          </a:p>
-          <a:p>
-            <a:r>
-              <a:rPr sz="1300" b="1">
-                <a:solidFill>
-                  <a:srgbClr val="333333"/>
-                </a:solidFill>
-              </a:rPr>
-              <a:t>Verified</a:t>
-            </a:r>
-          </a:p>
-          <a:p>
-            <a:r>
-              <a:rPr sz="1100" b="0">
-                <a:solidFill>
-                  <a:srgbClr val="333333"/>
-                </a:solidFill>
-              </a:rPr>
-              <a:t>  Row counts checked against expected</a:t>
-            </a:r>
-          </a:p>
-          <a:p>
-            <a:r>
-              <a:rPr sz="1100" b="0">
-                <a:solidFill>
-                  <a:srgbClr val="333333"/>
-                </a:solidFill>
-              </a:rPr>
-              <a:t>  minimums before proceeding to next step</a:t>
+              <a:t>Track revenue-per-storm-hour as the KPI.</a:t>
             </a:r>
           </a:p>
         </p:txBody>
@@ -18960,8 +18912,8 @@
         </p:nvSpPr>
         <p:spPr>
           <a:xfrm>
-            <a:off x="400000" y="4200000"/>
-            <a:ext cx="11400000" cy="700000"/>
+            <a:off x="6100000" y="2800000"/>
+            <a:ext cx="5700000" cy="1800000"/>
           </a:xfrm>
           <a:prstGeom prst="roundRect">
             <a:avLst/>
@@ -18993,12 +18945,1537 @@
           <a:p>
             <a:pPr algn="ctr"/>
             <a:r>
+              <a:rPr sz="1400" b="1">
+                <a:solidFill>
+                  <a:srgbClr val="333333"/>
+                </a:solidFill>
+              </a:rPr>
+              <a:t>Implementation Cost</a:t>
+            </a:r>
+          </a:p>
+          <a:p>
+            <a:r>
+              <a:rPr sz="1000" b="0">
+                <a:solidFill>
+                  <a:srgbClr val="333333"/>
+                </a:solidFill>
+              </a:rPr>
+              <a:t/>
+            </a:r>
+          </a:p>
+          <a:p>
+            <a:r>
               <a:rPr sz="1200" b="0">
                 <a:solidFill>
                   <a:srgbClr val="333333"/>
                 </a:solidFill>
               </a:rPr>
-              <a:t>Any team member can rebuild the entire pipeline from scratch with one command (~6 min). This eliminates 'works on my machine' and proves results are fully reproducible.</a:t>
+              <a:t>1-2 sprint integration with existing dispatch</a:t>
+            </a:r>
+          </a:p>
+          <a:p>
+            <a:r>
+              <a:rPr sz="1200" b="0">
+                <a:solidFill>
+                  <a:srgbClr val="333333"/>
+                </a:solidFill>
+              </a:rPr>
+              <a:t>Weather API subscription: $0 (Open-Meteo)</a:t>
+            </a:r>
+          </a:p>
+          <a:p>
+            <a:r>
+              <a:rPr sz="1200" b="0">
+                <a:solidFill>
+                  <a:srgbClr val="333333"/>
+                </a:solidFill>
+              </a:rPr>
+              <a:t>Snowpipe for real-time data: included in Snowflake</a:t>
+            </a:r>
+          </a:p>
+          <a:p>
+            <a:r>
+              <a:rPr sz="1200" b="0">
+                <a:solidFill>
+                  <a:srgbClr val="333333"/>
+                </a:solidFill>
+              </a:rPr>
+              <a:t>Alerting logic: 1 engineer, 2 weeks</a:t>
+            </a:r>
+          </a:p>
+        </p:txBody>
+      </p:sp>
+    </p:spTree>
+  </p:cSld>
+  <p:clrMapOvr>
+    <a:masterClrMapping/>
+  </p:clrMapOvr>
+</p:sld>
+</file>
+
+<file path=ppt/slides/slide35.xml><?xml version="1.0" encoding="utf-8"?>
+<p:sld xmlns:a="http://schemas.openxmlformats.org/drawingml/2006/main" xmlns:p="http://schemas.openxmlformats.org/presentationml/2006/main" xmlns:r="http://schemas.openxmlformats.org/officeDocument/2006/relationships">
+  <p:cSld>
+    <p:spTree>
+      <p:nvGrpSpPr>
+        <p:cNvPr id="1" name=""/>
+        <p:cNvGrpSpPr/>
+        <p:nvPr/>
+      </p:nvGrpSpPr>
+      <p:grpSpPr/>
+      <p:sp>
+        <p:nvSpPr>
+          <p:cNvPr id="2" name="Text Placeholder 1"/>
+          <p:cNvSpPr>
+            <a:spLocks noGrp="1"/>
+          </p:cNvSpPr>
+          <p:nvPr>
+            <p:ph type="body" idx="13" sz="quarter"/>
+          </p:nvPr>
+        </p:nvSpPr>
+        <p:spPr/>
+        <p:txBody>
+          <a:bodyPr/>
+          <a:lstStyle/>
+          <a:p/>
+        </p:txBody>
+      </p:sp>
+      <p:sp>
+        <p:nvSpPr>
+          <p:cNvPr id="3" name="Title 2"/>
+          <p:cNvSpPr>
+            <a:spLocks noGrp="1"/>
+          </p:cNvSpPr>
+          <p:nvPr>
+            <p:ph type="title"/>
+          </p:nvPr>
+        </p:nvSpPr>
+        <p:spPr/>
+        <p:txBody>
+          <a:bodyPr/>
+          <a:lstStyle/>
+          <a:p/>
+        </p:txBody>
+      </p:sp>
+      <p:sp>
+        <p:nvSpPr>
+          <p:cNvPr id="4" name="Subtitle 3"/>
+          <p:cNvSpPr>
+            <a:spLocks noGrp="1"/>
+          </p:cNvSpPr>
+          <p:nvPr>
+            <p:ph type="subTitle" idx="1"/>
+          </p:nvPr>
+        </p:nvSpPr>
+        <p:spPr/>
+        <p:txBody>
+          <a:bodyPr/>
+          <a:lstStyle/>
+          <a:p/>
+        </p:txBody>
+      </p:sp>
+      <p:sp>
+        <p:nvSpPr>
+          <p:cNvPr id="5" name="TextBox 4"/>
+          <p:cNvSpPr txBox="1"/>
+          <p:nvPr/>
+        </p:nvSpPr>
+        <p:spPr>
+          <a:xfrm>
+            <a:off x="574363" y="200000"/>
+            <a:ext cx="11000000" cy="500000"/>
+          </a:xfrm>
+          <a:prstGeom prst="rect">
+            <a:avLst/>
+          </a:prstGeom>
+          <a:noFill/>
+        </p:spPr>
+        <p:txBody>
+          <a:bodyPr wrap="square"/>
+          <a:lstStyle/>
+          <a:p>
+            <a:pPr algn="l">
+              <a:defRPr sz="2600" b="1">
+                <a:solidFill>
+                  <a:srgbClr val="002D72"/>
+                </a:solidFill>
+              </a:defRPr>
+            </a:pPr>
+            <a:r>
+              <a:t>Data Visualizations: Answering Our Business Question</a:t>
+            </a:r>
+          </a:p>
+        </p:txBody>
+      </p:sp>
+      <p:sp>
+        <p:nvSpPr>
+          <p:cNvPr id="6" name="Rectangle 5"/>
+          <p:cNvSpPr/>
+          <p:nvPr/>
+        </p:nvSpPr>
+        <p:spPr>
+          <a:xfrm>
+            <a:off x="0" y="700000"/>
+            <a:ext cx="12192000" cy="60000"/>
+          </a:xfrm>
+          <a:prstGeom prst="rect">
+            <a:avLst/>
+          </a:prstGeom>
+          <a:solidFill>
+            <a:srgbClr val="002D72"/>
+          </a:solidFill>
+          <a:ln>
+            <a:noFill/>
+          </a:ln>
+        </p:spPr>
+        <p:style>
+          <a:lnRef idx="1">
+            <a:schemeClr val="accent1"/>
+          </a:lnRef>
+          <a:fillRef idx="3">
+            <a:schemeClr val="accent1"/>
+          </a:fillRef>
+          <a:effectRef idx="2">
+            <a:schemeClr val="accent1"/>
+          </a:effectRef>
+          <a:fontRef idx="minor">
+            <a:schemeClr val="lt1"/>
+          </a:fontRef>
+        </p:style>
+        <p:txBody>
+          <a:bodyPr rtlCol="0" anchor="ctr"/>
+          <a:lstStyle/>
+          <a:p>
+            <a:pPr algn="ctr"/>
+          </a:p>
+        </p:txBody>
+      </p:sp>
+      <p:sp>
+        <p:nvSpPr>
+          <p:cNvPr id="7" name="Rounded Rectangle 6"/>
+          <p:cNvSpPr/>
+          <p:nvPr/>
+        </p:nvSpPr>
+        <p:spPr>
+          <a:xfrm>
+            <a:off x="400000" y="900000"/>
+            <a:ext cx="11400000" cy="600000"/>
+          </a:xfrm>
+          <a:prstGeom prst="roundRect">
+            <a:avLst/>
+          </a:prstGeom>
+          <a:solidFill>
+            <a:srgbClr val="F0F5FF"/>
+          </a:solidFill>
+          <a:ln w="19050">
+            <a:solidFill>
+              <a:srgbClr val="002D72"/>
+            </a:solidFill>
+          </a:ln>
+        </p:spPr>
+        <p:style>
+          <a:lnRef idx="1">
+            <a:schemeClr val="accent1"/>
+          </a:lnRef>
+          <a:fillRef idx="3">
+            <a:schemeClr val="accent1"/>
+          </a:fillRef>
+          <a:effectRef idx="2">
+            <a:schemeClr val="accent1"/>
+          </a:effectRef>
+          <a:fontRef idx="minor">
+            <a:schemeClr val="lt1"/>
+          </a:fontRef>
+        </p:style>
+        <p:txBody>
+          <a:bodyPr rtlCol="0" anchor="ctr" wrap="square" lIns="150000" rIns="150000" tIns="100000" bIns="100000"/>
+          <a:lstStyle/>
+          <a:p>
+            <a:pPr algn="ctr">
+              <a:defRPr sz="1300" b="1">
+                <a:solidFill>
+                  <a:srgbClr val="002D72"/>
+                </a:solidFill>
+              </a:defRPr>
+            </a:pPr>
+            <a:r>
+              <a:t>Business Question: How does adverse weather affect taxi demand across NYC boroughs, and how did those patterns shift between 2025 and 2026?</a:t>
+            </a:r>
+          </a:p>
+        </p:txBody>
+      </p:sp>
+      <p:sp>
+        <p:nvSpPr>
+          <p:cNvPr id="8" name="Rounded Rectangle 7"/>
+          <p:cNvSpPr/>
+          <p:nvPr/>
+        </p:nvSpPr>
+        <p:spPr>
+          <a:xfrm>
+            <a:off x="400000" y="1700000"/>
+            <a:ext cx="5400000" cy="2800000"/>
+          </a:xfrm>
+          <a:prstGeom prst="roundRect">
+            <a:avLst/>
+          </a:prstGeom>
+          <a:solidFill>
+            <a:srgbClr val="FFFFFF"/>
+          </a:solidFill>
+          <a:ln w="19050">
+            <a:solidFill>
+              <a:srgbClr val="002D72"/>
+            </a:solidFill>
+          </a:ln>
+        </p:spPr>
+        <p:style>
+          <a:lnRef idx="1">
+            <a:schemeClr val="accent1"/>
+          </a:lnRef>
+          <a:fillRef idx="3">
+            <a:schemeClr val="accent1"/>
+          </a:fillRef>
+          <a:effectRef idx="2">
+            <a:schemeClr val="accent1"/>
+          </a:effectRef>
+          <a:fontRef idx="minor">
+            <a:schemeClr val="lt1"/>
+          </a:fontRef>
+        </p:style>
+        <p:txBody>
+          <a:bodyPr rtlCol="0" anchor="ctr" wrap="square" lIns="150000" rIns="150000" tIns="100000" bIns="100000"/>
+          <a:lstStyle/>
+          <a:p>
+            <a:pPr algn="l">
+              <a:defRPr sz="1200" b="1">
+                <a:solidFill>
+                  <a:srgbClr val="000000"/>
+                </a:solidFill>
+              </a:defRPr>
+            </a:pPr>
+            <a:r>
+              <a:t>Tableau Dashboard (Maryam)</a:t>
+            </a:r>
+          </a:p>
+          <a:p>
+            <a:pPr algn="l">
+              <a:defRPr sz="1200">
+                <a:solidFill>
+                  <a:srgbClr val="000000"/>
+                </a:solidFill>
+              </a:defRPr>
+            </a:pPr>
+          </a:p>
+          <a:p>
+            <a:pPr algn="l">
+              <a:defRPr sz="1200">
+                <a:solidFill>
+                  <a:srgbClr val="000000"/>
+                </a:solidFill>
+              </a:defRPr>
+            </a:pPr>
+            <a:r>
+              <a:t>Tableau Public Link:</a:t>
+            </a:r>
+          </a:p>
+          <a:p>
+            <a:pPr algn="l">
+              <a:defRPr sz="1200">
+                <a:solidFill>
+                  <a:srgbClr val="000000"/>
+                </a:solidFill>
+              </a:defRPr>
+            </a:pPr>
+            <a:r>
+              <a:t>public.tableau.com/app/profile/</a:t>
+            </a:r>
+          </a:p>
+          <a:p>
+            <a:pPr algn="l">
+              <a:defRPr sz="1200">
+                <a:solidFill>
+                  <a:srgbClr val="000000"/>
+                </a:solidFill>
+              </a:defRPr>
+            </a:pPr>
+            <a:r>
+              <a:t>maryam.c3730/viz/amd_gold_vizs/</a:t>
+            </a:r>
+          </a:p>
+          <a:p>
+            <a:pPr algn="l">
+              <a:defRPr sz="1200">
+                <a:solidFill>
+                  <a:srgbClr val="000000"/>
+                </a:solidFill>
+              </a:defRPr>
+            </a:pPr>
+            <a:r>
+              <a:t>MonthlyWeatherShareShift</a:t>
+            </a:r>
+          </a:p>
+          <a:p>
+            <a:pPr algn="l">
+              <a:defRPr sz="1200">
+                <a:solidFill>
+                  <a:srgbClr val="000000"/>
+                </a:solidFill>
+              </a:defRPr>
+            </a:pPr>
+          </a:p>
+          <a:p>
+            <a:pPr algn="l">
+              <a:defRPr sz="1200">
+                <a:solidFill>
+                  <a:srgbClr val="000000"/>
+                </a:solidFill>
+              </a:defRPr>
+            </a:pPr>
+            <a:r>
+              <a:t>Connects to AMO_GOLD.MART_WEATHER_DEMAND</a:t>
+            </a:r>
+          </a:p>
+          <a:p>
+            <a:pPr algn="l">
+              <a:defRPr sz="1200">
+                <a:solidFill>
+                  <a:srgbClr val="000000"/>
+                </a:solidFill>
+              </a:defRPr>
+            </a:pPr>
+            <a:r>
+              <a:t>Borough-level weather share shift analysis</a:t>
+            </a:r>
+          </a:p>
+          <a:p>
+            <a:pPr algn="l">
+              <a:defRPr sz="1200">
+                <a:solidFill>
+                  <a:srgbClr val="000000"/>
+                </a:solidFill>
+              </a:defRPr>
+            </a:pPr>
+            <a:r>
+              <a:t>Monthly trends and geographic breakdown</a:t>
+            </a:r>
+          </a:p>
+        </p:txBody>
+      </p:sp>
+      <p:sp>
+        <p:nvSpPr>
+          <p:cNvPr id="9" name="Rounded Rectangle 8"/>
+          <p:cNvSpPr/>
+          <p:nvPr/>
+        </p:nvSpPr>
+        <p:spPr>
+          <a:xfrm>
+            <a:off x="6100000" y="1700000"/>
+            <a:ext cx="5700000" cy="2800000"/>
+          </a:xfrm>
+          <a:prstGeom prst="roundRect">
+            <a:avLst/>
+          </a:prstGeom>
+          <a:solidFill>
+            <a:srgbClr val="FFFFFF"/>
+          </a:solidFill>
+          <a:ln w="19050">
+            <a:solidFill>
+              <a:srgbClr val="002D72"/>
+            </a:solidFill>
+          </a:ln>
+        </p:spPr>
+        <p:style>
+          <a:lnRef idx="1">
+            <a:schemeClr val="accent1"/>
+          </a:lnRef>
+          <a:fillRef idx="3">
+            <a:schemeClr val="accent1"/>
+          </a:fillRef>
+          <a:effectRef idx="2">
+            <a:schemeClr val="accent1"/>
+          </a:effectRef>
+          <a:fontRef idx="minor">
+            <a:schemeClr val="lt1"/>
+          </a:fontRef>
+        </p:style>
+        <p:txBody>
+          <a:bodyPr rtlCol="0" anchor="ctr" wrap="square" lIns="150000" rIns="150000" tIns="100000" bIns="100000"/>
+          <a:lstStyle/>
+          <a:p>
+            <a:pPr algn="l">
+              <a:defRPr sz="1200" b="1">
+                <a:solidFill>
+                  <a:srgbClr val="000000"/>
+                </a:solidFill>
+              </a:defRPr>
+            </a:pPr>
+            <a:r>
+              <a:t>Streamlit Dashboard (Orlando)</a:t>
+            </a:r>
+          </a:p>
+          <a:p>
+            <a:pPr algn="l">
+              <a:defRPr sz="1200">
+                <a:solidFill>
+                  <a:srgbClr val="000000"/>
+                </a:solidFill>
+              </a:defRPr>
+            </a:pPr>
+          </a:p>
+          <a:p>
+            <a:pPr algn="l">
+              <a:defRPr sz="1200">
+                <a:solidFill>
+                  <a:srgbClr val="000000"/>
+                </a:solidFill>
+              </a:defRPr>
+            </a:pPr>
+            <a:r>
+              <a:t>Live App:</a:t>
+            </a:r>
+          </a:p>
+          <a:p>
+            <a:pPr algn="l">
+              <a:defRPr sz="1200">
+                <a:solidFill>
+                  <a:srgbClr val="000000"/>
+                </a:solidFill>
+              </a:defRPr>
+            </a:pPr>
+            <a:r>
+              <a:t>nyc-taxi-capstone.streamlit.app</a:t>
+            </a:r>
+          </a:p>
+          <a:p>
+            <a:pPr algn="l">
+              <a:defRPr sz="1200">
+                <a:solidFill>
+                  <a:srgbClr val="000000"/>
+                </a:solidFill>
+              </a:defRPr>
+            </a:pPr>
+          </a:p>
+          <a:p>
+            <a:pPr algn="l">
+              <a:defRPr sz="1200">
+                <a:solidFill>
+                  <a:srgbClr val="000000"/>
+                </a:solidFill>
+              </a:defRPr>
+            </a:pPr>
+            <a:r>
+              <a:t>6 interactive visualizations telling the story:</a:t>
+            </a:r>
+          </a:p>
+          <a:p>
+            <a:pPr algn="l">
+              <a:defRPr sz="1200">
+                <a:solidFill>
+                  <a:srgbClr val="000000"/>
+                </a:solidFill>
+              </a:defRPr>
+            </a:pPr>
+            <a:r>
+              <a:t>  Trip volume growth (YoY context)</a:t>
+            </a:r>
+          </a:p>
+          <a:p>
+            <a:pPr algn="l">
+              <a:defRPr sz="1200">
+                <a:solidFill>
+                  <a:srgbClr val="000000"/>
+                </a:solidFill>
+              </a:defRPr>
+            </a:pPr>
+            <a:r>
+              <a:t>  Hourly demand patterns (rush hour peaks)</a:t>
+            </a:r>
+          </a:p>
+          <a:p>
+            <a:pPr algn="l">
+              <a:defRPr sz="1200">
+                <a:solidFill>
+                  <a:srgbClr val="000000"/>
+                </a:solidFill>
+              </a:defRPr>
+            </a:pPr>
+            <a:r>
+              <a:t>  Weather impact on cost (stable pricing)</a:t>
+            </a:r>
+          </a:p>
+          <a:p>
+            <a:pPr algn="l">
+              <a:defRPr sz="1200">
+                <a:solidFill>
+                  <a:srgbClr val="000000"/>
+                </a:solidFill>
+              </a:defRPr>
+            </a:pPr>
+            <a:r>
+              <a:t>  Demand reversal: 2025 vs. 2026 (core finding)</a:t>
+            </a:r>
+          </a:p>
+          <a:p>
+            <a:pPr algn="l">
+              <a:defRPr sz="1200">
+                <a:solidFill>
+                  <a:srgbClr val="000000"/>
+                </a:solidFill>
+              </a:defRPr>
+            </a:pPr>
+            <a:r>
+              <a:t>  Rain vs. snow breakdown (snow drives shift)</a:t>
+            </a:r>
+          </a:p>
+          <a:p>
+            <a:pPr algn="l">
+              <a:defRPr sz="1200">
+                <a:solidFill>
+                  <a:srgbClr val="000000"/>
+                </a:solidFill>
+              </a:defRPr>
+            </a:pPr>
+            <a:r>
+              <a:t>  Revenue per storm-hour (dollar impact)</a:t>
+            </a:r>
+          </a:p>
+        </p:txBody>
+      </p:sp>
+      <p:sp>
+        <p:nvSpPr>
+          <p:cNvPr id="10" name="Rounded Rectangle 9"/>
+          <p:cNvSpPr/>
+          <p:nvPr/>
+        </p:nvSpPr>
+        <p:spPr>
+          <a:xfrm>
+            <a:off x="400000" y="4700000"/>
+            <a:ext cx="11400000" cy="1800000"/>
+          </a:xfrm>
+          <a:prstGeom prst="roundRect">
+            <a:avLst/>
+          </a:prstGeom>
+          <a:solidFill>
+            <a:srgbClr val="002D72"/>
+          </a:solidFill>
+          <a:ln w="19050">
+            <a:solidFill>
+              <a:srgbClr val="002D72"/>
+            </a:solidFill>
+          </a:ln>
+        </p:spPr>
+        <p:style>
+          <a:lnRef idx="1">
+            <a:schemeClr val="accent1"/>
+          </a:lnRef>
+          <a:fillRef idx="3">
+            <a:schemeClr val="accent1"/>
+          </a:fillRef>
+          <a:effectRef idx="2">
+            <a:schemeClr val="accent1"/>
+          </a:effectRef>
+          <a:fontRef idx="minor">
+            <a:schemeClr val="lt1"/>
+          </a:fontRef>
+        </p:style>
+        <p:txBody>
+          <a:bodyPr rtlCol="0" anchor="ctr" wrap="square" lIns="150000" rIns="150000" tIns="100000" bIns="100000"/>
+          <a:lstStyle/>
+          <a:p>
+            <a:pPr algn="l">
+              <a:defRPr sz="1100" b="1">
+                <a:solidFill>
+                  <a:srgbClr val="FFFFFF"/>
+                </a:solidFill>
+              </a:defRPr>
+            </a:pPr>
+            <a:r>
+              <a:t>Business Recommendation</a:t>
+            </a:r>
+          </a:p>
+          <a:p>
+            <a:pPr algn="l">
+              <a:defRPr sz="1100">
+                <a:solidFill>
+                  <a:srgbClr val="FFFFFF"/>
+                </a:solidFill>
+              </a:defRPr>
+            </a:pPr>
+          </a:p>
+          <a:p>
+            <a:pPr algn="l">
+              <a:defRPr sz="1100">
+                <a:solidFill>
+                  <a:srgbClr val="FFFFFF"/>
+                </a:solidFill>
+              </a:defRPr>
+            </a:pPr>
+            <a:r>
+              <a:t>Pre-position 15-20% more vehicles in Manhattan and Brooklyn during forecasted snow events,</a:t>
+            </a:r>
+          </a:p>
+          <a:p>
+            <a:pPr algn="l">
+              <a:defRPr sz="1100">
+                <a:solidFill>
+                  <a:srgbClr val="FFFFFF"/>
+                </a:solidFill>
+              </a:defRPr>
+            </a:pPr>
+            <a:r>
+              <a:t>with priority coverage during rush hours (7-10 AM, 4-7 PM).</a:t>
+            </a:r>
+          </a:p>
+          <a:p>
+            <a:pPr algn="l">
+              <a:defRPr sz="1100">
+                <a:solidFill>
+                  <a:srgbClr val="FFFFFF"/>
+                </a:solidFill>
+              </a:defRPr>
+            </a:pPr>
+          </a:p>
+          <a:p>
+            <a:pPr algn="l">
+              <a:defRPr sz="1100">
+                <a:solidFill>
+                  <a:srgbClr val="FFFFFF"/>
+                </a:solidFill>
+              </a:defRPr>
+            </a:pPr>
+            <a:r>
+              <a:t>A single storm-hour during rush hour now costs more in lost revenue than several off-peak</a:t>
+            </a:r>
+          </a:p>
+          <a:p>
+            <a:pPr algn="l">
+              <a:defRPr sz="1100">
+                <a:solidFill>
+                  <a:srgbClr val="FFFFFF"/>
+                </a:solidFill>
+              </a:defRPr>
+            </a:pPr>
+            <a:r>
+              <a:t>storm-hours combined. Rain remains a revenue opportunity (+11-22% demand boost).</a:t>
+            </a:r>
+          </a:p>
+          <a:p>
+            <a:pPr algn="l">
+              <a:defRPr sz="1100">
+                <a:solidFill>
+                  <a:srgbClr val="FFFFFF"/>
+                </a:solidFill>
+              </a:defRPr>
+            </a:pPr>
+          </a:p>
+          <a:p>
+            <a:pPr algn="l">
+              <a:defRPr sz="1100">
+                <a:solidFill>
+                  <a:srgbClr val="FFFFFF"/>
+                </a:solidFill>
+              </a:defRPr>
+            </a:pPr>
+            <a:r>
+              <a:t>Actionable step: Integrate hourly weather forecasts into dispatch, trigger pre-positioning</a:t>
+            </a:r>
+          </a:p>
+          <a:p>
+            <a:pPr algn="l">
+              <a:defRPr sz="1100">
+                <a:solidFill>
+                  <a:srgbClr val="FFFFFF"/>
+                </a:solidFill>
+              </a:defRPr>
+            </a:pPr>
+            <a:r>
+              <a:t>2 hours before snow onset, track revenue-per-storm-hour as the KPI.</a:t>
+            </a:r>
+          </a:p>
+        </p:txBody>
+      </p:sp>
+    </p:spTree>
+  </p:cSld>
+  <p:clrMapOvr>
+    <a:masterClrMapping/>
+  </p:clrMapOvr>
+</p:sld>
+</file>
+
+<file path=ppt/slides/slide36.xml><?xml version="1.0" encoding="utf-8"?>
+<p:sld xmlns:a="http://schemas.openxmlformats.org/drawingml/2006/main" xmlns:p="http://schemas.openxmlformats.org/presentationml/2006/main" xmlns:r="http://schemas.openxmlformats.org/officeDocument/2006/relationships">
+  <p:cSld>
+    <p:spTree>
+      <p:nvGrpSpPr>
+        <p:cNvPr id="1" name=""/>
+        <p:cNvGrpSpPr/>
+        <p:nvPr/>
+      </p:nvGrpSpPr>
+      <p:grpSpPr/>
+      <p:sp>
+        <p:nvSpPr>
+          <p:cNvPr id="2" name="Text Placeholder 1"/>
+          <p:cNvSpPr>
+            <a:spLocks noGrp="1"/>
+          </p:cNvSpPr>
+          <p:nvPr>
+            <p:ph type="body" idx="13" sz="quarter"/>
+          </p:nvPr>
+        </p:nvSpPr>
+        <p:spPr/>
+        <p:txBody>
+          <a:bodyPr/>
+          <a:lstStyle/>
+          <a:p/>
+        </p:txBody>
+      </p:sp>
+      <p:sp>
+        <p:nvSpPr>
+          <p:cNvPr id="3" name="Title 2"/>
+          <p:cNvSpPr>
+            <a:spLocks noGrp="1"/>
+          </p:cNvSpPr>
+          <p:nvPr>
+            <p:ph type="title"/>
+          </p:nvPr>
+        </p:nvSpPr>
+        <p:spPr/>
+        <p:txBody>
+          <a:bodyPr/>
+          <a:lstStyle/>
+          <a:p/>
+        </p:txBody>
+      </p:sp>
+      <p:sp>
+        <p:nvSpPr>
+          <p:cNvPr id="4" name="Subtitle 3"/>
+          <p:cNvSpPr>
+            <a:spLocks noGrp="1"/>
+          </p:cNvSpPr>
+          <p:nvPr>
+            <p:ph type="subTitle" idx="1"/>
+          </p:nvPr>
+        </p:nvSpPr>
+        <p:spPr/>
+        <p:txBody>
+          <a:bodyPr/>
+          <a:lstStyle/>
+          <a:p/>
+        </p:txBody>
+      </p:sp>
+      <p:sp>
+        <p:nvSpPr>
+          <p:cNvPr id="5" name="TextBox 4"/>
+          <p:cNvSpPr txBox="1"/>
+          <p:nvPr/>
+        </p:nvSpPr>
+        <p:spPr>
+          <a:xfrm>
+            <a:off x="574363" y="200000"/>
+            <a:ext cx="11000000" cy="500000"/>
+          </a:xfrm>
+          <a:prstGeom prst="rect">
+            <a:avLst/>
+          </a:prstGeom>
+          <a:noFill/>
+        </p:spPr>
+        <p:txBody>
+          <a:bodyPr wrap="square"/>
+          <a:lstStyle/>
+          <a:p>
+            <a:pPr algn="l">
+              <a:defRPr sz="2600" b="1">
+                <a:solidFill>
+                  <a:srgbClr val="002D72"/>
+                </a:solidFill>
+              </a:defRPr>
+            </a:pPr>
+            <a:r>
+              <a:t>Pipeline Data Flow: Row Count Summary</a:t>
+            </a:r>
+          </a:p>
+        </p:txBody>
+      </p:sp>
+      <p:sp>
+        <p:nvSpPr>
+          <p:cNvPr id="6" name="Rectangle 5"/>
+          <p:cNvSpPr/>
+          <p:nvPr/>
+        </p:nvSpPr>
+        <p:spPr>
+          <a:xfrm>
+            <a:off x="0" y="700000"/>
+            <a:ext cx="12192000" cy="60000"/>
+          </a:xfrm>
+          <a:prstGeom prst="rect">
+            <a:avLst/>
+          </a:prstGeom>
+          <a:solidFill>
+            <a:srgbClr val="002D72"/>
+          </a:solidFill>
+          <a:ln>
+            <a:noFill/>
+          </a:ln>
+        </p:spPr>
+        <p:style>
+          <a:lnRef idx="1">
+            <a:schemeClr val="accent1"/>
+          </a:lnRef>
+          <a:fillRef idx="3">
+            <a:schemeClr val="accent1"/>
+          </a:fillRef>
+          <a:effectRef idx="2">
+            <a:schemeClr val="accent1"/>
+          </a:effectRef>
+          <a:fontRef idx="minor">
+            <a:schemeClr val="lt1"/>
+          </a:fontRef>
+        </p:style>
+        <p:txBody>
+          <a:bodyPr rtlCol="0" anchor="ctr"/>
+          <a:lstStyle/>
+          <a:p>
+            <a:pPr algn="ctr"/>
+          </a:p>
+        </p:txBody>
+      </p:sp>
+      <p:sp>
+        <p:nvSpPr>
+          <p:cNvPr id="7" name="Rounded Rectangle 6"/>
+          <p:cNvSpPr/>
+          <p:nvPr/>
+        </p:nvSpPr>
+        <p:spPr>
+          <a:xfrm>
+            <a:off x="400000" y="900000"/>
+            <a:ext cx="3600000" cy="2600000"/>
+          </a:xfrm>
+          <a:prstGeom prst="roundRect">
+            <a:avLst/>
+          </a:prstGeom>
+          <a:solidFill>
+            <a:srgbClr val="CD7F32"/>
+          </a:solidFill>
+          <a:ln w="19050">
+            <a:solidFill>
+              <a:srgbClr val="002D72"/>
+            </a:solidFill>
+          </a:ln>
+        </p:spPr>
+        <p:style>
+          <a:lnRef idx="1">
+            <a:schemeClr val="accent1"/>
+          </a:lnRef>
+          <a:fillRef idx="3">
+            <a:schemeClr val="accent1"/>
+          </a:fillRef>
+          <a:effectRef idx="2">
+            <a:schemeClr val="accent1"/>
+          </a:effectRef>
+          <a:fontRef idx="minor">
+            <a:schemeClr val="lt1"/>
+          </a:fontRef>
+        </p:style>
+        <p:txBody>
+          <a:bodyPr rtlCol="0" anchor="ctr" wrap="square" lIns="150000" rIns="150000" tIns="100000" bIns="100000"/>
+          <a:lstStyle/>
+          <a:p>
+            <a:pPr algn="l">
+              <a:defRPr sz="1200" b="1">
+                <a:solidFill>
+                  <a:srgbClr val="FFFFFF"/>
+                </a:solidFill>
+              </a:defRPr>
+            </a:pPr>
+            <a:r>
+              <a:t>BRONZE (Raw Landing)</a:t>
+            </a:r>
+          </a:p>
+          <a:p>
+            <a:pPr algn="l">
+              <a:defRPr sz="1200">
+                <a:solidFill>
+                  <a:srgbClr val="FFFFFF"/>
+                </a:solidFill>
+              </a:defRPr>
+            </a:pPr>
+          </a:p>
+          <a:p>
+            <a:pPr algn="l">
+              <a:defRPr sz="1200">
+                <a:solidFill>
+                  <a:srgbClr val="FFFFFF"/>
+                </a:solidFill>
+              </a:defRPr>
+            </a:pPr>
+            <a:r>
+              <a:t>yellow_raw: 38,759,706</a:t>
+            </a:r>
+          </a:p>
+          <a:p>
+            <a:pPr algn="l">
+              <a:defRPr sz="1200">
+                <a:solidFill>
+                  <a:srgbClr val="FFFFFF"/>
+                </a:solidFill>
+              </a:defRPr>
+            </a:pPr>
+            <a:r>
+              <a:t>green_raw: 465,029</a:t>
+            </a:r>
+          </a:p>
+          <a:p>
+            <a:pPr algn="l">
+              <a:defRPr sz="1200">
+                <a:solidFill>
+                  <a:srgbClr val="FFFFFF"/>
+                </a:solidFill>
+              </a:defRPr>
+            </a:pPr>
+            <a:r>
+              <a:t>zone_lookup: 265</a:t>
+            </a:r>
+          </a:p>
+          <a:p>
+            <a:pPr algn="l">
+              <a:defRPr sz="1200">
+                <a:solidFill>
+                  <a:srgbClr val="FFFFFF"/>
+                </a:solidFill>
+              </a:defRPr>
+            </a:pPr>
+            <a:r>
+              <a:t>weather_hourly: 7,248</a:t>
+            </a:r>
+          </a:p>
+          <a:p>
+            <a:pPr algn="l">
+              <a:defRPr sz="1200">
+                <a:solidFill>
+                  <a:srgbClr val="FFFFFF"/>
+                </a:solidFill>
+              </a:defRPr>
+            </a:pPr>
+          </a:p>
+          <a:p>
+            <a:pPr algn="l">
+              <a:defRPr sz="1200">
+                <a:solidFill>
+                  <a:srgbClr val="FFFFFF"/>
+                </a:solidFill>
+              </a:defRPr>
+            </a:pPr>
+            <a:r>
+              <a:t>Total: 39,232,248 rows</a:t>
+            </a:r>
+          </a:p>
+          <a:p>
+            <a:pPr algn="l">
+              <a:defRPr sz="1200">
+                <a:solidFill>
+                  <a:srgbClr val="FFFFFF"/>
+                </a:solidFill>
+              </a:defRPr>
+            </a:pPr>
+            <a:r>
+              <a:t>0 rows lost from source</a:t>
+            </a:r>
+          </a:p>
+        </p:txBody>
+      </p:sp>
+      <p:sp>
+        <p:nvSpPr>
+          <p:cNvPr id="8" name="Rounded Rectangle 7"/>
+          <p:cNvSpPr/>
+          <p:nvPr/>
+        </p:nvSpPr>
+        <p:spPr>
+          <a:xfrm>
+            <a:off x="4300000" y="900000"/>
+            <a:ext cx="3600000" cy="2600000"/>
+          </a:xfrm>
+          <a:prstGeom prst="roundRect">
+            <a:avLst/>
+          </a:prstGeom>
+          <a:solidFill>
+            <a:srgbClr val="C0C0C0"/>
+          </a:solidFill>
+          <a:ln w="19050">
+            <a:solidFill>
+              <a:srgbClr val="002D72"/>
+            </a:solidFill>
+          </a:ln>
+        </p:spPr>
+        <p:style>
+          <a:lnRef idx="1">
+            <a:schemeClr val="accent1"/>
+          </a:lnRef>
+          <a:fillRef idx="3">
+            <a:schemeClr val="accent1"/>
+          </a:fillRef>
+          <a:effectRef idx="2">
+            <a:schemeClr val="accent1"/>
+          </a:effectRef>
+          <a:fontRef idx="minor">
+            <a:schemeClr val="lt1"/>
+          </a:fontRef>
+        </p:style>
+        <p:txBody>
+          <a:bodyPr rtlCol="0" anchor="ctr" wrap="square" lIns="150000" rIns="150000" tIns="100000" bIns="100000"/>
+          <a:lstStyle/>
+          <a:p>
+            <a:pPr algn="l">
+              <a:defRPr sz="1200" b="1">
+                <a:solidFill>
+                  <a:srgbClr val="000000"/>
+                </a:solidFill>
+              </a:defRPr>
+            </a:pPr>
+            <a:r>
+              <a:t>SILVER (Staged + DQ Flags)</a:t>
+            </a:r>
+          </a:p>
+          <a:p>
+            <a:pPr algn="l">
+              <a:defRPr sz="1200">
+                <a:solidFill>
+                  <a:srgbClr val="000000"/>
+                </a:solidFill>
+              </a:defRPr>
+            </a:pPr>
+          </a:p>
+          <a:p>
+            <a:pPr algn="l">
+              <a:defRPr sz="1200">
+                <a:solidFill>
+                  <a:srgbClr val="000000"/>
+                </a:solidFill>
+              </a:defRPr>
+            </a:pPr>
+            <a:r>
+              <a:t>stg_trips: 39,224,735</a:t>
+            </a:r>
+          </a:p>
+          <a:p>
+            <a:pPr algn="l">
+              <a:defRPr sz="1200">
+                <a:solidFill>
+                  <a:srgbClr val="000000"/>
+                </a:solidFill>
+              </a:defRPr>
+            </a:pPr>
+            <a:r>
+              <a:t>  (yellow + green unioned)</a:t>
+            </a:r>
+          </a:p>
+          <a:p>
+            <a:pPr algn="l">
+              <a:defRPr sz="1200">
+                <a:solidFill>
+                  <a:srgbClr val="000000"/>
+                </a:solidFill>
+              </a:defRPr>
+            </a:pPr>
+            <a:r>
+              <a:t>stg_zones: 265</a:t>
+            </a:r>
+          </a:p>
+          <a:p>
+            <a:pPr algn="l">
+              <a:defRPr sz="1200">
+                <a:solidFill>
+                  <a:srgbClr val="000000"/>
+                </a:solidFill>
+              </a:defRPr>
+            </a:pPr>
+            <a:r>
+              <a:t>stg_weather: 7,248</a:t>
+            </a:r>
+          </a:p>
+          <a:p>
+            <a:pPr algn="l">
+              <a:defRPr sz="1200">
+                <a:solidFill>
+                  <a:srgbClr val="000000"/>
+                </a:solidFill>
+              </a:defRPr>
+            </a:pPr>
+          </a:p>
+          <a:p>
+            <a:pPr algn="l">
+              <a:defRPr sz="1200">
+                <a:solidFill>
+                  <a:srgbClr val="000000"/>
+                </a:solidFill>
+              </a:defRPr>
+            </a:pPr>
+            <a:r>
+              <a:t>1,171,290 rows flagged invalid</a:t>
+            </a:r>
+          </a:p>
+          <a:p>
+            <a:pPr algn="l">
+              <a:defRPr sz="1200">
+                <a:solidFill>
+                  <a:srgbClr val="000000"/>
+                </a:solidFill>
+              </a:defRPr>
+            </a:pPr>
+            <a:r>
+              <a:t>(3.0% of trips) but KEPT</a:t>
+            </a:r>
+          </a:p>
+        </p:txBody>
+      </p:sp>
+      <p:sp>
+        <p:nvSpPr>
+          <p:cNvPr id="9" name="Rounded Rectangle 8"/>
+          <p:cNvSpPr/>
+          <p:nvPr/>
+        </p:nvSpPr>
+        <p:spPr>
+          <a:xfrm>
+            <a:off x="8200000" y="900000"/>
+            <a:ext cx="3600000" cy="2600000"/>
+          </a:xfrm>
+          <a:prstGeom prst="roundRect">
+            <a:avLst/>
+          </a:prstGeom>
+          <a:solidFill>
+            <a:srgbClr val="DAA520"/>
+          </a:solidFill>
+          <a:ln w="19050">
+            <a:solidFill>
+              <a:srgbClr val="002D72"/>
+            </a:solidFill>
+          </a:ln>
+        </p:spPr>
+        <p:style>
+          <a:lnRef idx="1">
+            <a:schemeClr val="accent1"/>
+          </a:lnRef>
+          <a:fillRef idx="3">
+            <a:schemeClr val="accent1"/>
+          </a:fillRef>
+          <a:effectRef idx="2">
+            <a:schemeClr val="accent1"/>
+          </a:effectRef>
+          <a:fontRef idx="minor">
+            <a:schemeClr val="lt1"/>
+          </a:fontRef>
+        </p:style>
+        <p:txBody>
+          <a:bodyPr rtlCol="0" anchor="ctr" wrap="square" lIns="150000" rIns="150000" tIns="100000" bIns="100000"/>
+          <a:lstStyle/>
+          <a:p>
+            <a:pPr algn="l">
+              <a:defRPr sz="1200" b="1">
+                <a:solidFill>
+                  <a:srgbClr val="000000"/>
+                </a:solidFill>
+              </a:defRPr>
+            </a:pPr>
+            <a:r>
+              <a:t>GOLD (Cleaned Marts)</a:t>
+            </a:r>
+          </a:p>
+          <a:p>
+            <a:pPr algn="l">
+              <a:defRPr sz="1200">
+                <a:solidFill>
+                  <a:srgbClr val="000000"/>
+                </a:solidFill>
+              </a:defRPr>
+            </a:pPr>
+          </a:p>
+          <a:p>
+            <a:pPr algn="l">
+              <a:defRPr sz="1200">
+                <a:solidFill>
+                  <a:srgbClr val="000000"/>
+                </a:solidFill>
+              </a:defRPr>
+            </a:pPr>
+            <a:r>
+              <a:t>fct_trips: 38,053,445</a:t>
+            </a:r>
+          </a:p>
+          <a:p>
+            <a:pPr algn="l">
+              <a:defRPr sz="1200">
+                <a:solidFill>
+                  <a:srgbClr val="000000"/>
+                </a:solidFill>
+              </a:defRPr>
+            </a:pPr>
+            <a:r>
+              <a:t>mart_weather_demand: 30,251</a:t>
+            </a:r>
+          </a:p>
+          <a:p>
+            <a:pPr algn="l">
+              <a:defRPr sz="1200">
+                <a:solidFill>
+                  <a:srgbClr val="000000"/>
+                </a:solidFill>
+              </a:defRPr>
+            </a:pPr>
+            <a:r>
+              <a:t>dim_zones: 265</a:t>
+            </a:r>
+          </a:p>
+          <a:p>
+            <a:pPr algn="l">
+              <a:defRPr sz="1200">
+                <a:solidFill>
+                  <a:srgbClr val="000000"/>
+                </a:solidFill>
+              </a:defRPr>
+            </a:pPr>
+            <a:r>
+              <a:t>dim_weather: 7,248</a:t>
+            </a:r>
+          </a:p>
+          <a:p>
+            <a:pPr algn="l">
+              <a:defRPr sz="1200">
+                <a:solidFill>
+                  <a:srgbClr val="000000"/>
+                </a:solidFill>
+              </a:defRPr>
+            </a:pPr>
+          </a:p>
+          <a:p>
+            <a:pPr algn="l">
+              <a:defRPr sz="1200">
+                <a:solidFill>
+                  <a:srgbClr val="000000"/>
+                </a:solidFill>
+              </a:defRPr>
+            </a:pPr>
+            <a:r>
+              <a:t>Invalid rows filtered (3.0%)</a:t>
+            </a:r>
+          </a:p>
+          <a:p>
+            <a:pPr algn="l">
+              <a:defRPr sz="1200">
+                <a:solidFill>
+                  <a:srgbClr val="000000"/>
+                </a:solidFill>
+              </a:defRPr>
+            </a:pPr>
+            <a:r>
+              <a:t>Non-borough zones excluded</a:t>
+            </a:r>
+          </a:p>
+        </p:txBody>
+      </p:sp>
+      <p:sp>
+        <p:nvSpPr>
+          <p:cNvPr id="10" name="TextBox 9"/>
+          <p:cNvSpPr txBox="1"/>
+          <p:nvPr/>
+        </p:nvSpPr>
+        <p:spPr>
+          <a:xfrm>
+            <a:off x="3850000" y="1800000"/>
+            <a:ext cx="600000" cy="400000"/>
+          </a:xfrm>
+          <a:prstGeom prst="rect">
+            <a:avLst/>
+          </a:prstGeom>
+          <a:noFill/>
+        </p:spPr>
+        <p:txBody>
+          <a:bodyPr wrap="square"/>
+          <a:lstStyle/>
+          <a:p>
+            <a:pPr algn="ctr">
+              <a:defRPr sz="2800" b="1">
+                <a:solidFill>
+                  <a:srgbClr val="002D72"/>
+                </a:solidFill>
+              </a:defRPr>
+            </a:pPr>
+            <a:r>
+              <a:t>→</a:t>
+            </a:r>
+          </a:p>
+        </p:txBody>
+      </p:sp>
+      <p:sp>
+        <p:nvSpPr>
+          <p:cNvPr id="11" name="TextBox 10"/>
+          <p:cNvSpPr txBox="1"/>
+          <p:nvPr/>
+        </p:nvSpPr>
+        <p:spPr>
+          <a:xfrm>
+            <a:off x="7750000" y="1800000"/>
+            <a:ext cx="600000" cy="400000"/>
+          </a:xfrm>
+          <a:prstGeom prst="rect">
+            <a:avLst/>
+          </a:prstGeom>
+          <a:noFill/>
+        </p:spPr>
+        <p:txBody>
+          <a:bodyPr wrap="square"/>
+          <a:lstStyle/>
+          <a:p>
+            <a:pPr algn="ctr">
+              <a:defRPr sz="2800" b="1">
+                <a:solidFill>
+                  <a:srgbClr val="002D72"/>
+                </a:solidFill>
+              </a:defRPr>
+            </a:pPr>
+            <a:r>
+              <a:t>→</a:t>
+            </a:r>
+          </a:p>
+        </p:txBody>
+      </p:sp>
+      <p:sp>
+        <p:nvSpPr>
+          <p:cNvPr id="12" name="Rounded Rectangle 11"/>
+          <p:cNvSpPr/>
+          <p:nvPr/>
+        </p:nvSpPr>
+        <p:spPr>
+          <a:xfrm>
+            <a:off x="400000" y="3800000"/>
+            <a:ext cx="11400000" cy="2700000"/>
+          </a:xfrm>
+          <a:prstGeom prst="roundRect">
+            <a:avLst/>
+          </a:prstGeom>
+          <a:solidFill>
+            <a:srgbClr val="F0F5FF"/>
+          </a:solidFill>
+          <a:ln w="19050">
+            <a:solidFill>
+              <a:srgbClr val="002D72"/>
+            </a:solidFill>
+          </a:ln>
+        </p:spPr>
+        <p:style>
+          <a:lnRef idx="1">
+            <a:schemeClr val="accent1"/>
+          </a:lnRef>
+          <a:fillRef idx="3">
+            <a:schemeClr val="accent1"/>
+          </a:fillRef>
+          <a:effectRef idx="2">
+            <a:schemeClr val="accent1"/>
+          </a:effectRef>
+          <a:fontRef idx="minor">
+            <a:schemeClr val="lt1"/>
+          </a:fontRef>
+        </p:style>
+        <p:txBody>
+          <a:bodyPr rtlCol="0" anchor="ctr" wrap="square" lIns="150000" rIns="150000" tIns="100000" bIns="100000"/>
+          <a:lstStyle/>
+          <a:p>
+            <a:pPr algn="l">
+              <a:defRPr sz="1100" b="1">
+                <a:solidFill>
+                  <a:srgbClr val="000000"/>
+                </a:solidFill>
+              </a:defRPr>
+            </a:pPr>
+            <a:r>
+              <a:t>Key Pipeline Metrics</a:t>
+            </a:r>
+          </a:p>
+          <a:p>
+            <a:pPr algn="l">
+              <a:defRPr sz="1100">
+                <a:solidFill>
+                  <a:srgbClr val="000000"/>
+                </a:solidFill>
+              </a:defRPr>
+            </a:pPr>
+          </a:p>
+          <a:p>
+            <a:pPr algn="l">
+              <a:defRPr sz="1100">
+                <a:solidFill>
+                  <a:srgbClr val="000000"/>
+                </a:solidFill>
+              </a:defRPr>
+            </a:pPr>
+            <a:r>
+              <a:t>Source to Bronze: 0 rows lost (perfect 1:1 load from S3)</a:t>
+            </a:r>
+          </a:p>
+          <a:p>
+            <a:pPr algn="l">
+              <a:defRPr sz="1100">
+                <a:solidFill>
+                  <a:srgbClr val="000000"/>
+                </a:solidFill>
+              </a:defRPr>
+            </a:pPr>
+            <a:r>
+              <a:t>Bronze to Silver: 0 rows removed (DQ issues flagged, not deleted)</a:t>
+            </a:r>
+          </a:p>
+          <a:p>
+            <a:pPr algn="l">
+              <a:defRPr sz="1100">
+                <a:solidFill>
+                  <a:srgbClr val="000000"/>
+                </a:solidFill>
+              </a:defRPr>
+            </a:pPr>
+            <a:r>
+              <a:t>Silver to Gold: 1,171,290 invalid rows filtered (3.0% of total)</a:t>
+            </a:r>
+          </a:p>
+          <a:p>
+            <a:pPr algn="l">
+              <a:defRPr sz="1100">
+                <a:solidFill>
+                  <a:srgbClr val="000000"/>
+                </a:solidFill>
+              </a:defRPr>
+            </a:pPr>
+            <a:r>
+              <a:t>Gold fact to mart: 75,406 non-borough trips excluded (0.2%), then aggregated to 30,251 rows</a:t>
+            </a:r>
+          </a:p>
+          <a:p>
+            <a:pPr algn="l">
+              <a:defRPr sz="1100">
+                <a:solidFill>
+                  <a:srgbClr val="000000"/>
+                </a:solidFill>
+              </a:defRPr>
+            </a:pPr>
+          </a:p>
+          <a:p>
+            <a:pPr algn="l">
+              <a:defRPr sz="1100">
+                <a:solidFill>
+                  <a:srgbClr val="000000"/>
+                </a:solidFill>
+              </a:defRPr>
+            </a:pPr>
+            <a:r>
+              <a:t>Pipeline runs end-to-end in ~6 minutes | Fully idempotent | Single command: python orchestrate.py</a:t>
+            </a:r>
+          </a:p>
+          <a:p>
+            <a:pPr algn="l">
+              <a:defRPr sz="1100">
+                <a:solidFill>
+                  <a:srgbClr val="000000"/>
+                </a:solidFill>
+              </a:defRPr>
+            </a:pPr>
+            <a:r>
+              <a:t>32 dbt tests passing (31 pass, 1 expected warn) | Reproducible by any team member</a:t>
             </a:r>
           </a:p>
         </p:txBody>
